--- a/ManakMitra_SIH2026.pptx
+++ b/ManakMitra_SIH2026.pptx
@@ -1,18 +1,21 @@
 
 <file path=ppt/presentation.xml><?xml version="1.0" encoding="utf-8"?>
-<p:presentation xmlns:a="http://schemas.openxmlformats.org/drawingml/2006/main" xmlns:r="http://schemas.openxmlformats.org/officeDocument/2006/relationships" xmlns:p="http://schemas.openxmlformats.org/presentationml/2006/main" saveSubsetFonts="1" autoCompressPictures="0">
+<p:presentation xmlns:a="http://schemas.openxmlformats.org/drawingml/2006/main" xmlns:r="http://schemas.openxmlformats.org/officeDocument/2006/relationships" xmlns:p="http://schemas.openxmlformats.org/presentationml/2006/main" autoCompressPictures="0">
   <p:sldMasterIdLst>
     <p:sldMasterId id="2147483648" r:id="rId1"/>
   </p:sldMasterIdLst>
+  <p:notesMasterIdLst>
+    <p:notesMasterId r:id="rId7"/>
+  </p:notesMasterIdLst>
   <p:sldIdLst>
-    <p:sldId id="256" r:id="rId7"/>
-    <p:sldId id="257" r:id="rId8"/>
-    <p:sldId id="258" r:id="rId9"/>
-    <p:sldId id="259" r:id="rId10"/>
-    <p:sldId id="260" r:id="rId11"/>
-    <p:sldId id="261" r:id="rId12"/>
+    <p:sldId id="256" r:id="rId3"/>
+    <p:sldId id="257" r:id="rId4"/>
+    <p:sldId id="258" r:id="rId5"/>
+    <p:sldId id="259" r:id="rId6"/>
+    <p:sldId id="260" r:id="rId8"/>
+    <p:sldId id="261" r:id="rId9"/>
   </p:sldIdLst>
-  <p:sldSz cx="12188952" cy="6858000" type="screen4x3"/>
+  <p:sldSz cx="12188825" cy="6858000" type="screen4x3"/>
   <p:notesSz cx="6858000" cy="9144000"/>
   <p:defaultTextStyle>
     <a:defPPr>
@@ -109,7 +112,418 @@
       </a:defRPr>
     </a:lvl9pPr>
   </p:defaultTextStyle>
+  <p:extLst>
+    <p:ext uri="{EFAFB233-063F-42B5-8137-9DF3F51BA10A}">
+      <p15:sldGuideLst xmlns:p15="http://schemas.microsoft.com/office/powerpoint/2012/main">
+        <p15:guide id="1" orient="horz" pos="2148" userDrawn="1">
+          <p15:clr>
+            <a:srgbClr val="A4A3A4"/>
+          </p15:clr>
+        </p15:guide>
+        <p15:guide id="2" pos="2867" userDrawn="1">
+          <p15:clr>
+            <a:srgbClr val="A4A3A4"/>
+          </p15:clr>
+        </p15:guide>
+      </p15:sldGuideLst>
+    </p:ext>
+  </p:extLst>
 </p:presentation>
+</file>
+
+<file path=ppt/notesMasters/notesMaster1.xml><?xml version="1.0" encoding="utf-8"?>
+<p:notesMaster xmlns:a="http://schemas.openxmlformats.org/drawingml/2006/main" xmlns:r="http://schemas.openxmlformats.org/officeDocument/2006/relationships" xmlns:p="http://schemas.openxmlformats.org/presentationml/2006/main">
+  <p:cSld>
+    <p:bg>
+      <p:bgRef idx="1001">
+        <a:schemeClr val="bg1"/>
+      </p:bgRef>
+    </p:bg>
+    <p:spTree>
+      <p:nvGrpSpPr>
+        <p:cNvPr id="1" name=""/>
+        <p:cNvGrpSpPr/>
+        <p:nvPr/>
+      </p:nvGrpSpPr>
+      <p:grpSpPr>
+        <a:xfrm>
+          <a:off x="0" y="0"/>
+          <a:ext cx="0" cy="0"/>
+          <a:chOff x="0" y="0"/>
+          <a:chExt cx="0" cy="0"/>
+        </a:xfrm>
+      </p:grpSpPr>
+      <p:sp>
+        <p:nvSpPr>
+          <p:cNvPr id="2" name="Header Placeholder 1"/>
+          <p:cNvSpPr>
+            <a:spLocks noGrp="1"/>
+          </p:cNvSpPr>
+          <p:nvPr>
+            <p:ph type="hdr" sz="quarter"/>
+          </p:nvPr>
+        </p:nvSpPr>
+        <p:spPr>
+          <a:xfrm>
+            <a:off x="0" y="0"/>
+            <a:ext cx="2971800" cy="458788"/>
+          </a:xfrm>
+          <a:prstGeom prst="rect">
+            <a:avLst/>
+          </a:prstGeom>
+        </p:spPr>
+        <p:txBody>
+          <a:bodyPr vert="horz" lIns="91440" tIns="45720" rIns="91440" bIns="45720" rtlCol="0"/>
+          <a:lstStyle>
+            <a:lvl1pPr algn="l">
+              <a:defRPr sz="1200"/>
+            </a:lvl1pPr>
+          </a:lstStyle>
+          <a:p>
+            <a:endParaRPr lang="en-US"/>
+          </a:p>
+        </p:txBody>
+      </p:sp>
+      <p:sp>
+        <p:nvSpPr>
+          <p:cNvPr id="3" name="Date Placeholder 2"/>
+          <p:cNvSpPr>
+            <a:spLocks noGrp="1"/>
+          </p:cNvSpPr>
+          <p:nvPr>
+            <p:ph type="dt" idx="1"/>
+          </p:nvPr>
+        </p:nvSpPr>
+        <p:spPr>
+          <a:xfrm>
+            <a:off x="3884613" y="0"/>
+            <a:ext cx="2971800" cy="458788"/>
+          </a:xfrm>
+          <a:prstGeom prst="rect">
+            <a:avLst/>
+          </a:prstGeom>
+        </p:spPr>
+        <p:txBody>
+          <a:bodyPr vert="horz" lIns="91440" tIns="45720" rIns="91440" bIns="45720" rtlCol="0"/>
+          <a:lstStyle>
+            <a:lvl1pPr algn="r">
+              <a:defRPr sz="1200"/>
+            </a:lvl1pPr>
+          </a:lstStyle>
+          <a:p>
+            <a:fld id="{3EFD42F7-718C-4B98-AAEC-167E6DDD60A7}" type="datetimeFigureOut">
+              <a:rPr lang="en-US" smtClean="0"/>
+            </a:fld>
+            <a:endParaRPr lang="en-US"/>
+          </a:p>
+        </p:txBody>
+      </p:sp>
+      <p:sp>
+        <p:nvSpPr>
+          <p:cNvPr id="4" name="Slide Image Placeholder 3"/>
+          <p:cNvSpPr>
+            <a:spLocks noGrp="1" noRot="1" noChangeAspect="1"/>
+          </p:cNvSpPr>
+          <p:nvPr>
+            <p:ph type="sldImg" idx="2"/>
+          </p:nvPr>
+        </p:nvSpPr>
+        <p:spPr>
+          <a:xfrm>
+            <a:off x="686514" y="1143000"/>
+            <a:ext cx="5484971" cy="3086100"/>
+          </a:xfrm>
+          <a:prstGeom prst="rect">
+            <a:avLst/>
+          </a:prstGeom>
+          <a:noFill/>
+          <a:ln w="12700">
+            <a:solidFill>
+              <a:prstClr val="black"/>
+            </a:solidFill>
+          </a:ln>
+        </p:spPr>
+        <p:txBody>
+          <a:bodyPr vert="horz" lIns="91440" tIns="45720" rIns="91440" bIns="45720" rtlCol="0" anchor="ctr"/>
+          <a:lstStyle/>
+          <a:p>
+            <a:endParaRPr lang="en-US"/>
+          </a:p>
+        </p:txBody>
+      </p:sp>
+      <p:sp>
+        <p:nvSpPr>
+          <p:cNvPr id="5" name="Notes Placeholder 4"/>
+          <p:cNvSpPr>
+            <a:spLocks noGrp="1"/>
+          </p:cNvSpPr>
+          <p:nvPr>
+            <p:ph type="body" sz="quarter" idx="3"/>
+          </p:nvPr>
+        </p:nvSpPr>
+        <p:spPr>
+          <a:xfrm>
+            <a:off x="685800" y="4400550"/>
+            <a:ext cx="5486400" cy="3600450"/>
+          </a:xfrm>
+          <a:prstGeom prst="rect">
+            <a:avLst/>
+          </a:prstGeom>
+        </p:spPr>
+        <p:txBody>
+          <a:bodyPr vert="horz" lIns="91440" tIns="45720" rIns="91440" bIns="45720" rtlCol="0"/>
+          <a:lstStyle/>
+          <a:p>
+            <a:pPr lvl="0"/>
+            <a:r>
+              <a:rPr lang="en-US" smtClean="0"/>
+              <a:t>Click to edit Master text styles</a:t>
+            </a:r>
+            <a:endParaRPr lang="en-US" smtClean="0"/>
+          </a:p>
+          <a:p>
+            <a:pPr lvl="1"/>
+            <a:r>
+              <a:rPr lang="en-US" smtClean="0"/>
+              <a:t>Second level</a:t>
+            </a:r>
+            <a:endParaRPr lang="en-US" smtClean="0"/>
+          </a:p>
+          <a:p>
+            <a:pPr lvl="2"/>
+            <a:r>
+              <a:rPr lang="en-US" smtClean="0"/>
+              <a:t>Third level</a:t>
+            </a:r>
+            <a:endParaRPr lang="en-US" smtClean="0"/>
+          </a:p>
+          <a:p>
+            <a:pPr lvl="3"/>
+            <a:r>
+              <a:rPr lang="en-US" smtClean="0"/>
+              <a:t>Fourth level</a:t>
+            </a:r>
+            <a:endParaRPr lang="en-US" smtClean="0"/>
+          </a:p>
+          <a:p>
+            <a:pPr lvl="4"/>
+            <a:r>
+              <a:rPr lang="en-US" smtClean="0"/>
+              <a:t>Fifth level</a:t>
+            </a:r>
+            <a:endParaRPr lang="en-US"/>
+          </a:p>
+        </p:txBody>
+      </p:sp>
+      <p:sp>
+        <p:nvSpPr>
+          <p:cNvPr id="6" name="Footer Placeholder 5"/>
+          <p:cNvSpPr>
+            <a:spLocks noGrp="1"/>
+          </p:cNvSpPr>
+          <p:nvPr>
+            <p:ph type="ftr" sz="quarter" idx="4"/>
+          </p:nvPr>
+        </p:nvSpPr>
+        <p:spPr>
+          <a:xfrm>
+            <a:off x="0" y="8685213"/>
+            <a:ext cx="2971800" cy="458787"/>
+          </a:xfrm>
+          <a:prstGeom prst="rect">
+            <a:avLst/>
+          </a:prstGeom>
+        </p:spPr>
+        <p:txBody>
+          <a:bodyPr vert="horz" lIns="91440" tIns="45720" rIns="91440" bIns="45720" rtlCol="0" anchor="b"/>
+          <a:lstStyle>
+            <a:lvl1pPr algn="l">
+              <a:defRPr sz="1200"/>
+            </a:lvl1pPr>
+          </a:lstStyle>
+          <a:p>
+            <a:endParaRPr lang="en-US"/>
+          </a:p>
+        </p:txBody>
+      </p:sp>
+      <p:sp>
+        <p:nvSpPr>
+          <p:cNvPr id="7" name="Slide Number Placeholder 6"/>
+          <p:cNvSpPr>
+            <a:spLocks noGrp="1"/>
+          </p:cNvSpPr>
+          <p:nvPr>
+            <p:ph type="sldNum" sz="quarter" idx="5"/>
+          </p:nvPr>
+        </p:nvSpPr>
+        <p:spPr>
+          <a:xfrm>
+            <a:off x="3884613" y="8685213"/>
+            <a:ext cx="2971800" cy="458787"/>
+          </a:xfrm>
+          <a:prstGeom prst="rect">
+            <a:avLst/>
+          </a:prstGeom>
+        </p:spPr>
+        <p:txBody>
+          <a:bodyPr vert="horz" lIns="91440" tIns="45720" rIns="91440" bIns="45720" rtlCol="0" anchor="b"/>
+          <a:lstStyle>
+            <a:lvl1pPr algn="r">
+              <a:defRPr sz="1200"/>
+            </a:lvl1pPr>
+          </a:lstStyle>
+          <a:p>
+            <a:fld id="{21B2AA4F-B828-4D7C-AFD3-893933DAFCB4}" type="slidenum">
+              <a:rPr lang="en-US" smtClean="0"/>
+            </a:fld>
+            <a:endParaRPr lang="en-US"/>
+          </a:p>
+        </p:txBody>
+      </p:sp>
+    </p:spTree>
+  </p:cSld>
+  <p:clrMap bg1="lt1" tx1="dk1" bg2="lt2" tx2="dk2" accent1="accent1" accent2="accent2" accent3="accent3" accent4="accent4" accent5="accent5" accent6="accent6" hlink="hlink" folHlink="folHlink"/>
+  <p:notesStyle>
+    <a:lvl1pPr marL="0" algn="l" defTabSz="914400" rtl="0" eaLnBrk="1" latinLnBrk="0" hangingPunct="1">
+      <a:defRPr sz="1200" kern="1200">
+        <a:solidFill>
+          <a:schemeClr val="tx1"/>
+        </a:solidFill>
+        <a:latin typeface="+mn-lt"/>
+        <a:ea typeface="+mn-ea"/>
+        <a:cs typeface="+mn-cs"/>
+      </a:defRPr>
+    </a:lvl1pPr>
+    <a:lvl2pPr marL="457200" algn="l" defTabSz="914400" rtl="0" eaLnBrk="1" latinLnBrk="0" hangingPunct="1">
+      <a:defRPr sz="1200" kern="1200">
+        <a:solidFill>
+          <a:schemeClr val="tx1"/>
+        </a:solidFill>
+        <a:latin typeface="+mn-lt"/>
+        <a:ea typeface="+mn-ea"/>
+        <a:cs typeface="+mn-cs"/>
+      </a:defRPr>
+    </a:lvl2pPr>
+    <a:lvl3pPr marL="914400" algn="l" defTabSz="914400" rtl="0" eaLnBrk="1" latinLnBrk="0" hangingPunct="1">
+      <a:defRPr sz="1200" kern="1200">
+        <a:solidFill>
+          <a:schemeClr val="tx1"/>
+        </a:solidFill>
+        <a:latin typeface="+mn-lt"/>
+        <a:ea typeface="+mn-ea"/>
+        <a:cs typeface="+mn-cs"/>
+      </a:defRPr>
+    </a:lvl3pPr>
+    <a:lvl4pPr marL="1371600" algn="l" defTabSz="914400" rtl="0" eaLnBrk="1" latinLnBrk="0" hangingPunct="1">
+      <a:defRPr sz="1200" kern="1200">
+        <a:solidFill>
+          <a:schemeClr val="tx1"/>
+        </a:solidFill>
+        <a:latin typeface="+mn-lt"/>
+        <a:ea typeface="+mn-ea"/>
+        <a:cs typeface="+mn-cs"/>
+      </a:defRPr>
+    </a:lvl4pPr>
+    <a:lvl5pPr marL="1828800" algn="l" defTabSz="914400" rtl="0" eaLnBrk="1" latinLnBrk="0" hangingPunct="1">
+      <a:defRPr sz="1200" kern="1200">
+        <a:solidFill>
+          <a:schemeClr val="tx1"/>
+        </a:solidFill>
+        <a:latin typeface="+mn-lt"/>
+        <a:ea typeface="+mn-ea"/>
+        <a:cs typeface="+mn-cs"/>
+      </a:defRPr>
+    </a:lvl5pPr>
+    <a:lvl6pPr marL="2286000" algn="l" defTabSz="914400" rtl="0" eaLnBrk="1" latinLnBrk="0" hangingPunct="1">
+      <a:defRPr sz="1200" kern="1200">
+        <a:solidFill>
+          <a:schemeClr val="tx1"/>
+        </a:solidFill>
+        <a:latin typeface="+mn-lt"/>
+        <a:ea typeface="+mn-ea"/>
+        <a:cs typeface="+mn-cs"/>
+      </a:defRPr>
+    </a:lvl6pPr>
+    <a:lvl7pPr marL="2743200" algn="l" defTabSz="914400" rtl="0" eaLnBrk="1" latinLnBrk="0" hangingPunct="1">
+      <a:defRPr sz="1200" kern="1200">
+        <a:solidFill>
+          <a:schemeClr val="tx1"/>
+        </a:solidFill>
+        <a:latin typeface="+mn-lt"/>
+        <a:ea typeface="+mn-ea"/>
+        <a:cs typeface="+mn-cs"/>
+      </a:defRPr>
+    </a:lvl7pPr>
+    <a:lvl8pPr marL="3200400" algn="l" defTabSz="914400" rtl="0" eaLnBrk="1" latinLnBrk="0" hangingPunct="1">
+      <a:defRPr sz="1200" kern="1200">
+        <a:solidFill>
+          <a:schemeClr val="tx1"/>
+        </a:solidFill>
+        <a:latin typeface="+mn-lt"/>
+        <a:ea typeface="+mn-ea"/>
+        <a:cs typeface="+mn-cs"/>
+      </a:defRPr>
+    </a:lvl8pPr>
+    <a:lvl9pPr marL="3657600" algn="l" defTabSz="914400" rtl="0" eaLnBrk="1" latinLnBrk="0" hangingPunct="1">
+      <a:defRPr sz="1200" kern="1200">
+        <a:solidFill>
+          <a:schemeClr val="tx1"/>
+        </a:solidFill>
+        <a:latin typeface="+mn-lt"/>
+        <a:ea typeface="+mn-ea"/>
+        <a:cs typeface="+mn-cs"/>
+      </a:defRPr>
+    </a:lvl9pPr>
+  </p:notesStyle>
+</p:notesMaster>
+</file>
+
+<file path=ppt/notesSlides/notesSlide1.xml><?xml version="1.0" encoding="utf-8"?>
+<p:notes xmlns:a="http://schemas.openxmlformats.org/drawingml/2006/main" xmlns:r="http://schemas.openxmlformats.org/officeDocument/2006/relationships" xmlns:p="http://schemas.openxmlformats.org/presentationml/2006/main">
+  <p:cSld>
+    <p:spTree>
+      <p:nvGrpSpPr>
+        <p:cNvPr id="1" name=""/>
+        <p:cNvGrpSpPr/>
+        <p:nvPr/>
+      </p:nvGrpSpPr>
+      <p:grpSpPr/>
+      <p:sp>
+        <p:nvSpPr>
+          <p:cNvPr id="2" name="Slide Image Placeholder 1"/>
+          <p:cNvSpPr>
+            <a:spLocks noGrp="1"/>
+          </p:cNvSpPr>
+          <p:nvPr>
+            <p:ph type="sldImg" idx="2"/>
+          </p:nvPr>
+        </p:nvSpPr>
+        <p:spPr/>
+      </p:sp>
+      <p:sp>
+        <p:nvSpPr>
+          <p:cNvPr id="3" name="Text Placeholder 2"/>
+          <p:cNvSpPr>
+            <a:spLocks noGrp="1"/>
+          </p:cNvSpPr>
+          <p:nvPr>
+            <p:ph type="body" idx="3"/>
+          </p:nvPr>
+        </p:nvSpPr>
+        <p:spPr/>
+        <p:txBody>
+          <a:bodyPr/>
+          <a:p>
+            <a:endParaRPr lang="en-US"/>
+          </a:p>
+        </p:txBody>
+      </p:sp>
+    </p:spTree>
+  </p:cSld>
+  <p:clrMapOvr>
+    <a:masterClrMapping/>
+  </p:clrMapOvr>
+</p:notes>
 </file>
 
 <file path=ppt/slideLayouts/slideLayout1.xml><?xml version="1.0" encoding="utf-8"?>
@@ -293,7 +707,6 @@
           <a:p>
             <a:fld id="{5BCAD085-E8A6-8845-BD4E-CB4CCA059FC4}" type="datetimeFigureOut">
               <a:rPr lang="en-US" smtClean="0"/>
-              <a:t>1/27/13</a:t>
             </a:fld>
             <a:endParaRPr lang="en-US"/>
           </a:p>
@@ -335,18 +748,12 @@
           <a:p>
             <a:fld id="{C1FF6DA9-008F-8B48-92A6-B652298478BF}" type="slidenum">
               <a:rPr lang="en-US" smtClean="0"/>
-              <a:t>‹#›</a:t>
             </a:fld>
             <a:endParaRPr lang="en-US"/>
           </a:p>
         </p:txBody>
       </p:sp>
     </p:spTree>
-    <p:extLst>
-      <p:ext uri="{BB962C8B-B14F-4D97-AF65-F5344CB8AC3E}">
-        <p14:creationId xmlns:p14="http://schemas.microsoft.com/office/powerpoint/2010/main" val="3168075583"/>
-      </p:ext>
-    </p:extLst>
   </p:cSld>
   <p:clrMapOvr>
     <a:masterClrMapping/>
@@ -414,6 +821,7 @@
               <a:rPr lang="en-US" smtClean="0"/>
               <a:t>Click to edit Master text styles</a:t>
             </a:r>
+            <a:endParaRPr lang="en-US" smtClean="0"/>
           </a:p>
           <a:p>
             <a:pPr lvl="1"/>
@@ -421,6 +829,7 @@
               <a:rPr lang="en-US" smtClean="0"/>
               <a:t>Second level</a:t>
             </a:r>
+            <a:endParaRPr lang="en-US" smtClean="0"/>
           </a:p>
           <a:p>
             <a:pPr lvl="2"/>
@@ -428,6 +837,7 @@
               <a:rPr lang="en-US" smtClean="0"/>
               <a:t>Third level</a:t>
             </a:r>
+            <a:endParaRPr lang="en-US" smtClean="0"/>
           </a:p>
           <a:p>
             <a:pPr lvl="3"/>
@@ -435,6 +845,7 @@
               <a:rPr lang="en-US" smtClean="0"/>
               <a:t>Fourth level</a:t>
             </a:r>
+            <a:endParaRPr lang="en-US" smtClean="0"/>
           </a:p>
           <a:p>
             <a:pPr lvl="4"/>
@@ -463,7 +874,6 @@
           <a:p>
             <a:fld id="{5BCAD085-E8A6-8845-BD4E-CB4CCA059FC4}" type="datetimeFigureOut">
               <a:rPr lang="en-US" smtClean="0"/>
-              <a:t>1/27/13</a:t>
             </a:fld>
             <a:endParaRPr lang="en-US"/>
           </a:p>
@@ -505,18 +915,12 @@
           <a:p>
             <a:fld id="{C1FF6DA9-008F-8B48-92A6-B652298478BF}" type="slidenum">
               <a:rPr lang="en-US" smtClean="0"/>
-              <a:t>‹#›</a:t>
             </a:fld>
             <a:endParaRPr lang="en-US"/>
           </a:p>
         </p:txBody>
       </p:sp>
     </p:spTree>
-    <p:extLst>
-      <p:ext uri="{BB962C8B-B14F-4D97-AF65-F5344CB8AC3E}">
-        <p14:creationId xmlns:p14="http://schemas.microsoft.com/office/powerpoint/2010/main" val="2910927964"/>
-      </p:ext>
-    </p:extLst>
   </p:cSld>
   <p:clrMapOvr>
     <a:masterClrMapping/>
@@ -594,6 +998,7 @@
               <a:rPr lang="en-US" smtClean="0"/>
               <a:t>Click to edit Master text styles</a:t>
             </a:r>
+            <a:endParaRPr lang="en-US" smtClean="0"/>
           </a:p>
           <a:p>
             <a:pPr lvl="1"/>
@@ -601,6 +1006,7 @@
               <a:rPr lang="en-US" smtClean="0"/>
               <a:t>Second level</a:t>
             </a:r>
+            <a:endParaRPr lang="en-US" smtClean="0"/>
           </a:p>
           <a:p>
             <a:pPr lvl="2"/>
@@ -608,6 +1014,7 @@
               <a:rPr lang="en-US" smtClean="0"/>
               <a:t>Third level</a:t>
             </a:r>
+            <a:endParaRPr lang="en-US" smtClean="0"/>
           </a:p>
           <a:p>
             <a:pPr lvl="3"/>
@@ -615,6 +1022,7 @@
               <a:rPr lang="en-US" smtClean="0"/>
               <a:t>Fourth level</a:t>
             </a:r>
+            <a:endParaRPr lang="en-US" smtClean="0"/>
           </a:p>
           <a:p>
             <a:pPr lvl="4"/>
@@ -643,7 +1051,6 @@
           <a:p>
             <a:fld id="{5BCAD085-E8A6-8845-BD4E-CB4CCA059FC4}" type="datetimeFigureOut">
               <a:rPr lang="en-US" smtClean="0"/>
-              <a:t>1/27/13</a:t>
             </a:fld>
             <a:endParaRPr lang="en-US"/>
           </a:p>
@@ -685,18 +1092,12 @@
           <a:p>
             <a:fld id="{C1FF6DA9-008F-8B48-92A6-B652298478BF}" type="slidenum">
               <a:rPr lang="en-US" smtClean="0"/>
-              <a:t>‹#›</a:t>
             </a:fld>
             <a:endParaRPr lang="en-US"/>
           </a:p>
         </p:txBody>
       </p:sp>
     </p:spTree>
-    <p:extLst>
-      <p:ext uri="{BB962C8B-B14F-4D97-AF65-F5344CB8AC3E}">
-        <p14:creationId xmlns:p14="http://schemas.microsoft.com/office/powerpoint/2010/main" val="3612223792"/>
-      </p:ext>
-    </p:extLst>
   </p:cSld>
   <p:clrMapOvr>
     <a:masterClrMapping/>
@@ -764,6 +1165,7 @@
               <a:rPr lang="en-US" smtClean="0"/>
               <a:t>Click to edit Master text styles</a:t>
             </a:r>
+            <a:endParaRPr lang="en-US" smtClean="0"/>
           </a:p>
           <a:p>
             <a:pPr lvl="1"/>
@@ -771,6 +1173,7 @@
               <a:rPr lang="en-US" smtClean="0"/>
               <a:t>Second level</a:t>
             </a:r>
+            <a:endParaRPr lang="en-US" smtClean="0"/>
           </a:p>
           <a:p>
             <a:pPr lvl="2"/>
@@ -778,6 +1181,7 @@
               <a:rPr lang="en-US" smtClean="0"/>
               <a:t>Third level</a:t>
             </a:r>
+            <a:endParaRPr lang="en-US" smtClean="0"/>
           </a:p>
           <a:p>
             <a:pPr lvl="3"/>
@@ -785,6 +1189,7 @@
               <a:rPr lang="en-US" smtClean="0"/>
               <a:t>Fourth level</a:t>
             </a:r>
+            <a:endParaRPr lang="en-US" smtClean="0"/>
           </a:p>
           <a:p>
             <a:pPr lvl="4"/>
@@ -813,7 +1218,6 @@
           <a:p>
             <a:fld id="{5BCAD085-E8A6-8845-BD4E-CB4CCA059FC4}" type="datetimeFigureOut">
               <a:rPr lang="en-US" smtClean="0"/>
-              <a:t>1/27/13</a:t>
             </a:fld>
             <a:endParaRPr lang="en-US"/>
           </a:p>
@@ -855,18 +1259,12 @@
           <a:p>
             <a:fld id="{C1FF6DA9-008F-8B48-92A6-B652298478BF}" type="slidenum">
               <a:rPr lang="en-US" smtClean="0"/>
-              <a:t>‹#›</a:t>
             </a:fld>
             <a:endParaRPr lang="en-US"/>
           </a:p>
         </p:txBody>
       </p:sp>
     </p:spTree>
-    <p:extLst>
-      <p:ext uri="{BB962C8B-B14F-4D97-AF65-F5344CB8AC3E}">
-        <p14:creationId xmlns:p14="http://schemas.microsoft.com/office/powerpoint/2010/main" val="2614314258"/>
-      </p:ext>
-    </p:extLst>
   </p:cSld>
   <p:clrMapOvr>
     <a:masterClrMapping/>
@@ -1039,6 +1437,7 @@
               <a:rPr lang="en-US" smtClean="0"/>
               <a:t>Click to edit Master text styles</a:t>
             </a:r>
+            <a:endParaRPr lang="en-US" smtClean="0"/>
           </a:p>
         </p:txBody>
       </p:sp>
@@ -1059,7 +1458,6 @@
           <a:p>
             <a:fld id="{5BCAD085-E8A6-8845-BD4E-CB4CCA059FC4}" type="datetimeFigureOut">
               <a:rPr lang="en-US" smtClean="0"/>
-              <a:t>1/27/13</a:t>
             </a:fld>
             <a:endParaRPr lang="en-US"/>
           </a:p>
@@ -1101,18 +1499,12 @@
           <a:p>
             <a:fld id="{C1FF6DA9-008F-8B48-92A6-B652298478BF}" type="slidenum">
               <a:rPr lang="en-US" smtClean="0"/>
-              <a:t>‹#›</a:t>
             </a:fld>
             <a:endParaRPr lang="en-US"/>
           </a:p>
         </p:txBody>
       </p:sp>
     </p:spTree>
-    <p:extLst>
-      <p:ext uri="{BB962C8B-B14F-4D97-AF65-F5344CB8AC3E}">
-        <p14:creationId xmlns:p14="http://schemas.microsoft.com/office/powerpoint/2010/main" val="960648375"/>
-      </p:ext>
-    </p:extLst>
   </p:cSld>
   <p:clrMapOvr>
     <a:masterClrMapping/>
@@ -1213,6 +1605,7 @@
               <a:rPr lang="en-US" smtClean="0"/>
               <a:t>Click to edit Master text styles</a:t>
             </a:r>
+            <a:endParaRPr lang="en-US" smtClean="0"/>
           </a:p>
           <a:p>
             <a:pPr lvl="1"/>
@@ -1220,6 +1613,7 @@
               <a:rPr lang="en-US" smtClean="0"/>
               <a:t>Second level</a:t>
             </a:r>
+            <a:endParaRPr lang="en-US" smtClean="0"/>
           </a:p>
           <a:p>
             <a:pPr lvl="2"/>
@@ -1227,6 +1621,7 @@
               <a:rPr lang="en-US" smtClean="0"/>
               <a:t>Third level</a:t>
             </a:r>
+            <a:endParaRPr lang="en-US" smtClean="0"/>
           </a:p>
           <a:p>
             <a:pPr lvl="3"/>
@@ -1234,6 +1629,7 @@
               <a:rPr lang="en-US" smtClean="0"/>
               <a:t>Fourth level</a:t>
             </a:r>
+            <a:endParaRPr lang="en-US" smtClean="0"/>
           </a:p>
           <a:p>
             <a:pPr lvl="4"/>
@@ -1298,6 +1694,7 @@
               <a:rPr lang="en-US" smtClean="0"/>
               <a:t>Click to edit Master text styles</a:t>
             </a:r>
+            <a:endParaRPr lang="en-US" smtClean="0"/>
           </a:p>
           <a:p>
             <a:pPr lvl="1"/>
@@ -1305,6 +1702,7 @@
               <a:rPr lang="en-US" smtClean="0"/>
               <a:t>Second level</a:t>
             </a:r>
+            <a:endParaRPr lang="en-US" smtClean="0"/>
           </a:p>
           <a:p>
             <a:pPr lvl="2"/>
@@ -1312,6 +1710,7 @@
               <a:rPr lang="en-US" smtClean="0"/>
               <a:t>Third level</a:t>
             </a:r>
+            <a:endParaRPr lang="en-US" smtClean="0"/>
           </a:p>
           <a:p>
             <a:pPr lvl="3"/>
@@ -1319,6 +1718,7 @@
               <a:rPr lang="en-US" smtClean="0"/>
               <a:t>Fourth level</a:t>
             </a:r>
+            <a:endParaRPr lang="en-US" smtClean="0"/>
           </a:p>
           <a:p>
             <a:pPr lvl="4"/>
@@ -1347,7 +1747,6 @@
           <a:p>
             <a:fld id="{5BCAD085-E8A6-8845-BD4E-CB4CCA059FC4}" type="datetimeFigureOut">
               <a:rPr lang="en-US" smtClean="0"/>
-              <a:t>1/27/13</a:t>
             </a:fld>
             <a:endParaRPr lang="en-US"/>
           </a:p>
@@ -1389,18 +1788,12 @@
           <a:p>
             <a:fld id="{C1FF6DA9-008F-8B48-92A6-B652298478BF}" type="slidenum">
               <a:rPr lang="en-US" smtClean="0"/>
-              <a:t>‹#›</a:t>
             </a:fld>
             <a:endParaRPr lang="en-US"/>
           </a:p>
         </p:txBody>
       </p:sp>
     </p:spTree>
-    <p:extLst>
-      <p:ext uri="{BB962C8B-B14F-4D97-AF65-F5344CB8AC3E}">
-        <p14:creationId xmlns:p14="http://schemas.microsoft.com/office/powerpoint/2010/main" val="2782244947"/>
-      </p:ext>
-    </p:extLst>
   </p:cSld>
   <p:clrMapOvr>
     <a:masterClrMapping/>
@@ -1514,6 +1907,7 @@
               <a:rPr lang="en-US" smtClean="0"/>
               <a:t>Click to edit Master text styles</a:t>
             </a:r>
+            <a:endParaRPr lang="en-US" smtClean="0"/>
           </a:p>
         </p:txBody>
       </p:sp>
@@ -1570,6 +1964,7 @@
               <a:rPr lang="en-US" smtClean="0"/>
               <a:t>Click to edit Master text styles</a:t>
             </a:r>
+            <a:endParaRPr lang="en-US" smtClean="0"/>
           </a:p>
           <a:p>
             <a:pPr lvl="1"/>
@@ -1577,6 +1972,7 @@
               <a:rPr lang="en-US" smtClean="0"/>
               <a:t>Second level</a:t>
             </a:r>
+            <a:endParaRPr lang="en-US" smtClean="0"/>
           </a:p>
           <a:p>
             <a:pPr lvl="2"/>
@@ -1584,6 +1980,7 @@
               <a:rPr lang="en-US" smtClean="0"/>
               <a:t>Third level</a:t>
             </a:r>
+            <a:endParaRPr lang="en-US" smtClean="0"/>
           </a:p>
           <a:p>
             <a:pPr lvl="3"/>
@@ -1591,6 +1988,7 @@
               <a:rPr lang="en-US" smtClean="0"/>
               <a:t>Fourth level</a:t>
             </a:r>
+            <a:endParaRPr lang="en-US" smtClean="0"/>
           </a:p>
           <a:p>
             <a:pPr lvl="4"/>
@@ -1664,6 +2062,7 @@
               <a:rPr lang="en-US" smtClean="0"/>
               <a:t>Click to edit Master text styles</a:t>
             </a:r>
+            <a:endParaRPr lang="en-US" smtClean="0"/>
           </a:p>
         </p:txBody>
       </p:sp>
@@ -1720,6 +2119,7 @@
               <a:rPr lang="en-US" smtClean="0"/>
               <a:t>Click to edit Master text styles</a:t>
             </a:r>
+            <a:endParaRPr lang="en-US" smtClean="0"/>
           </a:p>
           <a:p>
             <a:pPr lvl="1"/>
@@ -1727,6 +2127,7 @@
               <a:rPr lang="en-US" smtClean="0"/>
               <a:t>Second level</a:t>
             </a:r>
+            <a:endParaRPr lang="en-US" smtClean="0"/>
           </a:p>
           <a:p>
             <a:pPr lvl="2"/>
@@ -1734,6 +2135,7 @@
               <a:rPr lang="en-US" smtClean="0"/>
               <a:t>Third level</a:t>
             </a:r>
+            <a:endParaRPr lang="en-US" smtClean="0"/>
           </a:p>
           <a:p>
             <a:pPr lvl="3"/>
@@ -1741,6 +2143,7 @@
               <a:rPr lang="en-US" smtClean="0"/>
               <a:t>Fourth level</a:t>
             </a:r>
+            <a:endParaRPr lang="en-US" smtClean="0"/>
           </a:p>
           <a:p>
             <a:pPr lvl="4"/>
@@ -1769,7 +2172,6 @@
           <a:p>
             <a:fld id="{5BCAD085-E8A6-8845-BD4E-CB4CCA059FC4}" type="datetimeFigureOut">
               <a:rPr lang="en-US" smtClean="0"/>
-              <a:t>1/27/13</a:t>
             </a:fld>
             <a:endParaRPr lang="en-US"/>
           </a:p>
@@ -1811,18 +2213,12 @@
           <a:p>
             <a:fld id="{C1FF6DA9-008F-8B48-92A6-B652298478BF}" type="slidenum">
               <a:rPr lang="en-US" smtClean="0"/>
-              <a:t>‹#›</a:t>
             </a:fld>
             <a:endParaRPr lang="en-US"/>
           </a:p>
         </p:txBody>
       </p:sp>
     </p:spTree>
-    <p:extLst>
-      <p:ext uri="{BB962C8B-B14F-4D97-AF65-F5344CB8AC3E}">
-        <p14:creationId xmlns:p14="http://schemas.microsoft.com/office/powerpoint/2010/main" val="990158736"/>
-      </p:ext>
-    </p:extLst>
   </p:cSld>
   <p:clrMapOvr>
     <a:masterClrMapping/>
@@ -1887,7 +2283,6 @@
           <a:p>
             <a:fld id="{5BCAD085-E8A6-8845-BD4E-CB4CCA059FC4}" type="datetimeFigureOut">
               <a:rPr lang="en-US" smtClean="0"/>
-              <a:t>1/27/13</a:t>
             </a:fld>
             <a:endParaRPr lang="en-US"/>
           </a:p>
@@ -1929,18 +2324,12 @@
           <a:p>
             <a:fld id="{C1FF6DA9-008F-8B48-92A6-B652298478BF}" type="slidenum">
               <a:rPr lang="en-US" smtClean="0"/>
-              <a:t>‹#›</a:t>
             </a:fld>
             <a:endParaRPr lang="en-US"/>
           </a:p>
         </p:txBody>
       </p:sp>
     </p:spTree>
-    <p:extLst>
-      <p:ext uri="{BB962C8B-B14F-4D97-AF65-F5344CB8AC3E}">
-        <p14:creationId xmlns:p14="http://schemas.microsoft.com/office/powerpoint/2010/main" val="727027711"/>
-      </p:ext>
-    </p:extLst>
   </p:cSld>
   <p:clrMapOvr>
     <a:masterClrMapping/>
@@ -1982,7 +2371,6 @@
           <a:p>
             <a:fld id="{5BCAD085-E8A6-8845-BD4E-CB4CCA059FC4}" type="datetimeFigureOut">
               <a:rPr lang="en-US" smtClean="0"/>
-              <a:t>1/27/13</a:t>
             </a:fld>
             <a:endParaRPr lang="en-US"/>
           </a:p>
@@ -2024,18 +2412,12 @@
           <a:p>
             <a:fld id="{C1FF6DA9-008F-8B48-92A6-B652298478BF}" type="slidenum">
               <a:rPr lang="en-US" smtClean="0"/>
-              <a:t>‹#›</a:t>
             </a:fld>
             <a:endParaRPr lang="en-US"/>
           </a:p>
         </p:txBody>
       </p:sp>
     </p:spTree>
-    <p:extLst>
-      <p:ext uri="{BB962C8B-B14F-4D97-AF65-F5344CB8AC3E}">
-        <p14:creationId xmlns:p14="http://schemas.microsoft.com/office/powerpoint/2010/main" val="1212999818"/>
-      </p:ext>
-    </p:extLst>
   </p:cSld>
   <p:clrMapOvr>
     <a:masterClrMapping/>
@@ -2145,6 +2527,7 @@
               <a:rPr lang="en-US" smtClean="0"/>
               <a:t>Click to edit Master text styles</a:t>
             </a:r>
+            <a:endParaRPr lang="en-US" smtClean="0"/>
           </a:p>
           <a:p>
             <a:pPr lvl="1"/>
@@ -2152,6 +2535,7 @@
               <a:rPr lang="en-US" smtClean="0"/>
               <a:t>Second level</a:t>
             </a:r>
+            <a:endParaRPr lang="en-US" smtClean="0"/>
           </a:p>
           <a:p>
             <a:pPr lvl="2"/>
@@ -2159,6 +2543,7 @@
               <a:rPr lang="en-US" smtClean="0"/>
               <a:t>Third level</a:t>
             </a:r>
+            <a:endParaRPr lang="en-US" smtClean="0"/>
           </a:p>
           <a:p>
             <a:pPr lvl="3"/>
@@ -2166,6 +2551,7 @@
               <a:rPr lang="en-US" smtClean="0"/>
               <a:t>Fourth level</a:t>
             </a:r>
+            <a:endParaRPr lang="en-US" smtClean="0"/>
           </a:p>
           <a:p>
             <a:pPr lvl="4"/>
@@ -2239,6 +2625,7 @@
               <a:rPr lang="en-US" smtClean="0"/>
               <a:t>Click to edit Master text styles</a:t>
             </a:r>
+            <a:endParaRPr lang="en-US" smtClean="0"/>
           </a:p>
         </p:txBody>
       </p:sp>
@@ -2259,7 +2646,6 @@
           <a:p>
             <a:fld id="{5BCAD085-E8A6-8845-BD4E-CB4CCA059FC4}" type="datetimeFigureOut">
               <a:rPr lang="en-US" smtClean="0"/>
-              <a:t>1/27/13</a:t>
             </a:fld>
             <a:endParaRPr lang="en-US"/>
           </a:p>
@@ -2301,18 +2687,12 @@
           <a:p>
             <a:fld id="{C1FF6DA9-008F-8B48-92A6-B652298478BF}" type="slidenum">
               <a:rPr lang="en-US" smtClean="0"/>
-              <a:t>‹#›</a:t>
             </a:fld>
             <a:endParaRPr lang="en-US"/>
           </a:p>
         </p:txBody>
       </p:sp>
     </p:spTree>
-    <p:extLst>
-      <p:ext uri="{BB962C8B-B14F-4D97-AF65-F5344CB8AC3E}">
-        <p14:creationId xmlns:p14="http://schemas.microsoft.com/office/powerpoint/2010/main" val="1840726560"/>
-      </p:ext>
-    </p:extLst>
   </p:cSld>
   <p:clrMapOvr>
     <a:masterClrMapping/>
@@ -2492,6 +2872,7 @@
               <a:rPr lang="en-US" smtClean="0"/>
               <a:t>Click to edit Master text styles</a:t>
             </a:r>
+            <a:endParaRPr lang="en-US" smtClean="0"/>
           </a:p>
         </p:txBody>
       </p:sp>
@@ -2512,7 +2893,6 @@
           <a:p>
             <a:fld id="{5BCAD085-E8A6-8845-BD4E-CB4CCA059FC4}" type="datetimeFigureOut">
               <a:rPr lang="en-US" smtClean="0"/>
-              <a:t>1/27/13</a:t>
             </a:fld>
             <a:endParaRPr lang="en-US"/>
           </a:p>
@@ -2554,18 +2934,12 @@
           <a:p>
             <a:fld id="{C1FF6DA9-008F-8B48-92A6-B652298478BF}" type="slidenum">
               <a:rPr lang="en-US" smtClean="0"/>
-              <a:t>‹#›</a:t>
             </a:fld>
             <a:endParaRPr lang="en-US"/>
           </a:p>
         </p:txBody>
       </p:sp>
     </p:spTree>
-    <p:extLst>
-      <p:ext uri="{BB962C8B-B14F-4D97-AF65-F5344CB8AC3E}">
-        <p14:creationId xmlns:p14="http://schemas.microsoft.com/office/powerpoint/2010/main" val="3889236939"/>
-      </p:ext>
-    </p:extLst>
   </p:cSld>
   <p:clrMapOvr>
     <a:masterClrMapping/>
@@ -2658,6 +3032,7 @@
               <a:rPr lang="en-US" smtClean="0"/>
               <a:t>Click to edit Master text styles</a:t>
             </a:r>
+            <a:endParaRPr lang="en-US" smtClean="0"/>
           </a:p>
           <a:p>
             <a:pPr lvl="1"/>
@@ -2665,6 +3040,7 @@
               <a:rPr lang="en-US" smtClean="0"/>
               <a:t>Second level</a:t>
             </a:r>
+            <a:endParaRPr lang="en-US" smtClean="0"/>
           </a:p>
           <a:p>
             <a:pPr lvl="2"/>
@@ -2672,6 +3048,7 @@
               <a:rPr lang="en-US" smtClean="0"/>
               <a:t>Third level</a:t>
             </a:r>
+            <a:endParaRPr lang="en-US" smtClean="0"/>
           </a:p>
           <a:p>
             <a:pPr lvl="3"/>
@@ -2679,6 +3056,7 @@
               <a:rPr lang="en-US" smtClean="0"/>
               <a:t>Fourth level</a:t>
             </a:r>
+            <a:endParaRPr lang="en-US" smtClean="0"/>
           </a:p>
           <a:p>
             <a:pPr lvl="4"/>
@@ -2725,7 +3103,6 @@
           <a:p>
             <a:fld id="{5BCAD085-E8A6-8845-BD4E-CB4CCA059FC4}" type="datetimeFigureOut">
               <a:rPr lang="en-US" smtClean="0"/>
-              <a:t>1/27/13</a:t>
             </a:fld>
             <a:endParaRPr lang="en-US"/>
           </a:p>
@@ -2803,18 +3180,12 @@
           <a:p>
             <a:fld id="{C1FF6DA9-008F-8B48-92A6-B652298478BF}" type="slidenum">
               <a:rPr lang="en-US" smtClean="0"/>
-              <a:t>‹#›</a:t>
             </a:fld>
             <a:endParaRPr lang="en-US"/>
           </a:p>
         </p:txBody>
       </p:sp>
     </p:spTree>
-    <p:extLst>
-      <p:ext uri="{BB962C8B-B14F-4D97-AF65-F5344CB8AC3E}">
-        <p14:creationId xmlns:p14="http://schemas.microsoft.com/office/powerpoint/2010/main" val="2209977519"/>
-      </p:ext>
-    </p:extLst>
   </p:cSld>
   <p:clrMap bg1="lt1" tx1="dk1" bg2="lt2" tx2="dk2" accent1="accent1" accent2="accent2" accent3="accent3" accent4="accent4" accent5="accent5" accent6="accent6" hlink="hlink" folHlink="folHlink"/>
   <p:sldLayoutIdLst>
@@ -2852,7 +3223,7 @@
         <a:spcBef>
           <a:spcPct val="20000"/>
         </a:spcBef>
-        <a:buFont typeface="Arial"/>
+        <a:buFont typeface="Arial" panose="020B0604020202020204"/>
         <a:buChar char="•"/>
         <a:defRPr sz="3200" kern="1200">
           <a:solidFill>
@@ -2867,7 +3238,7 @@
         <a:spcBef>
           <a:spcPct val="20000"/>
         </a:spcBef>
-        <a:buFont typeface="Arial"/>
+        <a:buFont typeface="Arial" panose="020B0604020202020204"/>
         <a:buChar char="–"/>
         <a:defRPr sz="2800" kern="1200">
           <a:solidFill>
@@ -2882,7 +3253,7 @@
         <a:spcBef>
           <a:spcPct val="20000"/>
         </a:spcBef>
-        <a:buFont typeface="Arial"/>
+        <a:buFont typeface="Arial" panose="020B0604020202020204"/>
         <a:buChar char="•"/>
         <a:defRPr sz="2400" kern="1200">
           <a:solidFill>
@@ -2897,7 +3268,7 @@
         <a:spcBef>
           <a:spcPct val="20000"/>
         </a:spcBef>
-        <a:buFont typeface="Arial"/>
+        <a:buFont typeface="Arial" panose="020B0604020202020204"/>
         <a:buChar char="–"/>
         <a:defRPr sz="2000" kern="1200">
           <a:solidFill>
@@ -2912,7 +3283,7 @@
         <a:spcBef>
           <a:spcPct val="20000"/>
         </a:spcBef>
-        <a:buFont typeface="Arial"/>
+        <a:buFont typeface="Arial" panose="020B0604020202020204"/>
         <a:buChar char="»"/>
         <a:defRPr sz="2000" kern="1200">
           <a:solidFill>
@@ -2927,7 +3298,7 @@
         <a:spcBef>
           <a:spcPct val="20000"/>
         </a:spcBef>
-        <a:buFont typeface="Arial"/>
+        <a:buFont typeface="Arial" panose="020B0604020202020204"/>
         <a:buChar char="•"/>
         <a:defRPr sz="2000" kern="1200">
           <a:solidFill>
@@ -2942,7 +3313,7 @@
         <a:spcBef>
           <a:spcPct val="20000"/>
         </a:spcBef>
-        <a:buFont typeface="Arial"/>
+        <a:buFont typeface="Arial" panose="020B0604020202020204"/>
         <a:buChar char="•"/>
         <a:defRPr sz="2000" kern="1200">
           <a:solidFill>
@@ -2957,7 +3328,7 @@
         <a:spcBef>
           <a:spcPct val="20000"/>
         </a:spcBef>
-        <a:buFont typeface="Arial"/>
+        <a:buFont typeface="Arial" panose="020B0604020202020204"/>
         <a:buChar char="•"/>
         <a:defRPr sz="2000" kern="1200">
           <a:solidFill>
@@ -2972,7 +3343,7 @@
         <a:spcBef>
           <a:spcPct val="20000"/>
         </a:spcBef>
-        <a:buFont typeface="Arial"/>
+        <a:buFont typeface="Arial" panose="020B0604020202020204"/>
         <a:buChar char="•"/>
         <a:defRPr sz="2000" kern="1200">
           <a:solidFill>
@@ -3084,7 +3455,7 @@
 </file>
 
 <file path=ppt/slides/slide1.xml><?xml version="1.0" encoding="utf-8"?>
-<p:sld xmlns:a="http://schemas.openxmlformats.org/drawingml/2006/main" xmlns:p="http://schemas.openxmlformats.org/presentationml/2006/main" xmlns:r="http://schemas.openxmlformats.org/officeDocument/2006/relationships">
+<p:sld xmlns:a="http://schemas.openxmlformats.org/drawingml/2006/main" xmlns:r="http://schemas.openxmlformats.org/officeDocument/2006/relationships" xmlns:p="http://schemas.openxmlformats.org/presentationml/2006/main">
   <p:cSld>
     <p:spTree>
       <p:nvGrpSpPr>
@@ -3230,6 +3601,11 @@
               </a:rPr>
               <a:t>RESONANT</a:t>
             </a:r>
+            <a:endParaRPr sz="1600" b="1">
+              <a:solidFill>
+                <a:srgbClr val="FFFFFF"/>
+              </a:solidFill>
+            </a:endParaRPr>
           </a:p>
         </p:txBody>
       </p:sp>
@@ -3272,6 +3648,11 @@
               </a:rPr>
               <a:t>MITRA</a:t>
             </a:r>
+            <a:endParaRPr sz="5200" b="1">
+              <a:solidFill>
+                <a:srgbClr val="FF6B35"/>
+              </a:solidFill>
+            </a:endParaRPr>
           </a:p>
         </p:txBody>
       </p:sp>
@@ -3350,6 +3731,11 @@
               <a:t>AI-Powered BIS Standards Compliance Assistant
 for Indian MSMEs and Manufacturers</a:t>
             </a:r>
+            <a:endParaRPr sz="1800">
+              <a:solidFill>
+                <a:srgbClr val="CCCCCC"/>
+              </a:solidFill>
+            </a:endParaRPr>
           </a:p>
         </p:txBody>
       </p:sp>
@@ -3384,6 +3770,11 @@
               </a:rPr>
               <a:t>YOUR GUIDE TO BUREAU OF INDIAN STANDARDS</a:t>
             </a:r>
+            <a:endParaRPr sz="1400" b="1">
+              <a:solidFill>
+                <a:srgbClr val="FF6B35"/>
+              </a:solidFill>
+            </a:endParaRPr>
           </a:p>
         </p:txBody>
       </p:sp>
@@ -3418,6 +3809,11 @@
               </a:rPr>
               <a:t>28</a:t>
             </a:r>
+            <a:endParaRPr sz="3200" b="1">
+              <a:solidFill>
+                <a:srgbClr val="FF6B35"/>
+              </a:solidFill>
+            </a:endParaRPr>
           </a:p>
         </p:txBody>
       </p:sp>
@@ -3452,6 +3848,11 @@
               </a:rPr>
               <a:t>IS Standards</a:t>
             </a:r>
+            <a:endParaRPr sz="1100">
+              <a:solidFill>
+                <a:srgbClr val="AAAAAA"/>
+              </a:solidFill>
+            </a:endParaRPr>
           </a:p>
         </p:txBody>
       </p:sp>
@@ -3486,6 +3887,11 @@
               </a:rPr>
               <a:t>22</a:t>
             </a:r>
+            <a:endParaRPr sz="3200" b="1">
+              <a:solidFill>
+                <a:srgbClr val="FF6B35"/>
+              </a:solidFill>
+            </a:endParaRPr>
           </a:p>
         </p:txBody>
       </p:sp>
@@ -3520,6 +3926,11 @@
               </a:rPr>
               <a:t>Languages</a:t>
             </a:r>
+            <a:endParaRPr sz="1100">
+              <a:solidFill>
+                <a:srgbClr val="AAAAAA"/>
+              </a:solidFill>
+            </a:endParaRPr>
           </a:p>
         </p:txBody>
       </p:sp>
@@ -3554,6 +3965,11 @@
               </a:rPr>
               <a:t>25+</a:t>
             </a:r>
+            <a:endParaRPr sz="3200" b="1">
+              <a:solidFill>
+                <a:srgbClr val="FF6B35"/>
+              </a:solidFill>
+            </a:endParaRPr>
           </a:p>
         </p:txBody>
       </p:sp>
@@ -3588,6 +4004,11 @@
               </a:rPr>
               <a:t>BIS Offices</a:t>
             </a:r>
+            <a:endParaRPr sz="1100">
+              <a:solidFill>
+                <a:srgbClr val="AAAAAA"/>
+              </a:solidFill>
+            </a:endParaRPr>
           </a:p>
         </p:txBody>
       </p:sp>
@@ -3622,6 +4043,11 @@
               </a:rPr>
               <a:t>5</a:t>
             </a:r>
+            <a:endParaRPr sz="3200" b="1">
+              <a:solidFill>
+                <a:srgbClr val="FF6B35"/>
+              </a:solidFill>
+            </a:endParaRPr>
           </a:p>
         </p:txBody>
       </p:sp>
@@ -3656,6 +4082,11 @@
               </a:rPr>
               <a:t>Certifications</a:t>
             </a:r>
+            <a:endParaRPr sz="1100">
+              <a:solidFill>
+                <a:srgbClr val="AAAAAA"/>
+              </a:solidFill>
+            </a:endParaRPr>
           </a:p>
         </p:txBody>
       </p:sp>
@@ -3707,6 +4138,11 @@
               </a:rPr>
               <a:t>SIH</a:t>
             </a:r>
+            <a:endParaRPr sz="1200" b="1">
+              <a:solidFill>
+                <a:srgbClr val="FFFFFF"/>
+              </a:solidFill>
+            </a:endParaRPr>
           </a:p>
         </p:txBody>
       </p:sp>
@@ -3742,6 +4178,11 @@
               <a:t>SMART INDIA
 HACKATHON 2026</a:t>
             </a:r>
+            <a:endParaRPr sz="1100" b="1">
+              <a:solidFill>
+                <a:srgbClr val="CCCCCC"/>
+              </a:solidFill>
+            </a:endParaRPr>
           </a:p>
         </p:txBody>
       </p:sp>
@@ -3754,7 +4195,7 @@
 </file>
 
 <file path=ppt/slides/slide2.xml><?xml version="1.0" encoding="utf-8"?>
-<p:sld xmlns:a="http://schemas.openxmlformats.org/drawingml/2006/main" xmlns:p="http://schemas.openxmlformats.org/presentationml/2006/main" xmlns:r="http://schemas.openxmlformats.org/officeDocument/2006/relationships">
+<p:sld xmlns:a="http://schemas.openxmlformats.org/drawingml/2006/main" xmlns:r="http://schemas.openxmlformats.org/officeDocument/2006/relationships" xmlns:p="http://schemas.openxmlformats.org/presentationml/2006/main">
   <p:cSld>
     <p:spTree>
       <p:nvGrpSpPr>
@@ -3846,7 +4287,7 @@
           </a:fontRef>
         </p:style>
         <p:txBody>
-          <a:bodyPr rtlCol="0" anchor="ctr" wrap="square"/>
+          <a:bodyPr wrap="square" rtlCol="0" anchor="ctr"/>
           <a:lstStyle/>
           <a:p>
             <a:pPr algn="ctr"/>
@@ -3858,6 +4299,11 @@
               </a:rPr>
               <a:t>Resonant</a:t>
             </a:r>
+            <a:endParaRPr sz="1800" b="1">
+              <a:solidFill>
+                <a:srgbClr val="1A3A6E"/>
+              </a:solidFill>
+            </a:endParaRPr>
           </a:p>
         </p:txBody>
       </p:sp>
@@ -3892,6 +4338,11 @@
               </a:rPr>
               <a:t>MANAKMITRA</a:t>
             </a:r>
+            <a:endParaRPr sz="2800" b="1">
+              <a:solidFill>
+                <a:srgbClr val="1A3A6E"/>
+              </a:solidFill>
+            </a:endParaRPr>
           </a:p>
         </p:txBody>
       </p:sp>
@@ -3931,7 +4382,7 @@
           </a:fontRef>
         </p:style>
         <p:txBody>
-          <a:bodyPr rtlCol="0" anchor="ctr" wrap="square"/>
+          <a:bodyPr wrap="square" rtlCol="0" anchor="ctr"/>
           <a:lstStyle/>
           <a:p>
             <a:pPr algn="ctr"/>
@@ -3943,6 +4394,11 @@
               </a:rPr>
               <a:t>SIH</a:t>
             </a:r>
+            <a:endParaRPr sz="1000" b="1">
+              <a:solidFill>
+                <a:srgbClr val="FFFFFF"/>
+              </a:solidFill>
+            </a:endParaRPr>
           </a:p>
         </p:txBody>
       </p:sp>
@@ -3978,62 +4434,24 @@
               <a:t>SMART INDIA
 HACKATHON 2026</a:t>
             </a:r>
-          </a:p>
-        </p:txBody>
-      </p:sp>
-      <p:sp>
-        <p:nvSpPr>
-          <p:cNvPr id="7" name="Rectangle 6"/>
-          <p:cNvSpPr/>
-          <p:nvPr/>
-        </p:nvSpPr>
-        <p:spPr>
-          <a:xfrm>
-            <a:off x="0" y="6583680"/>
-            <a:ext cx="12188952" cy="274320"/>
-          </a:xfrm>
-          <a:prstGeom prst="rect">
-            <a:avLst/>
-          </a:prstGeom>
-          <a:solidFill>
-            <a:srgbClr val="F5F5F5"/>
-          </a:solidFill>
-          <a:ln>
-            <a:noFill/>
-          </a:ln>
-        </p:spPr>
-        <p:style>
-          <a:lnRef idx="1">
-            <a:schemeClr val="accent1"/>
-          </a:lnRef>
-          <a:fillRef idx="3">
-            <a:schemeClr val="accent1"/>
-          </a:fillRef>
-          <a:effectRef idx="2">
-            <a:schemeClr val="accent1"/>
-          </a:effectRef>
-          <a:fontRef idx="minor">
-            <a:schemeClr val="lt1"/>
-          </a:fontRef>
-        </p:style>
-        <p:txBody>
-          <a:bodyPr rtlCol="0" anchor="ctr"/>
-          <a:lstStyle/>
-          <a:p>
-            <a:pPr algn="ctr"/>
-          </a:p>
-        </p:txBody>
-      </p:sp>
-      <p:sp>
-        <p:nvSpPr>
-          <p:cNvPr id="8" name="TextBox 7"/>
+            <a:endParaRPr sz="1000" b="1">
+              <a:solidFill>
+                <a:srgbClr val="1A3A6E"/>
+              </a:solidFill>
+            </a:endParaRPr>
+          </a:p>
+        </p:txBody>
+      </p:sp>
+      <p:sp>
+        <p:nvSpPr>
+          <p:cNvPr id="9" name="TextBox 8"/>
           <p:cNvSpPr txBox="1"/>
           <p:nvPr/>
         </p:nvSpPr>
         <p:spPr>
           <a:xfrm>
-            <a:off x="457200" y="6583680"/>
-            <a:ext cx="3657600" cy="274320"/>
+            <a:off x="11430000" y="6583680"/>
+            <a:ext cx="457200" cy="274320"/>
           </a:xfrm>
           <a:prstGeom prst="rect">
             <a:avLst/>
@@ -4046,27 +4464,33 @@
           </a:bodyPr>
           <a:lstStyle/>
           <a:p>
+            <a:pPr algn="r"/>
             <a:r>
               <a:rPr sz="900">
                 <a:solidFill>
                   <a:srgbClr val="999999"/>
                 </a:solidFill>
               </a:rPr>
-              <a:t>@SIH Idea submission</a:t>
-            </a:r>
-          </a:p>
-        </p:txBody>
-      </p:sp>
-      <p:sp>
-        <p:nvSpPr>
-          <p:cNvPr id="9" name="TextBox 8"/>
+              <a:t>2</a:t>
+            </a:r>
+            <a:endParaRPr sz="900">
+              <a:solidFill>
+                <a:srgbClr val="999999"/>
+              </a:solidFill>
+            </a:endParaRPr>
+          </a:p>
+        </p:txBody>
+      </p:sp>
+      <p:sp>
+        <p:nvSpPr>
+          <p:cNvPr id="38" name="TextBox 37"/>
           <p:cNvSpPr txBox="1"/>
           <p:nvPr/>
         </p:nvSpPr>
         <p:spPr>
           <a:xfrm>
-            <a:off x="11430000" y="6583680"/>
-            <a:ext cx="457200" cy="274320"/>
+            <a:off x="7819390" y="996950"/>
+            <a:ext cx="5486400" cy="320040"/>
           </a:xfrm>
           <a:prstGeom prst="rect">
             <a:avLst/>
@@ -4079,1160 +4503,19 @@
           </a:bodyPr>
           <a:lstStyle/>
           <a:p>
-            <a:pPr algn="r"/>
-            <a:r>
-              <a:rPr sz="900">
-                <a:solidFill>
-                  <a:srgbClr val="999999"/>
-                </a:solidFill>
-              </a:rPr>
-              <a:t>2</a:t>
-            </a:r>
-          </a:p>
-        </p:txBody>
-      </p:sp>
-      <p:sp>
-        <p:nvSpPr>
-          <p:cNvPr id="10" name="TextBox 9"/>
-          <p:cNvSpPr txBox="1"/>
-          <p:nvPr/>
-        </p:nvSpPr>
-        <p:spPr>
-          <a:xfrm>
-            <a:off x="365760" y="1005840"/>
-            <a:ext cx="5486400" cy="320040"/>
-          </a:xfrm>
-          <a:prstGeom prst="rect">
-            <a:avLst/>
-          </a:prstGeom>
-          <a:noFill/>
-        </p:spPr>
-        <p:txBody>
-          <a:bodyPr wrap="none">
-            <a:spAutoFit/>
-          </a:bodyPr>
-          <a:lstStyle/>
-          <a:p>
             <a:r>
               <a:rPr sz="1600" b="1">
                 <a:solidFill>
                   <a:srgbClr val="1A3A6E"/>
                 </a:solidFill>
               </a:rPr>
-              <a:t>Problems Faced &amp; Their Solutions:</a:t>
-            </a:r>
-          </a:p>
-        </p:txBody>
-      </p:sp>
-      <p:sp>
-        <p:nvSpPr>
-          <p:cNvPr id="11" name="Rectangle 10"/>
-          <p:cNvSpPr/>
-          <p:nvPr/>
-        </p:nvSpPr>
-        <p:spPr>
-          <a:xfrm>
-            <a:off x="365760" y="1371600"/>
-            <a:ext cx="5303520" cy="320040"/>
-          </a:xfrm>
-          <a:prstGeom prst="rect">
-            <a:avLst/>
-          </a:prstGeom>
-          <a:solidFill>
-            <a:srgbClr val="1A3A6E"/>
-          </a:solidFill>
-          <a:ln>
-            <a:noFill/>
-          </a:ln>
-        </p:spPr>
-        <p:style>
-          <a:lnRef idx="1">
-            <a:schemeClr val="accent1"/>
-          </a:lnRef>
-          <a:fillRef idx="3">
-            <a:schemeClr val="accent1"/>
-          </a:fillRef>
-          <a:effectRef idx="2">
-            <a:schemeClr val="accent1"/>
-          </a:effectRef>
-          <a:fontRef idx="minor">
-            <a:schemeClr val="lt1"/>
-          </a:fontRef>
-        </p:style>
-        <p:txBody>
-          <a:bodyPr rtlCol="0" anchor="ctr"/>
-          <a:lstStyle/>
-          <a:p>
-            <a:pPr algn="ctr"/>
-          </a:p>
-        </p:txBody>
-      </p:sp>
-      <p:sp>
-        <p:nvSpPr>
-          <p:cNvPr id="12" name="TextBox 11"/>
-          <p:cNvSpPr txBox="1"/>
-          <p:nvPr/>
-        </p:nvSpPr>
-        <p:spPr>
-          <a:xfrm>
-            <a:off x="411480" y="1399032"/>
-            <a:ext cx="2560320" cy="274320"/>
-          </a:xfrm>
-          <a:prstGeom prst="rect">
-            <a:avLst/>
-          </a:prstGeom>
-          <a:noFill/>
-        </p:spPr>
-        <p:txBody>
-          <a:bodyPr wrap="none">
-            <a:spAutoFit/>
-          </a:bodyPr>
-          <a:lstStyle/>
-          <a:p>
-            <a:pPr algn="ctr"/>
-            <a:r>
-              <a:rPr sz="1100" b="1">
-                <a:solidFill>
-                  <a:srgbClr val="FFFFFF"/>
-                </a:solidFill>
-              </a:rPr>
-              <a:t>Problems Faced</a:t>
-            </a:r>
-          </a:p>
-        </p:txBody>
-      </p:sp>
-      <p:sp>
-        <p:nvSpPr>
-          <p:cNvPr id="13" name="TextBox 12"/>
-          <p:cNvSpPr txBox="1"/>
-          <p:nvPr/>
-        </p:nvSpPr>
-        <p:spPr>
-          <a:xfrm>
-            <a:off x="3017520" y="1399032"/>
-            <a:ext cx="2651760" cy="274320"/>
-          </a:xfrm>
-          <a:prstGeom prst="rect">
-            <a:avLst/>
-          </a:prstGeom>
-          <a:noFill/>
-        </p:spPr>
-        <p:txBody>
-          <a:bodyPr wrap="none">
-            <a:spAutoFit/>
-          </a:bodyPr>
-          <a:lstStyle/>
-          <a:p>
-            <a:pPr algn="ctr"/>
-            <a:r>
-              <a:rPr sz="1100" b="1">
-                <a:solidFill>
-                  <a:srgbClr val="FFFFFF"/>
-                </a:solidFill>
-              </a:rPr>
-              <a:t>Proposed Solutions</a:t>
-            </a:r>
-          </a:p>
-        </p:txBody>
-      </p:sp>
-      <p:sp>
-        <p:nvSpPr>
-          <p:cNvPr id="14" name="Rectangle 13"/>
-          <p:cNvSpPr/>
-          <p:nvPr/>
-        </p:nvSpPr>
-        <p:spPr>
-          <a:xfrm>
-            <a:off x="365760" y="1737360"/>
-            <a:ext cx="5303520" cy="384048"/>
-          </a:xfrm>
-          <a:prstGeom prst="rect">
-            <a:avLst/>
-          </a:prstGeom>
-          <a:solidFill>
-            <a:srgbClr val="FFFFFF"/>
-          </a:solidFill>
-          <a:ln w="6350">
-            <a:solidFill>
-              <a:srgbClr val="E0E0E0"/>
-            </a:solidFill>
-          </a:ln>
-        </p:spPr>
-        <p:style>
-          <a:lnRef idx="1">
-            <a:schemeClr val="accent1"/>
-          </a:lnRef>
-          <a:fillRef idx="3">
-            <a:schemeClr val="accent1"/>
-          </a:fillRef>
-          <a:effectRef idx="2">
-            <a:schemeClr val="accent1"/>
-          </a:effectRef>
-          <a:fontRef idx="minor">
-            <a:schemeClr val="lt1"/>
-          </a:fontRef>
-        </p:style>
-        <p:txBody>
-          <a:bodyPr rtlCol="0" anchor="ctr"/>
-          <a:lstStyle/>
-          <a:p>
-            <a:pPr algn="ctr"/>
-          </a:p>
-        </p:txBody>
-      </p:sp>
-      <p:sp>
-        <p:nvSpPr>
-          <p:cNvPr id="15" name="TextBox 14"/>
-          <p:cNvSpPr txBox="1"/>
-          <p:nvPr/>
-        </p:nvSpPr>
-        <p:spPr>
-          <a:xfrm>
-            <a:off x="457200" y="1783080"/>
-            <a:ext cx="2468880" cy="320040"/>
-          </a:xfrm>
-          <a:prstGeom prst="rect">
-            <a:avLst/>
-          </a:prstGeom>
-          <a:noFill/>
-        </p:spPr>
-        <p:txBody>
-          <a:bodyPr wrap="square">
-            <a:spAutoFit/>
-          </a:bodyPr>
-          <a:lstStyle/>
-          <a:p>
-            <a:r>
-              <a:rPr sz="950" b="1">
-                <a:solidFill>
-                  <a:srgbClr val="C0392B"/>
-                </a:solidFill>
-              </a:rPr>
-              <a:t>Complex BIS Standards</a:t>
-            </a:r>
-          </a:p>
-        </p:txBody>
-      </p:sp>
-      <p:sp>
-        <p:nvSpPr>
-          <p:cNvPr id="16" name="TextBox 15"/>
-          <p:cNvSpPr txBox="1"/>
-          <p:nvPr/>
-        </p:nvSpPr>
-        <p:spPr>
-          <a:xfrm>
-            <a:off x="3063240" y="1755648"/>
-            <a:ext cx="2560320" cy="365760"/>
-          </a:xfrm>
-          <a:prstGeom prst="rect">
-            <a:avLst/>
-          </a:prstGeom>
-          <a:noFill/>
-        </p:spPr>
-        <p:txBody>
-          <a:bodyPr wrap="square">
-            <a:spAutoFit/>
-          </a:bodyPr>
-          <a:lstStyle/>
-          <a:p>
-            <a:r>
-              <a:rPr sz="950" b="1">
-                <a:solidFill>
-                  <a:srgbClr val="1A3A6E"/>
-                </a:solidFill>
-              </a:rPr>
-              <a:t>AI-based Simplification</a:t>
-            </a:r>
-          </a:p>
-          <a:p>
-            <a:r>
-              <a:rPr sz="850">
-                <a:solidFill>
-                  <a:srgbClr val="333333"/>
-                </a:solidFill>
-              </a:rPr>
-              <a:t>Explain technical requirements in simple language</a:t>
-            </a:r>
-          </a:p>
-        </p:txBody>
-      </p:sp>
-      <p:sp>
-        <p:nvSpPr>
-          <p:cNvPr id="17" name="Rectangle 16"/>
-          <p:cNvSpPr/>
-          <p:nvPr/>
-        </p:nvSpPr>
-        <p:spPr>
-          <a:xfrm>
-            <a:off x="365760" y="2121408"/>
-            <a:ext cx="5303520" cy="384048"/>
-          </a:xfrm>
-          <a:prstGeom prst="rect">
-            <a:avLst/>
-          </a:prstGeom>
-          <a:solidFill>
-            <a:srgbClr val="F5F5F5"/>
-          </a:solidFill>
-          <a:ln w="6350">
-            <a:solidFill>
-              <a:srgbClr val="E0E0E0"/>
-            </a:solidFill>
-          </a:ln>
-        </p:spPr>
-        <p:style>
-          <a:lnRef idx="1">
-            <a:schemeClr val="accent1"/>
-          </a:lnRef>
-          <a:fillRef idx="3">
-            <a:schemeClr val="accent1"/>
-          </a:fillRef>
-          <a:effectRef idx="2">
-            <a:schemeClr val="accent1"/>
-          </a:effectRef>
-          <a:fontRef idx="minor">
-            <a:schemeClr val="lt1"/>
-          </a:fontRef>
-        </p:style>
-        <p:txBody>
-          <a:bodyPr rtlCol="0" anchor="ctr"/>
-          <a:lstStyle/>
-          <a:p>
-            <a:pPr algn="ctr"/>
-          </a:p>
-        </p:txBody>
-      </p:sp>
-      <p:sp>
-        <p:nvSpPr>
-          <p:cNvPr id="18" name="TextBox 17"/>
-          <p:cNvSpPr txBox="1"/>
-          <p:nvPr/>
-        </p:nvSpPr>
-        <p:spPr>
-          <a:xfrm>
-            <a:off x="457200" y="2167127"/>
-            <a:ext cx="2468880" cy="320040"/>
-          </a:xfrm>
-          <a:prstGeom prst="rect">
-            <a:avLst/>
-          </a:prstGeom>
-          <a:noFill/>
-        </p:spPr>
-        <p:txBody>
-          <a:bodyPr wrap="square">
-            <a:spAutoFit/>
-          </a:bodyPr>
-          <a:lstStyle/>
-          <a:p>
-            <a:r>
-              <a:rPr sz="950" b="1">
-                <a:solidFill>
-                  <a:srgbClr val="C0392B"/>
-                </a:solidFill>
-              </a:rPr>
-              <a:t>Scattered Information</a:t>
-            </a:r>
-          </a:p>
-        </p:txBody>
-      </p:sp>
-      <p:sp>
-        <p:nvSpPr>
-          <p:cNvPr id="19" name="TextBox 18"/>
-          <p:cNvSpPr txBox="1"/>
-          <p:nvPr/>
-        </p:nvSpPr>
-        <p:spPr>
-          <a:xfrm>
-            <a:off x="3063240" y="2139696"/>
-            <a:ext cx="2560320" cy="365760"/>
-          </a:xfrm>
-          <a:prstGeom prst="rect">
-            <a:avLst/>
-          </a:prstGeom>
-          <a:noFill/>
-        </p:spPr>
-        <p:txBody>
-          <a:bodyPr wrap="square">
-            <a:spAutoFit/>
-          </a:bodyPr>
-          <a:lstStyle/>
-          <a:p>
-            <a:r>
-              <a:rPr sz="950" b="1">
-                <a:solidFill>
-                  <a:srgbClr val="1A3A6E"/>
-                </a:solidFill>
-              </a:rPr>
-              <a:t>Unified Platform</a:t>
-            </a:r>
-          </a:p>
-          <a:p>
-            <a:r>
-              <a:rPr sz="850">
-                <a:solidFill>
-                  <a:srgbClr val="333333"/>
-                </a:solidFill>
-              </a:rPr>
-              <a:t>Bring standards, certification &amp; lab info together</a:t>
-            </a:r>
-          </a:p>
-        </p:txBody>
-      </p:sp>
-      <p:sp>
-        <p:nvSpPr>
-          <p:cNvPr id="20" name="Rectangle 19"/>
-          <p:cNvSpPr/>
-          <p:nvPr/>
-        </p:nvSpPr>
-        <p:spPr>
-          <a:xfrm>
-            <a:off x="365760" y="2505456"/>
-            <a:ext cx="5303520" cy="384048"/>
-          </a:xfrm>
-          <a:prstGeom prst="rect">
-            <a:avLst/>
-          </a:prstGeom>
-          <a:solidFill>
-            <a:srgbClr val="FFFFFF"/>
-          </a:solidFill>
-          <a:ln w="6350">
-            <a:solidFill>
-              <a:srgbClr val="E0E0E0"/>
-            </a:solidFill>
-          </a:ln>
-        </p:spPr>
-        <p:style>
-          <a:lnRef idx="1">
-            <a:schemeClr val="accent1"/>
-          </a:lnRef>
-          <a:fillRef idx="3">
-            <a:schemeClr val="accent1"/>
-          </a:fillRef>
-          <a:effectRef idx="2">
-            <a:schemeClr val="accent1"/>
-          </a:effectRef>
-          <a:fontRef idx="minor">
-            <a:schemeClr val="lt1"/>
-          </a:fontRef>
-        </p:style>
-        <p:txBody>
-          <a:bodyPr rtlCol="0" anchor="ctr"/>
-          <a:lstStyle/>
-          <a:p>
-            <a:pPr algn="ctr"/>
-          </a:p>
-        </p:txBody>
-      </p:sp>
-      <p:sp>
-        <p:nvSpPr>
-          <p:cNvPr id="21" name="TextBox 20"/>
-          <p:cNvSpPr txBox="1"/>
-          <p:nvPr/>
-        </p:nvSpPr>
-        <p:spPr>
-          <a:xfrm>
-            <a:off x="457200" y="2551175"/>
-            <a:ext cx="2468880" cy="320040"/>
-          </a:xfrm>
-          <a:prstGeom prst="rect">
-            <a:avLst/>
-          </a:prstGeom>
-          <a:noFill/>
-        </p:spPr>
-        <p:txBody>
-          <a:bodyPr wrap="square">
-            <a:spAutoFit/>
-          </a:bodyPr>
-          <a:lstStyle/>
-          <a:p>
-            <a:r>
-              <a:rPr sz="950" b="1">
-                <a:solidFill>
-                  <a:srgbClr val="C0392B"/>
-                </a:solidFill>
-              </a:rPr>
-              <a:t>Changing Standards</a:t>
-            </a:r>
-          </a:p>
-        </p:txBody>
-      </p:sp>
-      <p:sp>
-        <p:nvSpPr>
-          <p:cNvPr id="22" name="TextBox 21"/>
-          <p:cNvSpPr txBox="1"/>
-          <p:nvPr/>
-        </p:nvSpPr>
-        <p:spPr>
-          <a:xfrm>
-            <a:off x="3063240" y="2523744"/>
-            <a:ext cx="2560320" cy="365760"/>
-          </a:xfrm>
-          <a:prstGeom prst="rect">
-            <a:avLst/>
-          </a:prstGeom>
-          <a:noFill/>
-        </p:spPr>
-        <p:txBody>
-          <a:bodyPr wrap="square">
-            <a:spAutoFit/>
-          </a:bodyPr>
-          <a:lstStyle/>
-          <a:p>
-            <a:r>
-              <a:rPr sz="950" b="1">
-                <a:solidFill>
-                  <a:srgbClr val="1A3A6E"/>
-                </a:solidFill>
-              </a:rPr>
-              <a:t>Live Source Pipeline</a:t>
-            </a:r>
-          </a:p>
-          <a:p>
-            <a:r>
-              <a:rPr sz="850">
-                <a:solidFill>
-                  <a:srgbClr val="333333"/>
-                </a:solidFill>
-              </a:rPr>
-              <a:t>Pull info from official BIS sources automatically</a:t>
-            </a:r>
-          </a:p>
-        </p:txBody>
-      </p:sp>
-      <p:sp>
-        <p:nvSpPr>
-          <p:cNvPr id="23" name="Rectangle 22"/>
-          <p:cNvSpPr/>
-          <p:nvPr/>
-        </p:nvSpPr>
-        <p:spPr>
-          <a:xfrm>
-            <a:off x="365760" y="2889503"/>
-            <a:ext cx="5303520" cy="384048"/>
-          </a:xfrm>
-          <a:prstGeom prst="rect">
-            <a:avLst/>
-          </a:prstGeom>
-          <a:solidFill>
-            <a:srgbClr val="F5F5F5"/>
-          </a:solidFill>
-          <a:ln w="6350">
-            <a:solidFill>
-              <a:srgbClr val="E0E0E0"/>
-            </a:solidFill>
-          </a:ln>
-        </p:spPr>
-        <p:style>
-          <a:lnRef idx="1">
-            <a:schemeClr val="accent1"/>
-          </a:lnRef>
-          <a:fillRef idx="3">
-            <a:schemeClr val="accent1"/>
-          </a:fillRef>
-          <a:effectRef idx="2">
-            <a:schemeClr val="accent1"/>
-          </a:effectRef>
-          <a:fontRef idx="minor">
-            <a:schemeClr val="lt1"/>
-          </a:fontRef>
-        </p:style>
-        <p:txBody>
-          <a:bodyPr rtlCol="0" anchor="ctr"/>
-          <a:lstStyle/>
-          <a:p>
-            <a:pPr algn="ctr"/>
-          </a:p>
-        </p:txBody>
-      </p:sp>
-      <p:sp>
-        <p:nvSpPr>
-          <p:cNvPr id="24" name="TextBox 23"/>
-          <p:cNvSpPr txBox="1"/>
-          <p:nvPr/>
-        </p:nvSpPr>
-        <p:spPr>
-          <a:xfrm>
-            <a:off x="457200" y="2935223"/>
-            <a:ext cx="2468880" cy="320040"/>
-          </a:xfrm>
-          <a:prstGeom prst="rect">
-            <a:avLst/>
-          </a:prstGeom>
-          <a:noFill/>
-        </p:spPr>
-        <p:txBody>
-          <a:bodyPr wrap="square">
-            <a:spAutoFit/>
-          </a:bodyPr>
-          <a:lstStyle/>
-          <a:p>
-            <a:r>
-              <a:rPr sz="950" b="1">
-                <a:solidFill>
-                  <a:srgbClr val="C0392B"/>
-                </a:solidFill>
-              </a:rPr>
-              <a:t>Finding Testing Labs</a:t>
-            </a:r>
-          </a:p>
-        </p:txBody>
-      </p:sp>
-      <p:sp>
-        <p:nvSpPr>
-          <p:cNvPr id="25" name="TextBox 24"/>
-          <p:cNvSpPr txBox="1"/>
-          <p:nvPr/>
-        </p:nvSpPr>
-        <p:spPr>
-          <a:xfrm>
-            <a:off x="3063240" y="2907791"/>
-            <a:ext cx="2560320" cy="365760"/>
-          </a:xfrm>
-          <a:prstGeom prst="rect">
-            <a:avLst/>
-          </a:prstGeom>
-          <a:noFill/>
-        </p:spPr>
-        <p:txBody>
-          <a:bodyPr wrap="square">
-            <a:spAutoFit/>
-          </a:bodyPr>
-          <a:lstStyle/>
-          <a:p>
-            <a:r>
-              <a:rPr sz="950" b="1">
-                <a:solidFill>
-                  <a:srgbClr val="1A3A6E"/>
-                </a:solidFill>
-              </a:rPr>
-              <a:t>Lab Directory</a:t>
-            </a:r>
-          </a:p>
-          <a:p>
-            <a:r>
-              <a:rPr sz="850">
-                <a:solidFill>
-                  <a:srgbClr val="333333"/>
-                </a:solidFill>
-              </a:rPr>
-              <a:t>Location-based finder with Google Maps directions</a:t>
-            </a:r>
-          </a:p>
-        </p:txBody>
-      </p:sp>
-      <p:sp>
-        <p:nvSpPr>
-          <p:cNvPr id="26" name="Rectangle 25"/>
-          <p:cNvSpPr/>
-          <p:nvPr/>
-        </p:nvSpPr>
-        <p:spPr>
-          <a:xfrm>
-            <a:off x="365760" y="3273551"/>
-            <a:ext cx="5303520" cy="384048"/>
-          </a:xfrm>
-          <a:prstGeom prst="rect">
-            <a:avLst/>
-          </a:prstGeom>
-          <a:solidFill>
-            <a:srgbClr val="FFFFFF"/>
-          </a:solidFill>
-          <a:ln w="6350">
-            <a:solidFill>
-              <a:srgbClr val="E0E0E0"/>
-            </a:solidFill>
-          </a:ln>
-        </p:spPr>
-        <p:style>
-          <a:lnRef idx="1">
-            <a:schemeClr val="accent1"/>
-          </a:lnRef>
-          <a:fillRef idx="3">
-            <a:schemeClr val="accent1"/>
-          </a:fillRef>
-          <a:effectRef idx="2">
-            <a:schemeClr val="accent1"/>
-          </a:effectRef>
-          <a:fontRef idx="minor">
-            <a:schemeClr val="lt1"/>
-          </a:fontRef>
-        </p:style>
-        <p:txBody>
-          <a:bodyPr rtlCol="0" anchor="ctr"/>
-          <a:lstStyle/>
-          <a:p>
-            <a:pPr algn="ctr"/>
-          </a:p>
-        </p:txBody>
-      </p:sp>
-      <p:sp>
-        <p:nvSpPr>
-          <p:cNvPr id="27" name="TextBox 26"/>
-          <p:cNvSpPr txBox="1"/>
-          <p:nvPr/>
-        </p:nvSpPr>
-        <p:spPr>
-          <a:xfrm>
-            <a:off x="457200" y="3319271"/>
-            <a:ext cx="2468880" cy="320040"/>
-          </a:xfrm>
-          <a:prstGeom prst="rect">
-            <a:avLst/>
-          </a:prstGeom>
-          <a:noFill/>
-        </p:spPr>
-        <p:txBody>
-          <a:bodyPr wrap="square">
-            <a:spAutoFit/>
-          </a:bodyPr>
-          <a:lstStyle/>
-          <a:p>
-            <a:r>
-              <a:rPr sz="950" b="1">
-                <a:solidFill>
-                  <a:srgbClr val="C0392B"/>
-                </a:solidFill>
-              </a:rPr>
-              <a:t>Complex Certification</a:t>
-            </a:r>
-          </a:p>
-        </p:txBody>
-      </p:sp>
-      <p:sp>
-        <p:nvSpPr>
-          <p:cNvPr id="28" name="TextBox 27"/>
-          <p:cNvSpPr txBox="1"/>
-          <p:nvPr/>
-        </p:nvSpPr>
-        <p:spPr>
-          <a:xfrm>
-            <a:off x="3063240" y="3291839"/>
-            <a:ext cx="2560320" cy="365760"/>
-          </a:xfrm>
-          <a:prstGeom prst="rect">
-            <a:avLst/>
-          </a:prstGeom>
-          <a:noFill/>
-        </p:spPr>
-        <p:txBody>
-          <a:bodyPr wrap="square">
-            <a:spAutoFit/>
-          </a:bodyPr>
-          <a:lstStyle/>
-          <a:p>
-            <a:r>
-              <a:rPr sz="950" b="1">
-                <a:solidFill>
-                  <a:srgbClr val="1A3A6E"/>
-                </a:solidFill>
-              </a:rPr>
-              <a:t>Step-by-Step Guidance</a:t>
-            </a:r>
-          </a:p>
-          <a:p>
-            <a:r>
-              <a:rPr sz="850">
-                <a:solidFill>
-                  <a:srgbClr val="333333"/>
-                </a:solidFill>
-              </a:rPr>
-              <a:t>Clear process for ISI Mark, Hallmark &amp; Eco Mark</a:t>
-            </a:r>
-          </a:p>
-        </p:txBody>
-      </p:sp>
-      <p:sp>
-        <p:nvSpPr>
-          <p:cNvPr id="29" name="Rectangle 28"/>
-          <p:cNvSpPr/>
-          <p:nvPr/>
-        </p:nvSpPr>
-        <p:spPr>
-          <a:xfrm>
-            <a:off x="365760" y="3657599"/>
-            <a:ext cx="5303520" cy="384048"/>
-          </a:xfrm>
-          <a:prstGeom prst="rect">
-            <a:avLst/>
-          </a:prstGeom>
-          <a:solidFill>
-            <a:srgbClr val="F5F5F5"/>
-          </a:solidFill>
-          <a:ln w="6350">
-            <a:solidFill>
-              <a:srgbClr val="E0E0E0"/>
-            </a:solidFill>
-          </a:ln>
-        </p:spPr>
-        <p:style>
-          <a:lnRef idx="1">
-            <a:schemeClr val="accent1"/>
-          </a:lnRef>
-          <a:fillRef idx="3">
-            <a:schemeClr val="accent1"/>
-          </a:fillRef>
-          <a:effectRef idx="2">
-            <a:schemeClr val="accent1"/>
-          </a:effectRef>
-          <a:fontRef idx="minor">
-            <a:schemeClr val="lt1"/>
-          </a:fontRef>
-        </p:style>
-        <p:txBody>
-          <a:bodyPr rtlCol="0" anchor="ctr"/>
-          <a:lstStyle/>
-          <a:p>
-            <a:pPr algn="ctr"/>
-          </a:p>
-        </p:txBody>
-      </p:sp>
-      <p:sp>
-        <p:nvSpPr>
-          <p:cNvPr id="30" name="TextBox 29"/>
-          <p:cNvSpPr txBox="1"/>
-          <p:nvPr/>
-        </p:nvSpPr>
-        <p:spPr>
-          <a:xfrm>
-            <a:off x="457200" y="3703320"/>
-            <a:ext cx="2468880" cy="320040"/>
-          </a:xfrm>
-          <a:prstGeom prst="rect">
-            <a:avLst/>
-          </a:prstGeom>
-          <a:noFill/>
-        </p:spPr>
-        <p:txBody>
-          <a:bodyPr wrap="square">
-            <a:spAutoFit/>
-          </a:bodyPr>
-          <a:lstStyle/>
-          <a:p>
-            <a:r>
-              <a:rPr sz="950" b="1">
-                <a:solidFill>
-                  <a:srgbClr val="C0392B"/>
-                </a:solidFill>
-              </a:rPr>
-              <a:t>AI Hallucinations</a:t>
-            </a:r>
-          </a:p>
-        </p:txBody>
-      </p:sp>
-      <p:sp>
-        <p:nvSpPr>
-          <p:cNvPr id="31" name="TextBox 30"/>
-          <p:cNvSpPr txBox="1"/>
-          <p:nvPr/>
-        </p:nvSpPr>
-        <p:spPr>
-          <a:xfrm>
-            <a:off x="3063240" y="3675887"/>
-            <a:ext cx="2560320" cy="365760"/>
-          </a:xfrm>
-          <a:prstGeom prst="rect">
-            <a:avLst/>
-          </a:prstGeom>
-          <a:noFill/>
-        </p:spPr>
-        <p:txBody>
-          <a:bodyPr wrap="square">
-            <a:spAutoFit/>
-          </a:bodyPr>
-          <a:lstStyle/>
-          <a:p>
-            <a:r>
-              <a:rPr sz="950" b="1">
-                <a:solidFill>
-                  <a:srgbClr val="1A3A6E"/>
-                </a:solidFill>
-              </a:rPr>
-              <a:t>Source-Grounded RAG</a:t>
-            </a:r>
-          </a:p>
-          <a:p>
-            <a:r>
-              <a:rPr sz="850">
-                <a:solidFill>
-                  <a:srgbClr val="333333"/>
-                </a:solidFill>
-              </a:rPr>
-              <a:t>Responses based on verified BIS documents only</a:t>
-            </a:r>
-          </a:p>
-        </p:txBody>
-      </p:sp>
-      <p:sp>
-        <p:nvSpPr>
-          <p:cNvPr id="32" name="Rectangle 31"/>
-          <p:cNvSpPr/>
-          <p:nvPr/>
-        </p:nvSpPr>
-        <p:spPr>
-          <a:xfrm>
-            <a:off x="365760" y="4041648"/>
-            <a:ext cx="5303520" cy="384048"/>
-          </a:xfrm>
-          <a:prstGeom prst="rect">
-            <a:avLst/>
-          </a:prstGeom>
-          <a:solidFill>
-            <a:srgbClr val="FFFFFF"/>
-          </a:solidFill>
-          <a:ln w="6350">
-            <a:solidFill>
-              <a:srgbClr val="E0E0E0"/>
-            </a:solidFill>
-          </a:ln>
-        </p:spPr>
-        <p:style>
-          <a:lnRef idx="1">
-            <a:schemeClr val="accent1"/>
-          </a:lnRef>
-          <a:fillRef idx="3">
-            <a:schemeClr val="accent1"/>
-          </a:fillRef>
-          <a:effectRef idx="2">
-            <a:schemeClr val="accent1"/>
-          </a:effectRef>
-          <a:fontRef idx="minor">
-            <a:schemeClr val="lt1"/>
-          </a:fontRef>
-        </p:style>
-        <p:txBody>
-          <a:bodyPr rtlCol="0" anchor="ctr"/>
-          <a:lstStyle/>
-          <a:p>
-            <a:pPr algn="ctr"/>
-          </a:p>
-        </p:txBody>
-      </p:sp>
-      <p:sp>
-        <p:nvSpPr>
-          <p:cNvPr id="33" name="TextBox 32"/>
-          <p:cNvSpPr txBox="1"/>
-          <p:nvPr/>
-        </p:nvSpPr>
-        <p:spPr>
-          <a:xfrm>
-            <a:off x="457200" y="4087368"/>
-            <a:ext cx="2468880" cy="320040"/>
-          </a:xfrm>
-          <a:prstGeom prst="rect">
-            <a:avLst/>
-          </a:prstGeom>
-          <a:noFill/>
-        </p:spPr>
-        <p:txBody>
-          <a:bodyPr wrap="square">
-            <a:spAutoFit/>
-          </a:bodyPr>
-          <a:lstStyle/>
-          <a:p>
-            <a:r>
-              <a:rPr sz="950" b="1">
-                <a:solidFill>
-                  <a:srgbClr val="C0392B"/>
-                </a:solidFill>
-              </a:rPr>
-              <a:t>Language Barrier</a:t>
-            </a:r>
-          </a:p>
-        </p:txBody>
-      </p:sp>
-      <p:sp>
-        <p:nvSpPr>
-          <p:cNvPr id="34" name="TextBox 33"/>
-          <p:cNvSpPr txBox="1"/>
-          <p:nvPr/>
-        </p:nvSpPr>
-        <p:spPr>
-          <a:xfrm>
-            <a:off x="3063240" y="4059935"/>
-            <a:ext cx="2560320" cy="365760"/>
-          </a:xfrm>
-          <a:prstGeom prst="rect">
-            <a:avLst/>
-          </a:prstGeom>
-          <a:noFill/>
-        </p:spPr>
-        <p:txBody>
-          <a:bodyPr wrap="square">
-            <a:spAutoFit/>
-          </a:bodyPr>
-          <a:lstStyle/>
-          <a:p>
-            <a:r>
-              <a:rPr sz="950" b="1">
-                <a:solidFill>
-                  <a:srgbClr val="1A3A6E"/>
-                </a:solidFill>
-              </a:rPr>
-              <a:t>22 Indian Languages</a:t>
-            </a:r>
-          </a:p>
-          <a:p>
-            <a:r>
-              <a:rPr sz="850">
-                <a:solidFill>
-                  <a:srgbClr val="333333"/>
-                </a:solidFill>
-              </a:rPr>
-              <a:t>Auto-detect → translate → RAG → translate back</a:t>
-            </a:r>
-          </a:p>
-        </p:txBody>
-      </p:sp>
-      <p:sp>
-        <p:nvSpPr>
-          <p:cNvPr id="35" name="Rectangle 34"/>
-          <p:cNvSpPr/>
-          <p:nvPr/>
-        </p:nvSpPr>
-        <p:spPr>
-          <a:xfrm>
-            <a:off x="365760" y="4425696"/>
-            <a:ext cx="5303520" cy="384048"/>
-          </a:xfrm>
-          <a:prstGeom prst="rect">
-            <a:avLst/>
-          </a:prstGeom>
-          <a:solidFill>
-            <a:srgbClr val="F5F5F5"/>
-          </a:solidFill>
-          <a:ln w="6350">
-            <a:solidFill>
-              <a:srgbClr val="E0E0E0"/>
-            </a:solidFill>
-          </a:ln>
-        </p:spPr>
-        <p:style>
-          <a:lnRef idx="1">
-            <a:schemeClr val="accent1"/>
-          </a:lnRef>
-          <a:fillRef idx="3">
-            <a:schemeClr val="accent1"/>
-          </a:fillRef>
-          <a:effectRef idx="2">
-            <a:schemeClr val="accent1"/>
-          </a:effectRef>
-          <a:fontRef idx="minor">
-            <a:schemeClr val="lt1"/>
-          </a:fontRef>
-        </p:style>
-        <p:txBody>
-          <a:bodyPr rtlCol="0" anchor="ctr"/>
-          <a:lstStyle/>
-          <a:p>
-            <a:pPr algn="ctr"/>
-          </a:p>
-        </p:txBody>
-      </p:sp>
-      <p:sp>
-        <p:nvSpPr>
-          <p:cNvPr id="36" name="TextBox 35"/>
-          <p:cNvSpPr txBox="1"/>
-          <p:nvPr/>
-        </p:nvSpPr>
-        <p:spPr>
-          <a:xfrm>
-            <a:off x="457200" y="4471416"/>
-            <a:ext cx="2468880" cy="320040"/>
-          </a:xfrm>
-          <a:prstGeom prst="rect">
-            <a:avLst/>
-          </a:prstGeom>
-          <a:noFill/>
-        </p:spPr>
-        <p:txBody>
-          <a:bodyPr wrap="square">
-            <a:spAutoFit/>
-          </a:bodyPr>
-          <a:lstStyle/>
-          <a:p>
-            <a:r>
-              <a:rPr sz="950" b="1">
-                <a:solidFill>
-                  <a:srgbClr val="C0392B"/>
-                </a:solidFill>
-              </a:rPr>
-              <a:t>Different User Needs</a:t>
-            </a:r>
-          </a:p>
-        </p:txBody>
-      </p:sp>
-      <p:sp>
-        <p:nvSpPr>
-          <p:cNvPr id="37" name="TextBox 36"/>
-          <p:cNvSpPr txBox="1"/>
-          <p:nvPr/>
-        </p:nvSpPr>
-        <p:spPr>
-          <a:xfrm>
-            <a:off x="3063240" y="4443983"/>
-            <a:ext cx="2560320" cy="365760"/>
-          </a:xfrm>
-          <a:prstGeom prst="rect">
-            <a:avLst/>
-          </a:prstGeom>
-          <a:noFill/>
-        </p:spPr>
-        <p:txBody>
-          <a:bodyPr wrap="square">
-            <a:spAutoFit/>
-          </a:bodyPr>
-          <a:lstStyle/>
-          <a:p>
-            <a:r>
-              <a:rPr sz="950" b="1">
-                <a:solidFill>
-                  <a:srgbClr val="1A3A6E"/>
-                </a:solidFill>
-              </a:rPr>
-              <a:t>Context-Aware AI</a:t>
-            </a:r>
-          </a:p>
-          <a:p>
-            <a:r>
-              <a:rPr sz="850">
-                <a:solidFill>
-                  <a:srgbClr val="333333"/>
-                </a:solidFill>
-              </a:rPr>
-              <a:t>Tailors guidance per user product and query</a:t>
-            </a:r>
-          </a:p>
-        </p:txBody>
-      </p:sp>
-      <p:sp>
-        <p:nvSpPr>
-          <p:cNvPr id="38" name="TextBox 37"/>
-          <p:cNvSpPr txBox="1"/>
-          <p:nvPr/>
-        </p:nvSpPr>
-        <p:spPr>
-          <a:xfrm>
-            <a:off x="6217920" y="1005840"/>
-            <a:ext cx="5486400" cy="320040"/>
-          </a:xfrm>
-          <a:prstGeom prst="rect">
-            <a:avLst/>
-          </a:prstGeom>
-          <a:noFill/>
-        </p:spPr>
-        <p:txBody>
-          <a:bodyPr wrap="none">
-            <a:spAutoFit/>
-          </a:bodyPr>
-          <a:lstStyle/>
-          <a:p>
-            <a:r>
-              <a:rPr sz="1600" b="1">
-                <a:solidFill>
-                  <a:srgbClr val="1A3A6E"/>
-                </a:solidFill>
-              </a:rPr>
               <a:t>System Architecture:</a:t>
             </a:r>
+            <a:endParaRPr sz="1600" b="1">
+              <a:solidFill>
+                <a:srgbClr val="1A3A6E"/>
+              </a:solidFill>
+            </a:endParaRPr>
           </a:p>
         </p:txBody>
       </p:sp>
@@ -5244,7 +4527,7 @@
         </p:nvSpPr>
         <p:spPr>
           <a:xfrm>
-            <a:off x="7498079" y="1417320"/>
+            <a:off x="7609204" y="1526540"/>
             <a:ext cx="2377440" cy="365760"/>
           </a:xfrm>
           <a:prstGeom prst="roundRect">
@@ -5274,18 +4557,31 @@
           </a:fontRef>
         </p:style>
         <p:txBody>
-          <a:bodyPr rtlCol="0" anchor="ctr" wrap="square" lIns="50800" rIns="50800"/>
+          <a:bodyPr wrap="square" lIns="50800" rIns="50800" rtlCol="0" anchor="ctr"/>
           <a:lstStyle/>
           <a:p>
             <a:pPr algn="ctr"/>
             <a:r>
-              <a:rPr sz="900" b="0">
+              <a:rPr lang="zh-CN" altLang="en-US" sz="1000" b="0">
                 <a:solidFill>
                   <a:srgbClr val="333333"/>
                 </a:solidFill>
               </a:rPr>
+              <a:t>👤 </a:t>
+            </a:r>
+            <a:r>
+              <a:rPr lang="en-US" altLang="en-US" sz="1000" b="0">
+                <a:solidFill>
+                  <a:srgbClr val="333333"/>
+                </a:solidFill>
+              </a:rPr>
               <a:t>User Query</a:t>
             </a:r>
+            <a:endParaRPr lang="en-US" altLang="en-US" sz="1000" b="0">
+              <a:solidFill>
+                <a:srgbClr val="333333"/>
+              </a:solidFill>
+            </a:endParaRPr>
           </a:p>
         </p:txBody>
       </p:sp>
@@ -5297,7 +4593,7 @@
         </p:nvSpPr>
         <p:spPr>
           <a:xfrm>
-            <a:off x="7498079" y="1920240"/>
+            <a:off x="7609204" y="2203450"/>
             <a:ext cx="2377440" cy="365760"/>
           </a:xfrm>
           <a:prstGeom prst="roundRect">
@@ -5327,19 +4623,31 @@
           </a:fontRef>
         </p:style>
         <p:txBody>
-          <a:bodyPr rtlCol="0" anchor="ctr" wrap="square" lIns="50800" rIns="50800"/>
+          <a:bodyPr wrap="square" lIns="50800" rIns="50800" rtlCol="0" anchor="ctr"/>
           <a:lstStyle/>
           <a:p>
             <a:pPr algn="ctr"/>
             <a:r>
-              <a:rPr sz="800" b="0">
+              <a:rPr lang="zh-CN" altLang="en-US" sz="1000" b="0">
                 <a:solidFill>
                   <a:srgbClr val="333333"/>
                 </a:solidFill>
               </a:rPr>
-              <a:t>Auto-Detect → Translate
-(22 Indian Languages)</a:t>
-            </a:r>
+              <a:t>🌐 </a:t>
+            </a:r>
+            <a:r>
+              <a:rPr lang="en-US" altLang="en-US" sz="1000" b="0">
+                <a:solidFill>
+                  <a:srgbClr val="333333"/>
+                </a:solidFill>
+              </a:rPr>
+              <a:t>Auto-Detect → Translate (22 Languages)</a:t>
+            </a:r>
+            <a:endParaRPr lang="en-US" altLang="en-US" sz="1000" b="0">
+              <a:solidFill>
+                <a:srgbClr val="333333"/>
+              </a:solidFill>
+            </a:endParaRPr>
           </a:p>
         </p:txBody>
       </p:sp>
@@ -5351,7 +4659,7 @@
         </p:nvSpPr>
         <p:spPr>
           <a:xfrm>
-            <a:off x="7315200" y="2423160"/>
+            <a:off x="7429500" y="2848610"/>
             <a:ext cx="2743200" cy="411480"/>
           </a:xfrm>
           <a:prstGeom prst="roundRect">
@@ -5381,18 +4689,23 @@
           </a:fontRef>
         </p:style>
         <p:txBody>
-          <a:bodyPr rtlCol="0" anchor="ctr" wrap="square" lIns="50800" rIns="50800"/>
+          <a:bodyPr wrap="square" lIns="50800" rIns="50800" rtlCol="0" anchor="ctr"/>
           <a:lstStyle/>
           <a:p>
             <a:pPr algn="ctr"/>
             <a:r>
-              <a:rPr sz="900" b="1">
+              <a:rPr lang="en-US" altLang="en-US" sz="1000" b="1">
                 <a:solidFill>
                   <a:srgbClr val="FFFFFF"/>
                 </a:solidFill>
               </a:rPr>
-              <a:t>RAG Engine (ONNX + FAISS)</a:t>
-            </a:r>
+              <a:t>⚡ RAG Engine (ONNX + FAISS)</a:t>
+            </a:r>
+            <a:endParaRPr lang="en-US" altLang="en-US" sz="1000" b="1">
+              <a:solidFill>
+                <a:srgbClr val="FFFFFF"/>
+              </a:solidFill>
+            </a:endParaRPr>
           </a:p>
         </p:txBody>
       </p:sp>
@@ -5404,7 +4717,7 @@
         </p:nvSpPr>
         <p:spPr>
           <a:xfrm>
-            <a:off x="6400800" y="2971800"/>
+            <a:off x="6675120" y="3572510"/>
             <a:ext cx="2011680" cy="347472"/>
           </a:xfrm>
           <a:prstGeom prst="roundRect">
@@ -5434,19 +4747,48 @@
           </a:fontRef>
         </p:style>
         <p:txBody>
-          <a:bodyPr rtlCol="0" anchor="ctr" wrap="square" lIns="50800" rIns="50800"/>
+          <a:bodyPr wrap="square" lIns="50800" rIns="50800" rtlCol="0" anchor="ctr"/>
           <a:lstStyle/>
           <a:p>
             <a:pPr algn="ctr"/>
             <a:r>
+              <a:rPr lang="zh-CN" altLang="en-US" sz="800" b="0">
+                <a:solidFill>
+                  <a:srgbClr val="333333"/>
+                </a:solidFill>
+              </a:rPr>
+              <a:t>🧠 </a:t>
+            </a:r>
+            <a:r>
+              <a:rPr lang="en-US" altLang="en-US" sz="800" b="0">
+                <a:solidFill>
+                  <a:srgbClr val="333333"/>
+                </a:solidFill>
+              </a:rPr>
+              <a:t>ONNX Embeddings</a:t>
+            </a:r>
+            <a:r>
               <a:rPr sz="800" b="0">
                 <a:solidFill>
                   <a:srgbClr val="333333"/>
                 </a:solidFill>
               </a:rPr>
-              <a:t>ONNX Embeddings
-all-MiniLM-L6-v2</a:t>
-            </a:r>
+              <a:t>
+</a:t>
+            </a:r>
+            <a:r>
+              <a:rPr lang="en-US" altLang="en-US" sz="800" b="0">
+                <a:solidFill>
+                  <a:srgbClr val="333333"/>
+                </a:solidFill>
+              </a:rPr>
+              <a:t>all-MiniLM-L6-v2</a:t>
+            </a:r>
+            <a:endParaRPr lang="en-US" altLang="en-US" sz="800" b="0">
+              <a:solidFill>
+                <a:srgbClr val="333333"/>
+              </a:solidFill>
+            </a:endParaRPr>
           </a:p>
         </p:txBody>
       </p:sp>
@@ -5458,7 +4800,7 @@
         </p:nvSpPr>
         <p:spPr>
           <a:xfrm>
-            <a:off x="8595360" y="2971800"/>
+            <a:off x="8869680" y="3572510"/>
             <a:ext cx="2011680" cy="347472"/>
           </a:xfrm>
           <a:prstGeom prst="roundRect">
@@ -5488,19 +4830,40 @@
           </a:fontRef>
         </p:style>
         <p:txBody>
-          <a:bodyPr rtlCol="0" anchor="ctr" wrap="square" lIns="50800" rIns="50800"/>
+          <a:bodyPr wrap="square" lIns="50800" rIns="50800" rtlCol="0" anchor="ctr"/>
           <a:lstStyle/>
           <a:p>
             <a:pPr algn="ctr"/>
             <a:r>
+              <a:rPr lang="zh-CN" altLang="en-US" sz="800" b="0">
+                <a:solidFill>
+                  <a:srgbClr val="333333"/>
+                </a:solidFill>
+              </a:rPr>
+              <a:t>📊 </a:t>
+            </a:r>
+            <a:r>
+              <a:rPr lang="en-US" altLang="en-US" sz="800" b="0">
+                <a:solidFill>
+                  <a:srgbClr val="333333"/>
+                </a:solidFill>
+              </a:rPr>
+              <a:t>FAISS Vector Store</a:t>
+            </a:r>
+            <a:r>
               <a:rPr sz="800" b="0">
                 <a:solidFill>
                   <a:srgbClr val="333333"/>
                 </a:solidFill>
               </a:rPr>
-              <a:t>FAISS Vector Store
+              <a:t>
 28 Standards</a:t>
             </a:r>
+            <a:endParaRPr sz="800" b="0">
+              <a:solidFill>
+                <a:srgbClr val="333333"/>
+              </a:solidFill>
+            </a:endParaRPr>
           </a:p>
         </p:txBody>
       </p:sp>
@@ -5512,7 +4875,7 @@
         </p:nvSpPr>
         <p:spPr>
           <a:xfrm>
-            <a:off x="7315200" y="3474720"/>
+            <a:off x="7522210" y="4216400"/>
             <a:ext cx="2743200" cy="365760"/>
           </a:xfrm>
           <a:prstGeom prst="roundRect">
@@ -5542,18 +4905,31 @@
           </a:fontRef>
         </p:style>
         <p:txBody>
-          <a:bodyPr rtlCol="0" anchor="ctr" wrap="square" lIns="50800" rIns="50800"/>
+          <a:bodyPr wrap="square" lIns="50800" rIns="50800" rtlCol="0" anchor="ctr"/>
           <a:lstStyle/>
           <a:p>
             <a:pPr algn="ctr"/>
             <a:r>
-              <a:rPr sz="900" b="0">
+              <a:rPr lang="zh-CN" altLang="en-US" sz="1000" b="0">
                 <a:solidFill>
                   <a:srgbClr val="333333"/>
                 </a:solidFill>
               </a:rPr>
+              <a:t>🤖 </a:t>
+            </a:r>
+            <a:r>
+              <a:rPr lang="en-US" altLang="en-US" sz="1000" b="0">
+                <a:solidFill>
+                  <a:srgbClr val="333333"/>
+                </a:solidFill>
+              </a:rPr>
               <a:t>Gemini 3.6 Flash (LLM)</a:t>
             </a:r>
+            <a:endParaRPr lang="en-US" altLang="en-US" sz="1000" b="0">
+              <a:solidFill>
+                <a:srgbClr val="333333"/>
+              </a:solidFill>
+            </a:endParaRPr>
           </a:p>
         </p:txBody>
       </p:sp>
@@ -5565,7 +4941,7 @@
         </p:nvSpPr>
         <p:spPr>
           <a:xfrm>
-            <a:off x="6217920" y="3977639"/>
+            <a:off x="6472555" y="4791709"/>
             <a:ext cx="1645920" cy="320040"/>
           </a:xfrm>
           <a:prstGeom prst="roundRect">
@@ -5595,18 +4971,47 @@
           </a:fontRef>
         </p:style>
         <p:txBody>
-          <a:bodyPr rtlCol="0" anchor="ctr" wrap="square" lIns="50800" rIns="50800"/>
+          <a:bodyPr wrap="square" lIns="50800" rIns="50800" rtlCol="0" anchor="ctr"/>
           <a:lstStyle/>
           <a:p>
             <a:pPr algn="ctr"/>
             <a:r>
-              <a:rPr sz="900" b="0">
+              <a:rPr lang="zh-CN" altLang="en-US" sz="1000" b="0">
                 <a:solidFill>
                   <a:srgbClr val="333333"/>
                 </a:solidFill>
               </a:rPr>
-              <a:t>BIS Standards (28)</a:t>
-            </a:r>
+              <a:t>📚 </a:t>
+            </a:r>
+            <a:r>
+              <a:rPr lang="en-US" altLang="en-US" sz="1000" b="0">
+                <a:solidFill>
+                  <a:srgbClr val="333333"/>
+                </a:solidFill>
+              </a:rPr>
+              <a:t>BIS Standards</a:t>
+            </a:r>
+            <a:r>
+              <a:rPr sz="1000" b="0">
+                <a:solidFill>
+                  <a:srgbClr val="333333"/>
+                </a:solidFill>
+              </a:rPr>
+              <a:t> </a:t>
+            </a:r>
+            <a:r>
+              <a:rPr lang="en-US" altLang="en-US" sz="1000" b="0">
+                <a:solidFill>
+                  <a:srgbClr val="333333"/>
+                </a:solidFill>
+              </a:rPr>
+              <a:t>28 IS Codes</a:t>
+            </a:r>
+            <a:endParaRPr lang="en-US" altLang="en-US" sz="1000" b="0">
+              <a:solidFill>
+                <a:srgbClr val="333333"/>
+              </a:solidFill>
+            </a:endParaRPr>
           </a:p>
         </p:txBody>
       </p:sp>
@@ -5618,7 +5023,7 @@
         </p:nvSpPr>
         <p:spPr>
           <a:xfrm>
-            <a:off x="7955279" y="3977639"/>
+            <a:off x="8229599" y="4797424"/>
             <a:ext cx="1645920" cy="320040"/>
           </a:xfrm>
           <a:prstGeom prst="roundRect">
@@ -5648,18 +5053,47 @@
           </a:fontRef>
         </p:style>
         <p:txBody>
-          <a:bodyPr rtlCol="0" anchor="ctr" wrap="square" lIns="50800" rIns="50800"/>
+          <a:bodyPr wrap="square" lIns="50800" rIns="50800" rtlCol="0" anchor="ctr"/>
           <a:lstStyle/>
           <a:p>
             <a:pPr algn="ctr"/>
             <a:r>
-              <a:rPr sz="900" b="0">
+              <a:rPr lang="zh-CN" altLang="en-US" sz="1000" b="0">
                 <a:solidFill>
                   <a:srgbClr val="333333"/>
                 </a:solidFill>
               </a:rPr>
-              <a:t>25+ BIS Offices</a:t>
-            </a:r>
+              <a:t>📍 25+ </a:t>
+            </a:r>
+            <a:r>
+              <a:rPr lang="en-US" altLang="en-US" sz="1000" b="0">
+                <a:solidFill>
+                  <a:srgbClr val="333333"/>
+                </a:solidFill>
+              </a:rPr>
+              <a:t>BIS Office</a:t>
+            </a:r>
+            <a:r>
+              <a:rPr sz="1000" b="0">
+                <a:solidFill>
+                  <a:srgbClr val="333333"/>
+                </a:solidFill>
+              </a:rPr>
+              <a:t> </a:t>
+            </a:r>
+            <a:r>
+              <a:rPr lang="en-US" altLang="en-US" sz="1000" b="0">
+                <a:solidFill>
+                  <a:srgbClr val="333333"/>
+                </a:solidFill>
+              </a:rPr>
+              <a:t>Geolocation</a:t>
+            </a:r>
+            <a:endParaRPr lang="en-US" altLang="en-US" sz="1000" b="0">
+              <a:solidFill>
+                <a:srgbClr val="333333"/>
+              </a:solidFill>
+            </a:endParaRPr>
           </a:p>
         </p:txBody>
       </p:sp>
@@ -5671,7 +5105,7 @@
         </p:nvSpPr>
         <p:spPr>
           <a:xfrm>
-            <a:off x="9692640" y="3977639"/>
+            <a:off x="9986645" y="4791709"/>
             <a:ext cx="1645920" cy="320040"/>
           </a:xfrm>
           <a:prstGeom prst="roundRect">
@@ -5701,18 +5135,47 @@
           </a:fontRef>
         </p:style>
         <p:txBody>
-          <a:bodyPr rtlCol="0" anchor="ctr" wrap="square" lIns="50800" rIns="50800"/>
+          <a:bodyPr wrap="square" lIns="50800" rIns="50800" rtlCol="0" anchor="ctr"/>
           <a:lstStyle/>
           <a:p>
             <a:pPr algn="ctr"/>
             <a:r>
-              <a:rPr sz="900" b="0">
+              <a:rPr lang="zh-CN" altLang="en-US" sz="1000" b="0">
                 <a:solidFill>
                   <a:srgbClr val="333333"/>
                 </a:solidFill>
               </a:rPr>
-              <a:t>Certifications</a:t>
-            </a:r>
+              <a:t>🔄 </a:t>
+            </a:r>
+            <a:r>
+              <a:rPr lang="en-US" altLang="en-US" sz="1000" b="0">
+                <a:solidFill>
+                  <a:srgbClr val="333333"/>
+                </a:solidFill>
+              </a:rPr>
+              <a:t>Auto-Fetch</a:t>
+            </a:r>
+            <a:endParaRPr lang="en-US" altLang="en-US" sz="1000" b="0">
+              <a:solidFill>
+                <a:srgbClr val="333333"/>
+              </a:solidFill>
+            </a:endParaRPr>
+          </a:p>
+          <a:p>
+            <a:pPr algn="ctr"/>
+            <a:r>
+              <a:rPr lang="en-US" altLang="en-US" sz="1000" b="0">
+                <a:solidFill>
+                  <a:srgbClr val="333333"/>
+                </a:solidFill>
+              </a:rPr>
+              <a:t>Live BIS Pipeline</a:t>
+            </a:r>
+            <a:endParaRPr lang="en-US" altLang="en-US" sz="1000" b="0">
+              <a:solidFill>
+                <a:srgbClr val="333333"/>
+              </a:solidFill>
+            </a:endParaRPr>
           </a:p>
         </p:txBody>
       </p:sp>
@@ -5724,14 +5187,17 @@
         </p:nvSpPr>
         <p:spPr>
           <a:xfrm>
-            <a:off x="6858000" y="4480560"/>
+            <a:off x="7315200" y="5370830"/>
             <a:ext cx="3291840" cy="365760"/>
           </a:xfrm>
           <a:prstGeom prst="roundRect">
             <a:avLst/>
           </a:prstGeom>
           <a:solidFill>
-            <a:srgbClr val="E8F5E9"/>
+            <a:schemeClr val="accent3">
+              <a:lumMod val="20000"/>
+              <a:lumOff val="80000"/>
+            </a:schemeClr>
           </a:solidFill>
           <a:ln w="19050">
             <a:solidFill>
@@ -5754,18 +5220,39 @@
           </a:fontRef>
         </p:style>
         <p:txBody>
-          <a:bodyPr rtlCol="0" anchor="ctr" wrap="square" lIns="50800" rIns="50800"/>
+          <a:bodyPr wrap="square" lIns="50800" rIns="50800" rtlCol="0" anchor="ctr"/>
           <a:lstStyle/>
           <a:p>
             <a:pPr algn="ctr"/>
             <a:r>
-              <a:rPr sz="900" b="1">
-                <a:solidFill>
-                  <a:srgbClr val="FFFFFF"/>
-                </a:solidFill>
-              </a:rPr>
-              <a:t>6-Section Structured Response</a:t>
-            </a:r>
+              <a:rPr sz="1000" b="1">
+                <a:solidFill>
+                  <a:schemeClr val="tx1"/>
+                </a:solidFill>
+              </a:rPr>
+              <a:t> </a:t>
+            </a:r>
+            <a:r>
+              <a:rPr lang="en-US" altLang="en-US" sz="1000" b="1">
+                <a:solidFill>
+                  <a:schemeClr val="tx1"/>
+                </a:solidFill>
+              </a:rPr>
+              <a:t>✅ 6-Section Structured Response</a:t>
+            </a:r>
+            <a:r>
+              <a:rPr sz="1000" b="1">
+                <a:solidFill>
+                  <a:schemeClr val="tx1"/>
+                </a:solidFill>
+              </a:rPr>
+              <a:t>Response</a:t>
+            </a:r>
+            <a:endParaRPr sz="1000" b="1">
+              <a:solidFill>
+                <a:schemeClr val="tx1"/>
+              </a:solidFill>
+            </a:endParaRPr>
           </a:p>
         </p:txBody>
       </p:sp>
@@ -5777,7 +5264,7 @@
         </p:nvSpPr>
         <p:spPr>
           <a:xfrm>
-            <a:off x="6400800" y="4983480"/>
+            <a:off x="6858000" y="6062345"/>
             <a:ext cx="4389120" cy="320040"/>
           </a:xfrm>
           <a:prstGeom prst="roundRect">
@@ -5807,18 +5294,79 @@
           </a:fontRef>
         </p:style>
         <p:txBody>
-          <a:bodyPr rtlCol="0" anchor="ctr" wrap="square" lIns="50800" rIns="50800"/>
+          <a:bodyPr wrap="square" lIns="50800" rIns="50800" rtlCol="0" anchor="ctr"/>
           <a:lstStyle/>
           <a:p>
             <a:pPr algn="ctr"/>
             <a:r>
-              <a:rPr sz="900" b="0">
+              <a:rPr lang="zh-CN" altLang="en-US" sz="1000" b="0">
                 <a:solidFill>
                   <a:srgbClr val="333333"/>
                 </a:solidFill>
               </a:rPr>
-              <a:t>Chat | Standards | Offices | Certifications</a:t>
-            </a:r>
+              <a:t>💬 </a:t>
+            </a:r>
+            <a:r>
+              <a:rPr lang="en-US" altLang="en-US" sz="1000" b="0">
+                <a:solidFill>
+                  <a:srgbClr val="333333"/>
+                </a:solidFill>
+              </a:rPr>
+              <a:t>Chat  |  </a:t>
+            </a:r>
+            <a:r>
+              <a:rPr lang="zh-CN" altLang="en-US" sz="1000" b="0">
+                <a:solidFill>
+                  <a:srgbClr val="333333"/>
+                </a:solidFill>
+              </a:rPr>
+              <a:t>📚 </a:t>
+            </a:r>
+            <a:r>
+              <a:rPr lang="en-US" altLang="en-US" sz="1000" b="0">
+                <a:solidFill>
+                  <a:srgbClr val="333333"/>
+                </a:solidFill>
+              </a:rPr>
+              <a:t>Standards Library  |  </a:t>
+            </a:r>
+            <a:r>
+              <a:rPr lang="zh-CN" altLang="en-US" sz="1000" b="0">
+                <a:solidFill>
+                  <a:srgbClr val="333333"/>
+                </a:solidFill>
+              </a:rPr>
+              <a:t>🏢 </a:t>
+            </a:r>
+            <a:r>
+              <a:rPr lang="en-US" altLang="en-US" sz="1000" b="0">
+                <a:solidFill>
+                  <a:srgbClr val="333333"/>
+                </a:solidFill>
+              </a:rPr>
+              <a:t>Testing Centres  |  </a:t>
+            </a:r>
+            <a:r>
+              <a:rPr lang="zh-CN" altLang="en-US" sz="1000" b="0">
+                <a:solidFill>
+                  <a:srgbClr val="333333"/>
+                </a:solidFill>
+              </a:rPr>
+              <a:t>📋 </a:t>
+            </a:r>
+            <a:r>
+              <a:rPr lang="en-US" altLang="en-US" sz="1000" b="0">
+                <a:solidFill>
+                  <a:srgbClr val="333333"/>
+                </a:solidFill>
+              </a:rPr>
+              <a:t>Certifications</a:t>
+            </a:r>
+            <a:endParaRPr lang="en-US" altLang="en-US" sz="1000" b="0">
+              <a:solidFill>
+                <a:srgbClr val="333333"/>
+              </a:solidFill>
+            </a:endParaRPr>
           </a:p>
         </p:txBody>
       </p:sp>
@@ -5830,7 +5378,7 @@
         </p:nvSpPr>
         <p:spPr>
           <a:xfrm>
-            <a:off x="8549640" y="1828800"/>
+            <a:off x="8732520" y="2028190"/>
             <a:ext cx="137160" cy="109728"/>
           </a:xfrm>
           <a:prstGeom prst="downArrow">
@@ -5873,7 +5421,7 @@
         </p:nvSpPr>
         <p:spPr>
           <a:xfrm>
-            <a:off x="8549640" y="2331720"/>
+            <a:off x="8732520" y="2708275"/>
             <a:ext cx="137160" cy="109728"/>
           </a:xfrm>
           <a:prstGeom prst="downArrow">
@@ -5916,7 +5464,7 @@
         </p:nvSpPr>
         <p:spPr>
           <a:xfrm>
-            <a:off x="8549640" y="2880360"/>
+            <a:off x="8732520" y="3388995"/>
             <a:ext cx="137160" cy="109728"/>
           </a:xfrm>
           <a:prstGeom prst="downArrow">
@@ -5959,7 +5507,7 @@
         </p:nvSpPr>
         <p:spPr>
           <a:xfrm>
-            <a:off x="8549640" y="3429000"/>
+            <a:off x="8732520" y="4044950"/>
             <a:ext cx="137160" cy="109728"/>
           </a:xfrm>
           <a:prstGeom prst="downArrow">
@@ -6002,7 +5550,7 @@
         </p:nvSpPr>
         <p:spPr>
           <a:xfrm>
-            <a:off x="8549640" y="3931920"/>
+            <a:off x="8732520" y="5844540"/>
             <a:ext cx="137160" cy="109728"/>
           </a:xfrm>
           <a:prstGeom prst="downArrow">
@@ -6045,7 +5593,7 @@
         </p:nvSpPr>
         <p:spPr>
           <a:xfrm>
-            <a:off x="8549640" y="4434840"/>
+            <a:off x="8732520" y="4590415"/>
             <a:ext cx="137160" cy="109728"/>
           </a:xfrm>
           <a:prstGeom prst="downArrow">
@@ -6088,7 +5636,7 @@
         </p:nvSpPr>
         <p:spPr>
           <a:xfrm>
-            <a:off x="365760" y="5486400"/>
+            <a:off x="274320" y="4526280"/>
             <a:ext cx="3657600" cy="320040"/>
           </a:xfrm>
           <a:prstGeom prst="rect">
@@ -6110,6 +5658,11 @@
               </a:rPr>
               <a:t>How it addresses the problem:</a:t>
             </a:r>
+            <a:endParaRPr sz="1300" b="1">
+              <a:solidFill>
+                <a:srgbClr val="1A3A6E"/>
+              </a:solidFill>
+            </a:endParaRPr>
           </a:p>
         </p:txBody>
       </p:sp>
@@ -6121,7 +5674,7 @@
         </p:nvSpPr>
         <p:spPr>
           <a:xfrm>
-            <a:off x="914400" y="5760720"/>
+            <a:off x="822325" y="4956810"/>
             <a:ext cx="1188720" cy="1188720"/>
           </a:xfrm>
           <a:prstGeom prst="ellipse">
@@ -6151,7 +5704,7 @@
           </a:fontRef>
         </p:style>
         <p:txBody>
-          <a:bodyPr rtlCol="0" anchor="ctr" wrap="square"/>
+          <a:bodyPr wrap="square" rtlCol="0" anchor="ctr"/>
           <a:lstStyle/>
           <a:p>
             <a:pPr algn="ctr"/>
@@ -6165,6 +5718,11 @@
 COMPLEX
 STANDARDS</a:t>
             </a:r>
+            <a:endParaRPr sz="700" b="1">
+              <a:solidFill>
+                <a:srgbClr val="333333"/>
+              </a:solidFill>
+            </a:endParaRPr>
           </a:p>
         </p:txBody>
       </p:sp>
@@ -6176,7 +5734,7 @@
         </p:nvSpPr>
         <p:spPr>
           <a:xfrm>
-            <a:off x="457200" y="5989320"/>
+            <a:off x="121285" y="5486400"/>
             <a:ext cx="1188720" cy="1188720"/>
           </a:xfrm>
           <a:prstGeom prst="ellipse">
@@ -6206,7 +5764,7 @@
           </a:fontRef>
         </p:style>
         <p:txBody>
-          <a:bodyPr rtlCol="0" anchor="ctr" wrap="square"/>
+          <a:bodyPr wrap="square" rtlCol="0" anchor="ctr"/>
           <a:lstStyle/>
           <a:p>
             <a:pPr algn="ctr"/>
@@ -6220,6 +5778,11 @@
 COMPLIANCE
 PLATFORM</a:t>
             </a:r>
+            <a:endParaRPr sz="700" b="1">
+              <a:solidFill>
+                <a:srgbClr val="333333"/>
+              </a:solidFill>
+            </a:endParaRPr>
           </a:p>
         </p:txBody>
       </p:sp>
@@ -6231,7 +5794,7 @@
         </p:nvSpPr>
         <p:spPr>
           <a:xfrm>
-            <a:off x="1371600" y="5989320"/>
+            <a:off x="1569720" y="5486400"/>
             <a:ext cx="1188720" cy="1188720"/>
           </a:xfrm>
           <a:prstGeom prst="ellipse">
@@ -6261,7 +5824,7 @@
           </a:fontRef>
         </p:style>
         <p:txBody>
-          <a:bodyPr rtlCol="0" anchor="ctr" wrap="square"/>
+          <a:bodyPr wrap="square" rtlCol="0" anchor="ctr"/>
           <a:lstStyle/>
           <a:p>
             <a:pPr algn="ctr"/>
@@ -6274,6 +5837,11 @@
               <a:t>MULTILINGUAL
 AI (22 Lang)</a:t>
             </a:r>
+            <a:endParaRPr sz="700" b="1">
+              <a:solidFill>
+                <a:srgbClr val="333333"/>
+              </a:solidFill>
+            </a:endParaRPr>
           </a:p>
         </p:txBody>
       </p:sp>
@@ -6285,7 +5853,7 @@
         </p:nvSpPr>
         <p:spPr>
           <a:xfrm>
-            <a:off x="1143000" y="6126480"/>
+            <a:off x="1028065" y="5806440"/>
             <a:ext cx="777240" cy="777240"/>
           </a:xfrm>
           <a:prstGeom prst="ellipse">
@@ -6318,7 +5886,7 @@
           </a:fontRef>
         </p:style>
         <p:txBody>
-          <a:bodyPr rtlCol="0" anchor="ctr" wrap="square"/>
+          <a:bodyPr wrap="square" rtlCol="0" anchor="ctr"/>
           <a:lstStyle/>
           <a:p>
             <a:pPr algn="ctr"/>
@@ -6331,6 +5899,11 @@
               <a:t>MANAK
 MITRA</a:t>
             </a:r>
+            <a:endParaRPr sz="800" b="1">
+              <a:solidFill>
+                <a:srgbClr val="FFFFFF"/>
+              </a:solidFill>
+            </a:endParaRPr>
           </a:p>
         </p:txBody>
       </p:sp>
@@ -6342,8 +5915,8 @@
         </p:nvSpPr>
         <p:spPr>
           <a:xfrm>
-            <a:off x="3200400" y="5486400"/>
-            <a:ext cx="5486400" cy="320040"/>
+            <a:off x="3400425" y="4519295"/>
+            <a:ext cx="3072130" cy="334010"/>
           </a:xfrm>
           <a:prstGeom prst="rect">
             <a:avLst/>
@@ -6352,7 +5925,7 @@
         </p:spPr>
         <p:txBody>
           <a:bodyPr wrap="none">
-            <a:spAutoFit/>
+            <a:noAutofit/>
           </a:bodyPr>
           <a:lstStyle/>
           <a:p>
@@ -6364,6 +5937,11 @@
               </a:rPr>
               <a:t>Innovation and Uniqueness:</a:t>
             </a:r>
+            <a:endParaRPr sz="1300" b="1">
+              <a:solidFill>
+                <a:srgbClr val="1A3A6E"/>
+              </a:solidFill>
+            </a:endParaRPr>
           </a:p>
         </p:txBody>
       </p:sp>
@@ -6375,8 +5953,8 @@
         </p:nvSpPr>
         <p:spPr>
           <a:xfrm>
-            <a:off x="3200400" y="5806440"/>
-            <a:ext cx="8503920" cy="777240"/>
+            <a:off x="3018155" y="4892040"/>
+            <a:ext cx="2944495" cy="1685925"/>
           </a:xfrm>
           <a:prstGeom prst="roundRect">
             <a:avLst/>
@@ -6405,7 +5983,7 @@
           </a:fontRef>
         </p:style>
         <p:txBody>
-          <a:bodyPr rtlCol="0" anchor="ctr" wrap="square" lIns="101600" tIns="50800" bIns="50800"/>
+          <a:bodyPr wrap="square" lIns="101600" tIns="50800" bIns="50800" rtlCol="0" anchor="ctr"/>
           <a:lstStyle/>
           <a:p>
             <a:pPr algn="ctr">
@@ -6413,30 +5991,11 @@
                 <a:spcPts val="100"/>
               </a:spcAft>
             </a:pPr>
-            <a:r>
-              <a:rPr sz="900">
-                <a:solidFill>
-                  <a:srgbClr val="FF6B35"/>
-                </a:solidFill>
-              </a:rPr>
-              <a:t>▸ </a:t>
-            </a:r>
-            <a:r>
-              <a:rPr sz="900" b="1">
-                <a:solidFill>
-                  <a:srgbClr val="1A3A6E"/>
-                </a:solidFill>
-              </a:rPr>
-              <a:t>Source-Grounded RAG</a:t>
-            </a:r>
-            <a:r>
-              <a:rPr sz="900">
-                <a:solidFill>
-                  <a:srgbClr val="333333"/>
-                </a:solidFill>
-              </a:rPr>
-              <a:t> — ONNX + FAISS ensures hallucination-free, cited responses</a:t>
-            </a:r>
+            <a:endParaRPr sz="900">
+              <a:solidFill>
+                <a:srgbClr val="333333"/>
+              </a:solidFill>
+            </a:endParaRPr>
           </a:p>
           <a:p>
             <a:pPr>
@@ -6468,6 +6027,11 @@
               </a:rPr>
               <a:t> — Auto-fetches new standards, knowledge base always current</a:t>
             </a:r>
+            <a:endParaRPr sz="900">
+              <a:solidFill>
+                <a:srgbClr val="333333"/>
+              </a:solidFill>
+            </a:endParaRPr>
           </a:p>
           <a:p>
             <a:pPr>
@@ -6499,6 +6063,11 @@
               </a:rPr>
               <a:t> — Auto-detect → translate → RAG → translate-back</a:t>
             </a:r>
+            <a:endParaRPr sz="900">
+              <a:solidFill>
+                <a:srgbClr val="333333"/>
+              </a:solidFill>
+            </a:endParaRPr>
           </a:p>
           <a:p>
             <a:pPr>
@@ -6530,6 +6099,11 @@
               </a:rPr>
               <a:t> — Standards, testing, offices, legal, QC, documents</a:t>
             </a:r>
+            <a:endParaRPr sz="900">
+              <a:solidFill>
+                <a:srgbClr val="333333"/>
+              </a:solidFill>
+            </a:endParaRPr>
           </a:p>
           <a:p>
             <a:pPr>
@@ -6559,11 +6133,159 @@
                   <a:srgbClr val="333333"/>
                 </a:solidFill>
               </a:rPr>
-              <a:t> — Standards + certification + labs + AI in one platform</a:t>
-            </a:r>
-          </a:p>
-        </p:txBody>
-      </p:sp>
+              <a:t> — Standards + certification + labs + AI in one platfrm</a:t>
+            </a:r>
+            <a:endParaRPr sz="900">
+              <a:solidFill>
+                <a:srgbClr val="333333"/>
+              </a:solidFill>
+            </a:endParaRPr>
+          </a:p>
+        </p:txBody>
+      </p:sp>
+      <p:cxnSp>
+        <p:nvCxnSpPr>
+          <p:cNvPr id="78" name="Straight Connector 77"/>
+          <p:cNvCxnSpPr/>
+          <p:nvPr/>
+        </p:nvCxnSpPr>
+        <p:spPr>
+          <a:xfrm>
+            <a:off x="122555" y="4460240"/>
+            <a:ext cx="5840095" cy="0"/>
+          </a:xfrm>
+          <a:prstGeom prst="line">
+            <a:avLst/>
+          </a:prstGeom>
+          <a:ln>
+            <a:solidFill>
+              <a:schemeClr val="tx1">
+                <a:lumMod val="50000"/>
+                <a:lumOff val="50000"/>
+              </a:schemeClr>
+            </a:solidFill>
+          </a:ln>
+        </p:spPr>
+        <p:style>
+          <a:lnRef idx="2">
+            <a:schemeClr val="accent1"/>
+          </a:lnRef>
+          <a:fillRef idx="0">
+            <a:schemeClr val="accent1"/>
+          </a:fillRef>
+          <a:effectRef idx="1">
+            <a:schemeClr val="accent1"/>
+          </a:effectRef>
+          <a:fontRef idx="minor">
+            <a:schemeClr val="tx1"/>
+          </a:fontRef>
+        </p:style>
+      </p:cxnSp>
+      <p:cxnSp>
+        <p:nvCxnSpPr>
+          <p:cNvPr id="79" name="Straight Connector 78"/>
+          <p:cNvCxnSpPr/>
+          <p:nvPr/>
+        </p:nvCxnSpPr>
+        <p:spPr>
+          <a:xfrm>
+            <a:off x="2854960" y="4481195"/>
+            <a:ext cx="0" cy="2103120"/>
+          </a:xfrm>
+          <a:prstGeom prst="line">
+            <a:avLst/>
+          </a:prstGeom>
+          <a:ln>
+            <a:solidFill>
+              <a:schemeClr val="tx1">
+                <a:lumMod val="50000"/>
+                <a:lumOff val="50000"/>
+              </a:schemeClr>
+            </a:solidFill>
+          </a:ln>
+        </p:spPr>
+        <p:style>
+          <a:lnRef idx="2">
+            <a:schemeClr val="accent1"/>
+          </a:lnRef>
+          <a:fillRef idx="0">
+            <a:schemeClr val="accent1"/>
+          </a:fillRef>
+          <a:effectRef idx="1">
+            <a:schemeClr val="accent1"/>
+          </a:effectRef>
+          <a:fontRef idx="minor">
+            <a:schemeClr val="tx1"/>
+          </a:fontRef>
+        </p:style>
+      </p:cxnSp>
+      <p:sp>
+        <p:nvSpPr>
+          <p:cNvPr id="80" name="Down Arrow 79"/>
+          <p:cNvSpPr/>
+          <p:nvPr/>
+        </p:nvSpPr>
+        <p:spPr>
+          <a:xfrm>
+            <a:off x="8732520" y="5189220"/>
+            <a:ext cx="137160" cy="109728"/>
+          </a:xfrm>
+          <a:prstGeom prst="downArrow">
+            <a:avLst/>
+          </a:prstGeom>
+          <a:solidFill>
+            <a:srgbClr val="999999"/>
+          </a:solidFill>
+          <a:ln>
+            <a:noFill/>
+          </a:ln>
+        </p:spPr>
+        <p:style>
+          <a:lnRef idx="1">
+            <a:schemeClr val="accent1"/>
+          </a:lnRef>
+          <a:fillRef idx="3">
+            <a:schemeClr val="accent1"/>
+          </a:fillRef>
+          <a:effectRef idx="2">
+            <a:schemeClr val="accent1"/>
+          </a:effectRef>
+          <a:fontRef idx="minor">
+            <a:schemeClr val="lt1"/>
+          </a:fontRef>
+        </p:style>
+        <p:txBody>
+          <a:bodyPr rtlCol="0" anchor="ctr"/>
+          <a:lstStyle/>
+          <a:p>
+            <a:pPr algn="ctr"/>
+          </a:p>
+        </p:txBody>
+      </p:sp>
+      <p:pic>
+        <p:nvPicPr>
+          <p:cNvPr id="103" name="Picture 102"/>
+          <p:cNvPicPr>
+            <a:picLocks noChangeAspect="1"/>
+          </p:cNvPicPr>
+          <p:nvPr/>
+        </p:nvPicPr>
+        <p:blipFill>
+          <a:blip r:embed="rId1"/>
+          <a:stretch>
+            <a:fillRect/>
+          </a:stretch>
+        </p:blipFill>
+        <p:spPr>
+          <a:xfrm>
+            <a:off x="27940" y="843915"/>
+            <a:ext cx="6581775" cy="3363595"/>
+          </a:xfrm>
+          <a:prstGeom prst="rect">
+            <a:avLst/>
+          </a:prstGeom>
+        </p:spPr>
+      </p:pic>
     </p:spTree>
   </p:cSld>
   <p:clrMapOvr>
@@ -6573,7 +6295,7 @@
 </file>
 
 <file path=ppt/slides/slide3.xml><?xml version="1.0" encoding="utf-8"?>
-<p:sld xmlns:a="http://schemas.openxmlformats.org/drawingml/2006/main" xmlns:p="http://schemas.openxmlformats.org/presentationml/2006/main" xmlns:r="http://schemas.openxmlformats.org/officeDocument/2006/relationships">
+<p:sld xmlns:a="http://schemas.openxmlformats.org/drawingml/2006/main" xmlns:r="http://schemas.openxmlformats.org/officeDocument/2006/relationships" xmlns:p="http://schemas.openxmlformats.org/presentationml/2006/main">
   <p:cSld>
     <p:spTree>
       <p:nvGrpSpPr>
@@ -6582,6 +6304,30 @@
         <p:nvPr/>
       </p:nvGrpSpPr>
       <p:grpSpPr/>
+      <p:pic>
+        <p:nvPicPr>
+          <p:cNvPr id="25" name="Picture 24"/>
+          <p:cNvPicPr>
+            <a:picLocks noChangeAspect="1"/>
+          </p:cNvPicPr>
+          <p:nvPr/>
+        </p:nvPicPr>
+        <p:blipFill>
+          <a:blip r:embed="rId1"/>
+          <a:stretch>
+            <a:fillRect/>
+          </a:stretch>
+        </p:blipFill>
+        <p:spPr>
+          <a:xfrm>
+            <a:off x="0" y="4508500"/>
+            <a:ext cx="4777105" cy="2075180"/>
+          </a:xfrm>
+          <a:prstGeom prst="rect">
+            <a:avLst/>
+          </a:prstGeom>
+        </p:spPr>
+      </p:pic>
       <p:sp>
         <p:nvSpPr>
           <p:cNvPr id="2" name="Rectangle 1"/>
@@ -6665,7 +6411,7 @@
           </a:fontRef>
         </p:style>
         <p:txBody>
-          <a:bodyPr rtlCol="0" anchor="ctr" wrap="square"/>
+          <a:bodyPr wrap="square" rtlCol="0" anchor="ctr"/>
           <a:lstStyle/>
           <a:p>
             <a:pPr algn="ctr"/>
@@ -6677,6 +6423,11 @@
               </a:rPr>
               <a:t>Resonant</a:t>
             </a:r>
+            <a:endParaRPr sz="1800" b="1">
+              <a:solidFill>
+                <a:srgbClr val="1A3A6E"/>
+              </a:solidFill>
+            </a:endParaRPr>
           </a:p>
         </p:txBody>
       </p:sp>
@@ -6711,6 +6462,11 @@
               </a:rPr>
               <a:t>MANAKMITRA</a:t>
             </a:r>
+            <a:endParaRPr sz="2800" b="1">
+              <a:solidFill>
+                <a:srgbClr val="1A3A6E"/>
+              </a:solidFill>
+            </a:endParaRPr>
           </a:p>
         </p:txBody>
       </p:sp>
@@ -6750,7 +6506,7 @@
           </a:fontRef>
         </p:style>
         <p:txBody>
-          <a:bodyPr rtlCol="0" anchor="ctr" wrap="square"/>
+          <a:bodyPr wrap="square" rtlCol="0" anchor="ctr"/>
           <a:lstStyle/>
           <a:p>
             <a:pPr algn="ctr"/>
@@ -6762,6 +6518,11 @@
               </a:rPr>
               <a:t>SIH</a:t>
             </a:r>
+            <a:endParaRPr sz="1000" b="1">
+              <a:solidFill>
+                <a:srgbClr val="FFFFFF"/>
+              </a:solidFill>
+            </a:endParaRPr>
           </a:p>
         </p:txBody>
       </p:sp>
@@ -6797,6 +6558,11 @@
               <a:t>SMART INDIA
 HACKATHON 2026</a:t>
             </a:r>
+            <a:endParaRPr sz="1000" b="1">
+              <a:solidFill>
+                <a:srgbClr val="1A3A6E"/>
+              </a:solidFill>
+            </a:endParaRPr>
           </a:p>
         </p:txBody>
       </p:sp>
@@ -6845,14 +6611,14 @@
       </p:sp>
       <p:sp>
         <p:nvSpPr>
-          <p:cNvPr id="8" name="TextBox 7"/>
+          <p:cNvPr id="9" name="TextBox 8"/>
           <p:cNvSpPr txBox="1"/>
           <p:nvPr/>
         </p:nvSpPr>
         <p:spPr>
           <a:xfrm>
-            <a:off x="457200" y="6583680"/>
-            <a:ext cx="3657600" cy="274320"/>
+            <a:off x="11430000" y="6583680"/>
+            <a:ext cx="457200" cy="274320"/>
           </a:xfrm>
           <a:prstGeom prst="rect">
             <a:avLst/>
@@ -6865,27 +6631,33 @@
           </a:bodyPr>
           <a:lstStyle/>
           <a:p>
+            <a:pPr algn="r"/>
             <a:r>
               <a:rPr sz="900">
                 <a:solidFill>
                   <a:srgbClr val="999999"/>
                 </a:solidFill>
               </a:rPr>
-              <a:t>@SIH Idea submission</a:t>
-            </a:r>
-          </a:p>
-        </p:txBody>
-      </p:sp>
-      <p:sp>
-        <p:nvSpPr>
-          <p:cNvPr id="9" name="TextBox 8"/>
+              <a:t>3</a:t>
+            </a:r>
+            <a:endParaRPr sz="900">
+              <a:solidFill>
+                <a:srgbClr val="999999"/>
+              </a:solidFill>
+            </a:endParaRPr>
+          </a:p>
+        </p:txBody>
+      </p:sp>
+      <p:sp>
+        <p:nvSpPr>
+          <p:cNvPr id="19" name="TextBox 18"/>
           <p:cNvSpPr txBox="1"/>
           <p:nvPr/>
         </p:nvSpPr>
         <p:spPr>
           <a:xfrm>
-            <a:off x="11430000" y="6583680"/>
-            <a:ext cx="457200" cy="274320"/>
+            <a:off x="6217920" y="3657600"/>
+            <a:ext cx="5486400" cy="320040"/>
           </a:xfrm>
           <a:prstGeom prst="rect">
             <a:avLst/>
@@ -6898,28 +6670,82 @@
           </a:bodyPr>
           <a:lstStyle/>
           <a:p>
-            <a:pPr algn="r"/>
-            <a:r>
-              <a:rPr sz="900">
-                <a:solidFill>
-                  <a:srgbClr val="999999"/>
-                </a:solidFill>
-              </a:rPr>
-              <a:t>3</a:t>
-            </a:r>
-          </a:p>
-        </p:txBody>
-      </p:sp>
-      <p:sp>
-        <p:nvSpPr>
-          <p:cNvPr id="10" name="TextBox 9"/>
+            <a:r>
+              <a:rPr sz="1300" b="1">
+                <a:solidFill>
+                  <a:srgbClr val="1A3A6E"/>
+                </a:solidFill>
+              </a:rPr>
+              <a:t>Key Differentiators</a:t>
+            </a:r>
+            <a:endParaRPr sz="1300" b="1">
+              <a:solidFill>
+                <a:srgbClr val="1A3A6E"/>
+              </a:solidFill>
+            </a:endParaRPr>
+          </a:p>
+        </p:txBody>
+      </p:sp>
+      <p:pic>
+        <p:nvPicPr>
+          <p:cNvPr id="23" name="Picture 22"/>
+          <p:cNvPicPr>
+            <a:picLocks noChangeAspect="1"/>
+          </p:cNvPicPr>
+          <p:nvPr/>
+        </p:nvPicPr>
+        <p:blipFill>
+          <a:blip r:embed="rId2"/>
+          <a:srcRect l="1665" r="2073" b="2995"/>
+          <a:stretch>
+            <a:fillRect/>
+          </a:stretch>
+        </p:blipFill>
+        <p:spPr>
+          <a:xfrm>
+            <a:off x="4551045" y="1633855"/>
+            <a:ext cx="7637780" cy="4093210"/>
+          </a:xfrm>
+          <a:prstGeom prst="rect">
+            <a:avLst/>
+          </a:prstGeom>
+        </p:spPr>
+      </p:pic>
+      <p:pic>
+        <p:nvPicPr>
+          <p:cNvPr id="24" name="Picture 23"/>
+          <p:cNvPicPr>
+            <a:picLocks noChangeAspect="1"/>
+          </p:cNvPicPr>
+          <p:nvPr/>
+        </p:nvPicPr>
+        <p:blipFill>
+          <a:blip r:embed="rId3"/>
+          <a:srcRect r="2551"/>
+          <a:stretch>
+            <a:fillRect/>
+          </a:stretch>
+        </p:blipFill>
+        <p:spPr>
+          <a:xfrm>
+            <a:off x="184785" y="942340"/>
+            <a:ext cx="4366260" cy="2432050"/>
+          </a:xfrm>
+          <a:prstGeom prst="rect">
+            <a:avLst/>
+          </a:prstGeom>
+        </p:spPr>
+      </p:pic>
+      <p:sp>
+        <p:nvSpPr>
+          <p:cNvPr id="26" name="TextBox 14"/>
           <p:cNvSpPr txBox="1"/>
           <p:nvPr/>
         </p:nvSpPr>
         <p:spPr>
           <a:xfrm>
-            <a:off x="365760" y="1005840"/>
-            <a:ext cx="5486400" cy="320040"/>
+            <a:off x="160655" y="3409950"/>
+            <a:ext cx="4250055" cy="375920"/>
           </a:xfrm>
           <a:prstGeom prst="rect">
             <a:avLst/>
@@ -6927,1013 +6753,150 @@
           <a:noFill/>
         </p:spPr>
         <p:txBody>
-          <a:bodyPr wrap="none">
-            <a:spAutoFit/>
+          <a:bodyPr wrap="square">
+            <a:noAutofit/>
           </a:bodyPr>
           <a:lstStyle/>
           <a:p>
-            <a:r>
-              <a:rPr sz="1600" b="1">
+            <a:pPr>
+              <a:spcAft>
+                <a:spcPts val="500"/>
+              </a:spcAft>
+            </a:pPr>
+            <a:r>
+              <a:rPr sz="1100" b="1">
+                <a:solidFill>
+                  <a:srgbClr val="FF6B35"/>
+                </a:solidFill>
+              </a:rPr>
+              <a:t>&gt; </a:t>
+            </a:r>
+            <a:r>
+              <a:rPr lang="en-US" sz="1100" b="1">
+                <a:solidFill>
+                  <a:srgbClr val="FF6B35"/>
+                </a:solidFill>
+              </a:rPr>
+              <a:t>Live Prototype</a:t>
+            </a:r>
+            <a:r>
+              <a:rPr sz="1200" b="1">
                 <a:solidFill>
                   <a:srgbClr val="1A3A6E"/>
                 </a:solidFill>
               </a:rPr>
-              <a:t>Tech Stack &amp; Architecture</a:t>
-            </a:r>
-          </a:p>
-        </p:txBody>
-      </p:sp>
-      <p:sp>
-        <p:nvSpPr>
-          <p:cNvPr id="11" name="Rounded Rectangle 10"/>
-          <p:cNvSpPr/>
-          <p:nvPr/>
-        </p:nvSpPr>
-        <p:spPr>
-          <a:xfrm>
-            <a:off x="365760" y="1417320"/>
-            <a:ext cx="2743200" cy="1005840"/>
-          </a:xfrm>
-          <a:prstGeom prst="roundRect">
-            <a:avLst/>
-          </a:prstGeom>
-          <a:solidFill>
-            <a:srgbClr val="E3F2FD"/>
-          </a:solidFill>
-          <a:ln w="19050">
+              <a:t>:</a:t>
+            </a:r>
+            <a:r>
+              <a:rPr lang="en-US" sz="1200" b="1">
+                <a:solidFill>
+                  <a:srgbClr val="1A3A6E"/>
+                </a:solidFill>
+              </a:rPr>
+              <a:t> </a:t>
+            </a:r>
+            <a:r>
+              <a:rPr lang="en-US" altLang="en-US" sz="1200" b="1">
+                <a:solidFill>
+                  <a:srgbClr val="1A3A6E"/>
+                </a:solidFill>
+                <a:hlinkClick r:id="rId4" tooltip="" action="ppaction://hlinkfile"/>
+              </a:rPr>
+              <a:t>https</a:t>
+            </a:r>
+            <a:r>
+              <a:rPr lang="en-US" altLang="en-US" sz="1200" b="1">
+                <a:solidFill>
+                  <a:srgbClr val="1A3A6E"/>
+                </a:solidFill>
+                <a:hlinkClick r:id="rId4" tooltip="" action="ppaction://hlinkfile"/>
+              </a:rPr>
+              <a:t>://sih2026-bis-assistant-ebon.vercel.app/</a:t>
+            </a:r>
+            <a:endParaRPr lang="en-US" altLang="en-US" sz="1200" b="1">
+              <a:solidFill>
+                <a:srgbClr val="1A3A6E"/>
+              </a:solidFill>
+            </a:endParaRPr>
+          </a:p>
+        </p:txBody>
+      </p:sp>
+      <p:cxnSp>
+        <p:nvCxnSpPr>
+          <p:cNvPr id="78" name="Straight Connector 77"/>
+          <p:cNvCxnSpPr/>
+          <p:nvPr/>
+        </p:nvCxnSpPr>
+        <p:spPr>
+          <a:xfrm>
+            <a:off x="122555" y="4123055"/>
+            <a:ext cx="4428490" cy="0"/>
+          </a:xfrm>
+          <a:prstGeom prst="line">
+            <a:avLst/>
+          </a:prstGeom>
+          <a:ln>
             <a:solidFill>
-              <a:srgbClr val="2196F3"/>
+              <a:schemeClr val="tx1">
+                <a:lumMod val="50000"/>
+                <a:lumOff val="50000"/>
+              </a:schemeClr>
             </a:solidFill>
           </a:ln>
         </p:spPr>
         <p:style>
-          <a:lnRef idx="1">
+          <a:lnRef idx="2">
             <a:schemeClr val="accent1"/>
           </a:lnRef>
-          <a:fillRef idx="3">
+          <a:fillRef idx="0">
             <a:schemeClr val="accent1"/>
           </a:fillRef>
-          <a:effectRef idx="2">
+          <a:effectRef idx="1">
             <a:schemeClr val="accent1"/>
           </a:effectRef>
           <a:fontRef idx="minor">
-            <a:schemeClr val="lt1"/>
+            <a:schemeClr val="tx1"/>
           </a:fontRef>
         </p:style>
-        <p:txBody>
-          <a:bodyPr rtlCol="0" anchor="ctr" wrap="square" lIns="101600" tIns="76200"/>
-          <a:lstStyle/>
-          <a:p>
-            <a:pPr algn="ctr"/>
-            <a:r>
-              <a:rPr sz="1200" b="1">
-                <a:solidFill>
-                  <a:srgbClr val="2196F3"/>
-                </a:solidFill>
-              </a:rPr>
-              <a:t>🎨 Frontend</a:t>
-            </a:r>
-          </a:p>
-          <a:p>
-            <a:pPr>
-              <a:spcBef>
-                <a:spcPts val="400"/>
-              </a:spcBef>
-            </a:pPr>
-            <a:r>
-              <a:rPr sz="1000">
-                <a:solidFill>
-                  <a:srgbClr val="333333"/>
-                </a:solidFill>
-              </a:rPr>
-              <a:t>React 18 + Vite
-Responsive SPA, dark/light mode</a:t>
-            </a:r>
-          </a:p>
-        </p:txBody>
-      </p:sp>
-      <p:sp>
-        <p:nvSpPr>
-          <p:cNvPr id="12" name="Rounded Rectangle 11"/>
-          <p:cNvSpPr/>
-          <p:nvPr/>
-        </p:nvSpPr>
-        <p:spPr>
-          <a:xfrm>
-            <a:off x="3246120" y="1417320"/>
-            <a:ext cx="2743200" cy="1005840"/>
-          </a:xfrm>
-          <a:prstGeom prst="roundRect">
-            <a:avLst/>
-          </a:prstGeom>
-          <a:solidFill>
-            <a:srgbClr val="E8F5E9"/>
-          </a:solidFill>
-          <a:ln w="19050">
+      </p:cxnSp>
+      <p:cxnSp>
+        <p:nvCxnSpPr>
+          <p:cNvPr id="28" name="Straight Connector 27"/>
+          <p:cNvCxnSpPr/>
+          <p:nvPr/>
+        </p:nvCxnSpPr>
+        <p:spPr>
+          <a:xfrm flipV="1">
+            <a:off x="4551045" y="942340"/>
+            <a:ext cx="0" cy="5641340"/>
+          </a:xfrm>
+          <a:prstGeom prst="line">
+            <a:avLst/>
+          </a:prstGeom>
+          <a:ln>
             <a:solidFill>
-              <a:srgbClr val="4CAF50"/>
+              <a:schemeClr val="tx1">
+                <a:lumMod val="50000"/>
+                <a:lumOff val="50000"/>
+              </a:schemeClr>
             </a:solidFill>
           </a:ln>
         </p:spPr>
         <p:style>
-          <a:lnRef idx="1">
+          <a:lnRef idx="2">
             <a:schemeClr val="accent1"/>
           </a:lnRef>
-          <a:fillRef idx="3">
+          <a:fillRef idx="0">
             <a:schemeClr val="accent1"/>
           </a:fillRef>
-          <a:effectRef idx="2">
+          <a:effectRef idx="1">
             <a:schemeClr val="accent1"/>
           </a:effectRef>
           <a:fontRef idx="minor">
-            <a:schemeClr val="lt1"/>
+            <a:schemeClr val="tx1"/>
           </a:fontRef>
         </p:style>
-        <p:txBody>
-          <a:bodyPr rtlCol="0" anchor="ctr" wrap="square" lIns="101600" tIns="76200"/>
-          <a:lstStyle/>
-          <a:p>
-            <a:pPr algn="ctr"/>
-            <a:r>
-              <a:rPr sz="1200" b="1">
-                <a:solidFill>
-                  <a:srgbClr val="4CAF50"/>
-                </a:solidFill>
-              </a:rPr>
-              <a:t>⚙️ Backend</a:t>
-            </a:r>
-          </a:p>
-          <a:p>
-            <a:pPr>
-              <a:spcBef>
-                <a:spcPts val="400"/>
-              </a:spcBef>
-            </a:pPr>
-            <a:r>
-              <a:rPr sz="1000">
-                <a:solidFill>
-                  <a:srgbClr val="333333"/>
-                </a:solidFill>
-              </a:rPr>
-              <a:t>FastAPI + Python
-Async API, structured endpoints</a:t>
-            </a:r>
-          </a:p>
-        </p:txBody>
-      </p:sp>
-      <p:sp>
-        <p:nvSpPr>
-          <p:cNvPr id="13" name="Rounded Rectangle 12"/>
-          <p:cNvSpPr/>
-          <p:nvPr/>
-        </p:nvSpPr>
-        <p:spPr>
-          <a:xfrm>
-            <a:off x="6126480" y="1417320"/>
-            <a:ext cx="2743200" cy="1005840"/>
-          </a:xfrm>
-          <a:prstGeom prst="roundRect">
-            <a:avLst/>
-          </a:prstGeom>
-          <a:solidFill>
-            <a:srgbClr val="FFF3E0"/>
-          </a:solidFill>
-          <a:ln w="19050">
-            <a:solidFill>
-              <a:srgbClr val="FF9800"/>
-            </a:solidFill>
-          </a:ln>
-        </p:spPr>
-        <p:style>
-          <a:lnRef idx="1">
-            <a:schemeClr val="accent1"/>
-          </a:lnRef>
-          <a:fillRef idx="3">
-            <a:schemeClr val="accent1"/>
-          </a:fillRef>
-          <a:effectRef idx="2">
-            <a:schemeClr val="accent1"/>
-          </a:effectRef>
-          <a:fontRef idx="minor">
-            <a:schemeClr val="lt1"/>
-          </a:fontRef>
-        </p:style>
-        <p:txBody>
-          <a:bodyPr rtlCol="0" anchor="ctr" wrap="square" lIns="101600" tIns="76200"/>
-          <a:lstStyle/>
-          <a:p>
-            <a:pPr algn="ctr"/>
-            <a:r>
-              <a:rPr sz="1200" b="1">
-                <a:solidFill>
-                  <a:srgbClr val="FF9800"/>
-                </a:solidFill>
-              </a:rPr>
-              <a:t>🤖 AI / LLM</a:t>
-            </a:r>
-          </a:p>
-          <a:p>
-            <a:pPr>
-              <a:spcBef>
-                <a:spcPts val="400"/>
-              </a:spcBef>
-            </a:pPr>
-            <a:r>
-              <a:rPr sz="1000">
-                <a:solidFill>
-                  <a:srgbClr val="333333"/>
-                </a:solidFill>
-              </a:rPr>
-              <a:t>Gemini 3.6 Flash
-6-section structured responses</a:t>
-            </a:r>
-          </a:p>
-        </p:txBody>
-      </p:sp>
-      <p:sp>
-        <p:nvSpPr>
-          <p:cNvPr id="14" name="Rounded Rectangle 13"/>
-          <p:cNvSpPr/>
-          <p:nvPr/>
-        </p:nvSpPr>
-        <p:spPr>
-          <a:xfrm>
-            <a:off x="365760" y="2560320"/>
-            <a:ext cx="2743200" cy="1005840"/>
-          </a:xfrm>
-          <a:prstGeom prst="roundRect">
-            <a:avLst/>
-          </a:prstGeom>
-          <a:solidFill>
-            <a:srgbClr val="F3E5F5"/>
-          </a:solidFill>
-          <a:ln w="19050">
-            <a:solidFill>
-              <a:srgbClr val="9C27B0"/>
-            </a:solidFill>
-          </a:ln>
-        </p:spPr>
-        <p:style>
-          <a:lnRef idx="1">
-            <a:schemeClr val="accent1"/>
-          </a:lnRef>
-          <a:fillRef idx="3">
-            <a:schemeClr val="accent1"/>
-          </a:fillRef>
-          <a:effectRef idx="2">
-            <a:schemeClr val="accent1"/>
-          </a:effectRef>
-          <a:fontRef idx="minor">
-            <a:schemeClr val="lt1"/>
-          </a:fontRef>
-        </p:style>
-        <p:txBody>
-          <a:bodyPr rtlCol="0" anchor="ctr" wrap="square" lIns="101600" tIns="76200"/>
-          <a:lstStyle/>
-          <a:p>
-            <a:pPr algn="ctr"/>
-            <a:r>
-              <a:rPr sz="1200" b="1">
-                <a:solidFill>
-                  <a:srgbClr val="9C27B0"/>
-                </a:solidFill>
-              </a:rPr>
-              <a:t>🧠 Embeddings</a:t>
-            </a:r>
-          </a:p>
-          <a:p>
-            <a:pPr>
-              <a:spcBef>
-                <a:spcPts val="400"/>
-              </a:spcBef>
-            </a:pPr>
-            <a:r>
-              <a:rPr sz="1000">
-                <a:solidFill>
-                  <a:srgbClr val="333333"/>
-                </a:solidFill>
-              </a:rPr>
-              <a:t>ONNX Runtime + FAISS
-384-dim vectors, zero hallucination</a:t>
-            </a:r>
-          </a:p>
-        </p:txBody>
-      </p:sp>
-      <p:sp>
-        <p:nvSpPr>
-          <p:cNvPr id="15" name="Rounded Rectangle 14"/>
-          <p:cNvSpPr/>
-          <p:nvPr/>
-        </p:nvSpPr>
-        <p:spPr>
-          <a:xfrm>
-            <a:off x="3246120" y="2560320"/>
-            <a:ext cx="2743200" cy="1005840"/>
-          </a:xfrm>
-          <a:prstGeom prst="roundRect">
-            <a:avLst/>
-          </a:prstGeom>
-          <a:solidFill>
-            <a:srgbClr val="FCE4EC"/>
-          </a:solidFill>
-          <a:ln w="19050">
-            <a:solidFill>
-              <a:srgbClr val="E91E63"/>
-            </a:solidFill>
-          </a:ln>
-        </p:spPr>
-        <p:style>
-          <a:lnRef idx="1">
-            <a:schemeClr val="accent1"/>
-          </a:lnRef>
-          <a:fillRef idx="3">
-            <a:schemeClr val="accent1"/>
-          </a:fillRef>
-          <a:effectRef idx="2">
-            <a:schemeClr val="accent1"/>
-          </a:effectRef>
-          <a:fontRef idx="minor">
-            <a:schemeClr val="lt1"/>
-          </a:fontRef>
-        </p:style>
-        <p:txBody>
-          <a:bodyPr rtlCol="0" anchor="ctr" wrap="square" lIns="101600" tIns="76200"/>
-          <a:lstStyle/>
-          <a:p>
-            <a:pPr algn="ctr"/>
-            <a:r>
-              <a:rPr sz="1200" b="1">
-                <a:solidFill>
-                  <a:srgbClr val="E91E63"/>
-                </a:solidFill>
-              </a:rPr>
-              <a:t>🚀 Deployment</a:t>
-            </a:r>
-          </a:p>
-          <a:p>
-            <a:pPr>
-              <a:spcBef>
-                <a:spcPts val="400"/>
-              </a:spcBef>
-            </a:pPr>
-            <a:r>
-              <a:rPr sz="1000">
-                <a:solidFill>
-                  <a:srgbClr val="333333"/>
-                </a:solidFill>
-              </a:rPr>
-              <a:t>Render (backend) + Vercel (frontend)
-Free tier, auto-deploy on push</a:t>
-            </a:r>
-          </a:p>
-        </p:txBody>
-      </p:sp>
-      <p:sp>
-        <p:nvSpPr>
-          <p:cNvPr id="16" name="Rounded Rectangle 15"/>
-          <p:cNvSpPr/>
-          <p:nvPr/>
-        </p:nvSpPr>
-        <p:spPr>
-          <a:xfrm>
-            <a:off x="6126480" y="2560320"/>
-            <a:ext cx="2743200" cy="1005840"/>
-          </a:xfrm>
-          <a:prstGeom prst="roundRect">
-            <a:avLst/>
-          </a:prstGeom>
-          <a:solidFill>
-            <a:srgbClr val="E0F2F1"/>
-          </a:solidFill>
-          <a:ln w="19050">
-            <a:solidFill>
-              <a:srgbClr val="009688"/>
-            </a:solidFill>
-          </a:ln>
-        </p:spPr>
-        <p:style>
-          <a:lnRef idx="1">
-            <a:schemeClr val="accent1"/>
-          </a:lnRef>
-          <a:fillRef idx="3">
-            <a:schemeClr val="accent1"/>
-          </a:fillRef>
-          <a:effectRef idx="2">
-            <a:schemeClr val="accent1"/>
-          </a:effectRef>
-          <a:fontRef idx="minor">
-            <a:schemeClr val="lt1"/>
-          </a:fontRef>
-        </p:style>
-        <p:txBody>
-          <a:bodyPr rtlCol="0" anchor="ctr" wrap="square" lIns="101600" tIns="76200"/>
-          <a:lstStyle/>
-          <a:p>
-            <a:pPr algn="ctr"/>
-            <a:r>
-              <a:rPr sz="1200" b="1">
-                <a:solidFill>
-                  <a:srgbClr val="009688"/>
-                </a:solidFill>
-              </a:rPr>
-              <a:t>🔐 Security</a:t>
-            </a:r>
-          </a:p>
-          <a:p>
-            <a:pPr>
-              <a:spcBef>
-                <a:spcPts val="400"/>
-              </a:spcBef>
-            </a:pPr>
-            <a:r>
-              <a:rPr sz="1000">
-                <a:solidFill>
-                  <a:srgbClr val="333333"/>
-                </a:solidFill>
-              </a:rPr>
-              <a:t>JWT tokens + bcrypt
-Per-user chat isolation</a:t>
-            </a:r>
-          </a:p>
-        </p:txBody>
-      </p:sp>
-      <p:sp>
-        <p:nvSpPr>
-          <p:cNvPr id="17" name="TextBox 16"/>
-          <p:cNvSpPr txBox="1"/>
-          <p:nvPr/>
-        </p:nvSpPr>
-        <p:spPr>
-          <a:xfrm>
-            <a:off x="365760" y="3657600"/>
-            <a:ext cx="5486400" cy="320040"/>
-          </a:xfrm>
-          <a:prstGeom prst="rect">
-            <a:avLst/>
-          </a:prstGeom>
-          <a:noFill/>
-        </p:spPr>
-        <p:txBody>
-          <a:bodyPr wrap="none">
-            <a:spAutoFit/>
-          </a:bodyPr>
-          <a:lstStyle/>
-          <a:p>
-            <a:r>
-              <a:rPr sz="1300" b="1">
-                <a:solidFill>
-                  <a:srgbClr val="1A3A6E"/>
-                </a:solidFill>
-              </a:rPr>
-              <a:t>Why These Technologies?</a:t>
-            </a:r>
-          </a:p>
-        </p:txBody>
-      </p:sp>
-      <p:sp>
-        <p:nvSpPr>
-          <p:cNvPr id="18" name="TextBox 17"/>
-          <p:cNvSpPr txBox="1"/>
-          <p:nvPr/>
-        </p:nvSpPr>
-        <p:spPr>
-          <a:xfrm>
-            <a:off x="365760" y="3931920"/>
-            <a:ext cx="5303520" cy="2286000"/>
-          </a:xfrm>
-          <a:prstGeom prst="rect">
-            <a:avLst/>
-          </a:prstGeom>
-          <a:noFill/>
-        </p:spPr>
-        <p:txBody>
-          <a:bodyPr wrap="square">
-            <a:spAutoFit/>
-          </a:bodyPr>
-          <a:lstStyle/>
-          <a:p>
-            <a:pPr>
-              <a:spcAft>
-                <a:spcPts val="400"/>
-              </a:spcAft>
-            </a:pPr>
-            <a:r>
-              <a:rPr sz="1000" b="1">
-                <a:solidFill>
-                  <a:srgbClr val="4CAF50"/>
-                </a:solidFill>
-              </a:rPr>
-              <a:t>✓ </a:t>
-            </a:r>
-            <a:r>
-              <a:rPr sz="1000" b="1">
-                <a:solidFill>
-                  <a:srgbClr val="1A3A6E"/>
-                </a:solidFill>
-              </a:rPr>
-              <a:t>ONNX over PyTorch</a:t>
-            </a:r>
-            <a:r>
-              <a:rPr sz="1000">
-                <a:solidFill>
-                  <a:srgbClr val="333333"/>
-                </a:solidFill>
-              </a:rPr>
-              <a:t> — 10x smaller memory (20MB vs 500MB), same accuracy</a:t>
-            </a:r>
-          </a:p>
-          <a:p>
-            <a:pPr>
-              <a:spcAft>
-                <a:spcPts val="400"/>
-              </a:spcAft>
-            </a:pPr>
-            <a:r>
-              <a:rPr sz="1000" b="1">
-                <a:solidFill>
-                  <a:srgbClr val="4CAF50"/>
-                </a:solidFill>
-              </a:rPr>
-              <a:t>✓ </a:t>
-            </a:r>
-            <a:r>
-              <a:rPr sz="1000" b="1">
-                <a:solidFill>
-                  <a:srgbClr val="1A3A6E"/>
-                </a:solidFill>
-              </a:rPr>
-              <a:t>FAISS over Pinecone</a:t>
-            </a:r>
-            <a:r>
-              <a:rPr sz="1000">
-                <a:solidFill>
-                  <a:srgbClr val="333333"/>
-                </a:solidFill>
-              </a:rPr>
-              <a:t> — Free, offline-capable, no cloud dependency</a:t>
-            </a:r>
-          </a:p>
-          <a:p>
-            <a:pPr>
-              <a:spcAft>
-                <a:spcPts val="400"/>
-              </a:spcAft>
-            </a:pPr>
-            <a:r>
-              <a:rPr sz="1000" b="1">
-                <a:solidFill>
-                  <a:srgbClr val="4CAF50"/>
-                </a:solidFill>
-              </a:rPr>
-              <a:t>✓ </a:t>
-            </a:r>
-            <a:r>
-              <a:rPr sz="1000" b="1">
-                <a:solidFill>
-                  <a:srgbClr val="1A3A6E"/>
-                </a:solidFill>
-              </a:rPr>
-              <a:t>FastAPI over Flask</a:t>
-            </a:r>
-            <a:r>
-              <a:rPr sz="1000">
-                <a:solidFill>
-                  <a:srgbClr val="333333"/>
-                </a:solidFill>
-              </a:rPr>
-              <a:t> — 3x faster async for concurrent queries</a:t>
-            </a:r>
-          </a:p>
-          <a:p>
-            <a:pPr>
-              <a:spcAft>
-                <a:spcPts val="400"/>
-              </a:spcAft>
-            </a:pPr>
-            <a:r>
-              <a:rPr sz="1000" b="1">
-                <a:solidFill>
-                  <a:srgbClr val="4CAF50"/>
-                </a:solidFill>
-              </a:rPr>
-              <a:t>✓ </a:t>
-            </a:r>
-            <a:r>
-              <a:rPr sz="1000" b="1">
-                <a:solidFill>
-                  <a:srgbClr val="1A3A6E"/>
-                </a:solidFill>
-              </a:rPr>
-              <a:t>Gemini over OpenAI</a:t>
-            </a:r>
-            <a:r>
-              <a:rPr sz="1000">
-                <a:solidFill>
-                  <a:srgbClr val="333333"/>
-                </a:solidFill>
-              </a:rPr>
-              <a:t> — Free tier, multilingual, no API cost</a:t>
-            </a:r>
-          </a:p>
-          <a:p>
-            <a:pPr>
-              <a:spcAft>
-                <a:spcPts val="400"/>
-              </a:spcAft>
-            </a:pPr>
-            <a:r>
-              <a:rPr sz="1000" b="1">
-                <a:solidFill>
-                  <a:srgbClr val="4CAF50"/>
-                </a:solidFill>
-              </a:rPr>
-              <a:t>✓ </a:t>
-            </a:r>
-            <a:r>
-              <a:rPr sz="1000" b="1">
-                <a:solidFill>
-                  <a:srgbClr val="1A3A6E"/>
-                </a:solidFill>
-              </a:rPr>
-              <a:t>deep-translator</a:t>
-            </a:r>
-            <a:r>
-              <a:rPr sz="1000">
-                <a:solidFill>
-                  <a:srgbClr val="333333"/>
-                </a:solidFill>
-              </a:rPr>
-              <a:t> — 22 Indian languages including Telugu, Tamil, Bengali</a:t>
-            </a:r>
-          </a:p>
-        </p:txBody>
-      </p:sp>
-      <p:sp>
-        <p:nvSpPr>
-          <p:cNvPr id="19" name="TextBox 18"/>
-          <p:cNvSpPr txBox="1"/>
-          <p:nvPr/>
-        </p:nvSpPr>
-        <p:spPr>
-          <a:xfrm>
-            <a:off x="6217920" y="3657600"/>
-            <a:ext cx="5486400" cy="320040"/>
-          </a:xfrm>
-          <a:prstGeom prst="rect">
-            <a:avLst/>
-          </a:prstGeom>
-          <a:noFill/>
-        </p:spPr>
-        <p:txBody>
-          <a:bodyPr wrap="none">
-            <a:spAutoFit/>
-          </a:bodyPr>
-          <a:lstStyle/>
-          <a:p>
-            <a:r>
-              <a:rPr sz="1300" b="1">
-                <a:solidFill>
-                  <a:srgbClr val="1A3A6E"/>
-                </a:solidFill>
-              </a:rPr>
-              <a:t>Key Differentiators</a:t>
-            </a:r>
-          </a:p>
-        </p:txBody>
-      </p:sp>
-      <p:sp>
-        <p:nvSpPr>
-          <p:cNvPr id="20" name="Rounded Rectangle 19"/>
-          <p:cNvSpPr/>
-          <p:nvPr/>
-        </p:nvSpPr>
-        <p:spPr>
-          <a:xfrm>
-            <a:off x="6217920" y="3977639"/>
-            <a:ext cx="5486400" cy="1097280"/>
-          </a:xfrm>
-          <a:prstGeom prst="roundRect">
-            <a:avLst/>
-          </a:prstGeom>
-          <a:solidFill>
-            <a:srgbClr val="F5F5F5"/>
-          </a:solidFill>
-          <a:ln w="12700">
-            <a:solidFill>
-              <a:srgbClr val="1A3A6E"/>
-            </a:solidFill>
-          </a:ln>
-        </p:spPr>
-        <p:style>
-          <a:lnRef idx="1">
-            <a:schemeClr val="accent1"/>
-          </a:lnRef>
-          <a:fillRef idx="3">
-            <a:schemeClr val="accent1"/>
-          </a:fillRef>
-          <a:effectRef idx="2">
-            <a:schemeClr val="accent1"/>
-          </a:effectRef>
-          <a:fontRef idx="minor">
-            <a:schemeClr val="lt1"/>
-          </a:fontRef>
-        </p:style>
-        <p:txBody>
-          <a:bodyPr rtlCol="0" anchor="ctr" wrap="square" lIns="101600" tIns="76200"/>
-          <a:lstStyle/>
-          <a:p>
-            <a:pPr algn="ctr">
-              <a:spcAft>
-                <a:spcPts val="300"/>
-              </a:spcAft>
-            </a:pPr>
-            <a:r>
-              <a:rPr sz="900">
-                <a:solidFill>
-                  <a:srgbClr val="FF6B35"/>
-                </a:solidFill>
-              </a:rPr>
-              <a:t>▸ </a:t>
-            </a:r>
-            <a:r>
-              <a:rPr sz="1000" b="1">
-                <a:solidFill>
-                  <a:srgbClr val="1A3A6E"/>
-                </a:solidFill>
-              </a:rPr>
-              <a:t>vs ChatGPT:</a:t>
-            </a:r>
-            <a:r>
-              <a:rPr sz="1000">
-                <a:solidFill>
-                  <a:srgbClr val="333333"/>
-                </a:solidFill>
-              </a:rPr>
-              <a:t> Domain-specific RAG with verified BIS documents</a:t>
-            </a:r>
-          </a:p>
-          <a:p>
-            <a:pPr>
-              <a:spcAft>
-                <a:spcPts val="300"/>
-              </a:spcAft>
-            </a:pPr>
-            <a:r>
-              <a:rPr sz="900">
-                <a:solidFill>
-                  <a:srgbClr val="FF6B35"/>
-                </a:solidFill>
-              </a:rPr>
-              <a:t>▸ </a:t>
-            </a:r>
-            <a:r>
-              <a:rPr sz="1000" b="1">
-                <a:solidFill>
-                  <a:srgbClr val="1A3A6E"/>
-                </a:solidFill>
-              </a:rPr>
-              <a:t>vs BIS Website:</a:t>
-            </a:r>
-            <a:r>
-              <a:rPr sz="1000">
-                <a:solidFill>
-                  <a:srgbClr val="333333"/>
-                </a:solidFill>
-              </a:rPr>
-              <a:t> Plain English + multi-language, not technical jargon</a:t>
-            </a:r>
-          </a:p>
-          <a:p>
-            <a:pPr>
-              <a:spcAft>
-                <a:spcPts val="300"/>
-              </a:spcAft>
-            </a:pPr>
-            <a:r>
-              <a:rPr sz="900">
-                <a:solidFill>
-                  <a:srgbClr val="FF6B35"/>
-                </a:solidFill>
-              </a:rPr>
-              <a:t>▸ </a:t>
-            </a:r>
-            <a:r>
-              <a:rPr sz="1000" b="1">
-                <a:solidFill>
-                  <a:srgbClr val="1A3A6E"/>
-                </a:solidFill>
-              </a:rPr>
-              <a:t>vs Consultants:</a:t>
-            </a:r>
-            <a:r>
-              <a:rPr sz="1000">
-                <a:solidFill>
-                  <a:srgbClr val="333333"/>
-                </a:solidFill>
-              </a:rPr>
-              <a:t> Free, instant, 24/7 — no appointment needed</a:t>
-            </a:r>
-          </a:p>
-          <a:p>
-            <a:pPr>
-              <a:spcAft>
-                <a:spcPts val="300"/>
-              </a:spcAft>
-            </a:pPr>
-            <a:r>
-              <a:rPr sz="900">
-                <a:solidFill>
-                  <a:srgbClr val="FF6B35"/>
-                </a:solidFill>
-              </a:rPr>
-              <a:t>▸ </a:t>
-            </a:r>
-            <a:r>
-              <a:rPr sz="1000" b="1">
-                <a:solidFill>
-                  <a:srgbClr val="1A3A6E"/>
-                </a:solidFill>
-              </a:rPr>
-              <a:t>vs Manual:</a:t>
-            </a:r>
-            <a:r>
-              <a:rPr sz="1000">
-                <a:solidFill>
-                  <a:srgbClr val="333333"/>
-                </a:solidFill>
-              </a:rPr>
-              <a:t> 6-section answer in 20 sec vs hours of searching</a:t>
-            </a:r>
-          </a:p>
-        </p:txBody>
-      </p:sp>
-      <p:sp>
-        <p:nvSpPr>
-          <p:cNvPr id="21" name="TextBox 20"/>
-          <p:cNvSpPr txBox="1"/>
-          <p:nvPr/>
-        </p:nvSpPr>
-        <p:spPr>
-          <a:xfrm>
-            <a:off x="6217920" y="5212080"/>
-            <a:ext cx="5486400" cy="320040"/>
-          </a:xfrm>
-          <a:prstGeom prst="rect">
-            <a:avLst/>
-          </a:prstGeom>
-          <a:noFill/>
-        </p:spPr>
-        <p:txBody>
-          <a:bodyPr wrap="none">
-            <a:spAutoFit/>
-          </a:bodyPr>
-          <a:lstStyle/>
-          <a:p>
-            <a:r>
-              <a:rPr sz="1300" b="1">
-                <a:solidFill>
-                  <a:srgbClr val="1A3A6E"/>
-                </a:solidFill>
-              </a:rPr>
-              <a:t>Scalability Roadmap</a:t>
-            </a:r>
-          </a:p>
-        </p:txBody>
-      </p:sp>
-      <p:sp>
-        <p:nvSpPr>
-          <p:cNvPr id="22" name="Rounded Rectangle 21"/>
-          <p:cNvSpPr/>
-          <p:nvPr/>
-        </p:nvSpPr>
-        <p:spPr>
-          <a:xfrm>
-            <a:off x="6217920" y="5532120"/>
-            <a:ext cx="5486400" cy="960120"/>
-          </a:xfrm>
-          <a:prstGeom prst="roundRect">
-            <a:avLst/>
-          </a:prstGeom>
-          <a:solidFill>
-            <a:srgbClr val="FFF8E1"/>
-          </a:solidFill>
-          <a:ln w="12700">
-            <a:solidFill>
-              <a:srgbClr val="FF9800"/>
-            </a:solidFill>
-          </a:ln>
-        </p:spPr>
-        <p:style>
-          <a:lnRef idx="1">
-            <a:schemeClr val="accent1"/>
-          </a:lnRef>
-          <a:fillRef idx="3">
-            <a:schemeClr val="accent1"/>
-          </a:fillRef>
-          <a:effectRef idx="2">
-            <a:schemeClr val="accent1"/>
-          </a:effectRef>
-          <a:fontRef idx="minor">
-            <a:schemeClr val="lt1"/>
-          </a:fontRef>
-        </p:style>
-        <p:txBody>
-          <a:bodyPr rtlCol="0" anchor="ctr" wrap="square" lIns="101600" tIns="50800"/>
-          <a:lstStyle/>
-          <a:p>
-            <a:pPr algn="ctr">
-              <a:spcAft>
-                <a:spcPts val="200"/>
-              </a:spcAft>
-            </a:pPr>
-            <a:r>
-              <a:rPr sz="950" b="1">
-                <a:solidFill>
-                  <a:srgbClr val="1A3A6E"/>
-                </a:solidFill>
-              </a:rPr>
-              <a:t>Phase 1 (Done):</a:t>
-            </a:r>
-            <a:r>
-              <a:rPr sz="950">
-                <a:solidFill>
-                  <a:srgbClr val="333333"/>
-                </a:solidFill>
-              </a:rPr>
-              <a:t> Index all 28,000+ BIS standards</a:t>
-            </a:r>
-          </a:p>
-          <a:p>
-            <a:pPr>
-              <a:spcAft>
-                <a:spcPts val="200"/>
-              </a:spcAft>
-            </a:pPr>
-            <a:r>
-              <a:rPr sz="950" b="1">
-                <a:solidFill>
-                  <a:srgbClr val="1A3A6E"/>
-                </a:solidFill>
-              </a:rPr>
-              <a:t>Phase 2:</a:t>
-            </a:r>
-            <a:r>
-              <a:rPr sz="950">
-                <a:solidFill>
-                  <a:srgbClr val="333333"/>
-                </a:solidFill>
-              </a:rPr>
-              <a:t> PostgreSQL + Redis for production</a:t>
-            </a:r>
-          </a:p>
-          <a:p>
-            <a:pPr>
-              <a:spcAft>
-                <a:spcPts val="200"/>
-              </a:spcAft>
-            </a:pPr>
-            <a:r>
-              <a:rPr sz="950" b="1">
-                <a:solidFill>
-                  <a:srgbClr val="1A3A6E"/>
-                </a:solidFill>
-              </a:rPr>
-              <a:t>Phase 3:</a:t>
-            </a:r>
-            <a:r>
-              <a:rPr sz="950">
-                <a:solidFill>
-                  <a:srgbClr val="333333"/>
-                </a:solidFill>
-              </a:rPr>
-              <a:t> Mobile app + voice + WhatsApp bot</a:t>
-            </a:r>
-          </a:p>
-          <a:p>
-            <a:pPr>
-              <a:spcAft>
-                <a:spcPts val="200"/>
-              </a:spcAft>
-            </a:pPr>
-            <a:r>
-              <a:rPr sz="950" b="1">
-                <a:solidFill>
-                  <a:srgbClr val="1A3A6E"/>
-                </a:solidFill>
-              </a:rPr>
-              <a:t>Phase 4:</a:t>
-            </a:r>
-            <a:r>
-              <a:rPr sz="950">
-                <a:solidFill>
-                  <a:srgbClr val="333333"/>
-                </a:solidFill>
-              </a:rPr>
-              <a:t> BIS e-governance portal integration</a:t>
-            </a:r>
-          </a:p>
-        </p:txBody>
-      </p:sp>
+      </p:cxnSp>
     </p:spTree>
   </p:cSld>
   <p:clrMapOvr>
@@ -7943,7 +6906,7 @@
 </file>
 
 <file path=ppt/slides/slide4.xml><?xml version="1.0" encoding="utf-8"?>
-<p:sld xmlns:a="http://schemas.openxmlformats.org/drawingml/2006/main" xmlns:p="http://schemas.openxmlformats.org/presentationml/2006/main" xmlns:r="http://schemas.openxmlformats.org/officeDocument/2006/relationships">
+<p:sld xmlns:a="http://schemas.openxmlformats.org/drawingml/2006/main" xmlns:r="http://schemas.openxmlformats.org/officeDocument/2006/relationships" xmlns:p="http://schemas.openxmlformats.org/presentationml/2006/main">
   <p:cSld>
     <p:spTree>
       <p:nvGrpSpPr>
@@ -8035,7 +6998,7 @@
           </a:fontRef>
         </p:style>
         <p:txBody>
-          <a:bodyPr rtlCol="0" anchor="ctr" wrap="square"/>
+          <a:bodyPr wrap="square" rtlCol="0" anchor="ctr"/>
           <a:lstStyle/>
           <a:p>
             <a:pPr algn="ctr"/>
@@ -8047,6 +7010,11 @@
               </a:rPr>
               <a:t>Resonant</a:t>
             </a:r>
+            <a:endParaRPr sz="1800" b="1">
+              <a:solidFill>
+                <a:srgbClr val="1A3A6E"/>
+              </a:solidFill>
+            </a:endParaRPr>
           </a:p>
         </p:txBody>
       </p:sp>
@@ -8081,6 +7049,11 @@
               </a:rPr>
               <a:t>MANAKMITRA</a:t>
             </a:r>
+            <a:endParaRPr sz="2800" b="1">
+              <a:solidFill>
+                <a:srgbClr val="1A3A6E"/>
+              </a:solidFill>
+            </a:endParaRPr>
           </a:p>
         </p:txBody>
       </p:sp>
@@ -8120,7 +7093,7 @@
           </a:fontRef>
         </p:style>
         <p:txBody>
-          <a:bodyPr rtlCol="0" anchor="ctr" wrap="square"/>
+          <a:bodyPr wrap="square" rtlCol="0" anchor="ctr"/>
           <a:lstStyle/>
           <a:p>
             <a:pPr algn="ctr"/>
@@ -8132,6 +7105,11 @@
               </a:rPr>
               <a:t>SIH</a:t>
             </a:r>
+            <a:endParaRPr sz="1000" b="1">
+              <a:solidFill>
+                <a:srgbClr val="FFFFFF"/>
+              </a:solidFill>
+            </a:endParaRPr>
           </a:p>
         </p:txBody>
       </p:sp>
@@ -8167,62 +7145,24 @@
               <a:t>SMART INDIA
 HACKATHON 2026</a:t>
             </a:r>
-          </a:p>
-        </p:txBody>
-      </p:sp>
-      <p:sp>
-        <p:nvSpPr>
-          <p:cNvPr id="7" name="Rectangle 6"/>
-          <p:cNvSpPr/>
-          <p:nvPr/>
-        </p:nvSpPr>
-        <p:spPr>
-          <a:xfrm>
-            <a:off x="0" y="6583680"/>
-            <a:ext cx="12188952" cy="274320"/>
-          </a:xfrm>
-          <a:prstGeom prst="rect">
-            <a:avLst/>
-          </a:prstGeom>
-          <a:solidFill>
-            <a:srgbClr val="F5F5F5"/>
-          </a:solidFill>
-          <a:ln>
-            <a:noFill/>
-          </a:ln>
-        </p:spPr>
-        <p:style>
-          <a:lnRef idx="1">
-            <a:schemeClr val="accent1"/>
-          </a:lnRef>
-          <a:fillRef idx="3">
-            <a:schemeClr val="accent1"/>
-          </a:fillRef>
-          <a:effectRef idx="2">
-            <a:schemeClr val="accent1"/>
-          </a:effectRef>
-          <a:fontRef idx="minor">
-            <a:schemeClr val="lt1"/>
-          </a:fontRef>
-        </p:style>
-        <p:txBody>
-          <a:bodyPr rtlCol="0" anchor="ctr"/>
-          <a:lstStyle/>
-          <a:p>
-            <a:pPr algn="ctr"/>
-          </a:p>
-        </p:txBody>
-      </p:sp>
-      <p:sp>
-        <p:nvSpPr>
-          <p:cNvPr id="8" name="TextBox 7"/>
+            <a:endParaRPr sz="1000" b="1">
+              <a:solidFill>
+                <a:srgbClr val="1A3A6E"/>
+              </a:solidFill>
+            </a:endParaRPr>
+          </a:p>
+        </p:txBody>
+      </p:sp>
+      <p:sp>
+        <p:nvSpPr>
+          <p:cNvPr id="9" name="TextBox 8"/>
           <p:cNvSpPr txBox="1"/>
           <p:nvPr/>
         </p:nvSpPr>
         <p:spPr>
           <a:xfrm>
-            <a:off x="457200" y="6583680"/>
-            <a:ext cx="3657600" cy="274320"/>
+            <a:off x="11430000" y="6583680"/>
+            <a:ext cx="457200" cy="274320"/>
           </a:xfrm>
           <a:prstGeom prst="rect">
             <a:avLst/>
@@ -8235,962 +7175,33 @@
           </a:bodyPr>
           <a:lstStyle/>
           <a:p>
+            <a:pPr algn="r"/>
             <a:r>
               <a:rPr sz="900">
                 <a:solidFill>
                   <a:srgbClr val="999999"/>
                 </a:solidFill>
               </a:rPr>
-              <a:t>@SIH Idea submission</a:t>
-            </a:r>
-          </a:p>
-        </p:txBody>
-      </p:sp>
-      <p:sp>
-        <p:nvSpPr>
-          <p:cNvPr id="9" name="TextBox 8"/>
-          <p:cNvSpPr txBox="1"/>
-          <p:nvPr/>
-        </p:nvSpPr>
-        <p:spPr>
-          <a:xfrm>
-            <a:off x="11430000" y="6583680"/>
-            <a:ext cx="457200" cy="274320"/>
-          </a:xfrm>
-          <a:prstGeom prst="rect">
-            <a:avLst/>
-          </a:prstGeom>
-          <a:noFill/>
-        </p:spPr>
-        <p:txBody>
-          <a:bodyPr wrap="none">
-            <a:spAutoFit/>
-          </a:bodyPr>
-          <a:lstStyle/>
-          <a:p>
-            <a:pPr algn="r"/>
-            <a:r>
-              <a:rPr sz="900">
-                <a:solidFill>
-                  <a:srgbClr val="999999"/>
-                </a:solidFill>
-              </a:rPr>
               <a:t>4</a:t>
             </a:r>
-          </a:p>
-        </p:txBody>
-      </p:sp>
-      <p:sp>
-        <p:nvSpPr>
-          <p:cNvPr id="10" name="TextBox 9"/>
-          <p:cNvSpPr txBox="1"/>
-          <p:nvPr/>
-        </p:nvSpPr>
-        <p:spPr>
-          <a:xfrm>
-            <a:off x="365760" y="1005840"/>
-            <a:ext cx="5486400" cy="320040"/>
-          </a:xfrm>
-          <a:prstGeom prst="rect">
-            <a:avLst/>
-          </a:prstGeom>
-          <a:noFill/>
-        </p:spPr>
-        <p:txBody>
-          <a:bodyPr wrap="none">
-            <a:spAutoFit/>
-          </a:bodyPr>
-          <a:lstStyle/>
-          <a:p>
-            <a:r>
-              <a:rPr sz="1600" b="1">
-                <a:solidFill>
-                  <a:srgbClr val="1A3A6E"/>
-                </a:solidFill>
-              </a:rPr>
-              <a:t>Live Demo — Key Features</a:t>
-            </a:r>
-          </a:p>
-        </p:txBody>
-      </p:sp>
-      <p:sp>
-        <p:nvSpPr>
-          <p:cNvPr id="11" name="Rounded Rectangle 10"/>
+            <a:endParaRPr sz="900">
+              <a:solidFill>
+                <a:srgbClr val="999999"/>
+              </a:solidFill>
+            </a:endParaRPr>
+          </a:p>
+        </p:txBody>
+      </p:sp>
+      <p:sp>
+        <p:nvSpPr>
+          <p:cNvPr id="40" name="Rectangle 39"/>
           <p:cNvSpPr/>
           <p:nvPr/>
         </p:nvSpPr>
         <p:spPr>
           <a:xfrm>
-            <a:off x="365760" y="1371600"/>
-            <a:ext cx="5303520" cy="594360"/>
-          </a:xfrm>
-          <a:prstGeom prst="roundRect">
-            <a:avLst/>
-          </a:prstGeom>
-          <a:solidFill>
-            <a:srgbClr val="F5F5F5"/>
-          </a:solidFill>
-          <a:ln>
-            <a:noFill/>
-          </a:ln>
-        </p:spPr>
-        <p:style>
-          <a:lnRef idx="1">
-            <a:schemeClr val="accent1"/>
-          </a:lnRef>
-          <a:fillRef idx="3">
-            <a:schemeClr val="accent1"/>
-          </a:fillRef>
-          <a:effectRef idx="2">
-            <a:schemeClr val="accent1"/>
-          </a:effectRef>
-          <a:fontRef idx="minor">
-            <a:schemeClr val="lt1"/>
-          </a:fontRef>
-        </p:style>
-        <p:txBody>
-          <a:bodyPr rtlCol="0" anchor="ctr"/>
-          <a:lstStyle/>
-          <a:p>
-            <a:pPr algn="ctr"/>
-          </a:p>
-        </p:txBody>
-      </p:sp>
-      <p:sp>
-        <p:nvSpPr>
-          <p:cNvPr id="12" name="Rectangle 11"/>
-          <p:cNvSpPr/>
-          <p:nvPr/>
-        </p:nvSpPr>
-        <p:spPr>
-          <a:xfrm>
-            <a:off x="365760" y="1371600"/>
-            <a:ext cx="54864" cy="594360"/>
-          </a:xfrm>
-          <a:prstGeom prst="rect">
-            <a:avLst/>
-          </a:prstGeom>
-          <a:solidFill>
-            <a:srgbClr val="FF6B35"/>
-          </a:solidFill>
-          <a:ln>
-            <a:noFill/>
-          </a:ln>
-        </p:spPr>
-        <p:style>
-          <a:lnRef idx="1">
-            <a:schemeClr val="accent1"/>
-          </a:lnRef>
-          <a:fillRef idx="3">
-            <a:schemeClr val="accent1"/>
-          </a:fillRef>
-          <a:effectRef idx="2">
-            <a:schemeClr val="accent1"/>
-          </a:effectRef>
-          <a:fontRef idx="minor">
-            <a:schemeClr val="lt1"/>
-          </a:fontRef>
-        </p:style>
-        <p:txBody>
-          <a:bodyPr rtlCol="0" anchor="ctr"/>
-          <a:lstStyle/>
-          <a:p>
-            <a:pPr algn="ctr"/>
-          </a:p>
-        </p:txBody>
-      </p:sp>
-      <p:sp>
-        <p:nvSpPr>
-          <p:cNvPr id="13" name="TextBox 12"/>
-          <p:cNvSpPr txBox="1"/>
-          <p:nvPr/>
-        </p:nvSpPr>
-        <p:spPr>
-          <a:xfrm>
-            <a:off x="502920" y="1444752"/>
-            <a:ext cx="457200" cy="457200"/>
-          </a:xfrm>
-          <a:prstGeom prst="rect">
-            <a:avLst/>
-          </a:prstGeom>
-          <a:noFill/>
-        </p:spPr>
-        <p:txBody>
-          <a:bodyPr wrap="none">
-            <a:spAutoFit/>
-          </a:bodyPr>
-          <a:lstStyle/>
-          <a:p>
-            <a:r>
-              <a:rPr sz="2000"/>
-              <a:t>💬</a:t>
-            </a:r>
-          </a:p>
-        </p:txBody>
-      </p:sp>
-      <p:sp>
-        <p:nvSpPr>
-          <p:cNvPr id="14" name="TextBox 13"/>
-          <p:cNvSpPr txBox="1"/>
-          <p:nvPr/>
-        </p:nvSpPr>
-        <p:spPr>
-          <a:xfrm>
-            <a:off x="1005840" y="1444752"/>
-            <a:ext cx="4572000" cy="502920"/>
-          </a:xfrm>
-          <a:prstGeom prst="rect">
-            <a:avLst/>
-          </a:prstGeom>
-          <a:noFill/>
-        </p:spPr>
-        <p:txBody>
-          <a:bodyPr wrap="square">
-            <a:spAutoFit/>
-          </a:bodyPr>
-          <a:lstStyle/>
-          <a:p>
-            <a:r>
-              <a:rPr sz="1100" b="1">
-                <a:solidFill>
-                  <a:srgbClr val="1A3A6E"/>
-                </a:solidFill>
-              </a:rPr>
-              <a:t>Multilingual AI Chat</a:t>
-            </a:r>
-          </a:p>
-          <a:p>
-            <a:r>
-              <a:rPr sz="950">
-                <a:solidFill>
-                  <a:srgbClr val="333333"/>
-                </a:solidFill>
-              </a:rPr>
-              <a:t>Ask in Hindi, Telugu, Tamil, Bengali or 18 other Indian languages. Auto-detects and responds in same language.</a:t>
-            </a:r>
-          </a:p>
-        </p:txBody>
-      </p:sp>
-      <p:sp>
-        <p:nvSpPr>
-          <p:cNvPr id="15" name="Rounded Rectangle 14"/>
-          <p:cNvSpPr/>
-          <p:nvPr/>
-        </p:nvSpPr>
-        <p:spPr>
-          <a:xfrm>
-            <a:off x="365760" y="2057400"/>
-            <a:ext cx="5303520" cy="594360"/>
-          </a:xfrm>
-          <a:prstGeom prst="roundRect">
-            <a:avLst/>
-          </a:prstGeom>
-          <a:solidFill>
-            <a:srgbClr val="F5F5F5"/>
-          </a:solidFill>
-          <a:ln>
-            <a:noFill/>
-          </a:ln>
-        </p:spPr>
-        <p:style>
-          <a:lnRef idx="1">
-            <a:schemeClr val="accent1"/>
-          </a:lnRef>
-          <a:fillRef idx="3">
-            <a:schemeClr val="accent1"/>
-          </a:fillRef>
-          <a:effectRef idx="2">
-            <a:schemeClr val="accent1"/>
-          </a:effectRef>
-          <a:fontRef idx="minor">
-            <a:schemeClr val="lt1"/>
-          </a:fontRef>
-        </p:style>
-        <p:txBody>
-          <a:bodyPr rtlCol="0" anchor="ctr"/>
-          <a:lstStyle/>
-          <a:p>
-            <a:pPr algn="ctr"/>
-          </a:p>
-        </p:txBody>
-      </p:sp>
-      <p:sp>
-        <p:nvSpPr>
-          <p:cNvPr id="16" name="Rectangle 15"/>
-          <p:cNvSpPr/>
-          <p:nvPr/>
-        </p:nvSpPr>
-        <p:spPr>
-          <a:xfrm>
-            <a:off x="365760" y="2057400"/>
-            <a:ext cx="54864" cy="594360"/>
-          </a:xfrm>
-          <a:prstGeom prst="rect">
-            <a:avLst/>
-          </a:prstGeom>
-          <a:solidFill>
-            <a:srgbClr val="FF6B35"/>
-          </a:solidFill>
-          <a:ln>
-            <a:noFill/>
-          </a:ln>
-        </p:spPr>
-        <p:style>
-          <a:lnRef idx="1">
-            <a:schemeClr val="accent1"/>
-          </a:lnRef>
-          <a:fillRef idx="3">
-            <a:schemeClr val="accent1"/>
-          </a:fillRef>
-          <a:effectRef idx="2">
-            <a:schemeClr val="accent1"/>
-          </a:effectRef>
-          <a:fontRef idx="minor">
-            <a:schemeClr val="lt1"/>
-          </a:fontRef>
-        </p:style>
-        <p:txBody>
-          <a:bodyPr rtlCol="0" anchor="ctr"/>
-          <a:lstStyle/>
-          <a:p>
-            <a:pPr algn="ctr"/>
-          </a:p>
-        </p:txBody>
-      </p:sp>
-      <p:sp>
-        <p:nvSpPr>
-          <p:cNvPr id="17" name="TextBox 16"/>
-          <p:cNvSpPr txBox="1"/>
-          <p:nvPr/>
-        </p:nvSpPr>
-        <p:spPr>
-          <a:xfrm>
-            <a:off x="502920" y="2130552"/>
-            <a:ext cx="457200" cy="457200"/>
-          </a:xfrm>
-          <a:prstGeom prst="rect">
-            <a:avLst/>
-          </a:prstGeom>
-          <a:noFill/>
-        </p:spPr>
-        <p:txBody>
-          <a:bodyPr wrap="none">
-            <a:spAutoFit/>
-          </a:bodyPr>
-          <a:lstStyle/>
-          <a:p>
-            <a:r>
-              <a:rPr sz="2000"/>
-              <a:t>📋</a:t>
-            </a:r>
-          </a:p>
-        </p:txBody>
-      </p:sp>
-      <p:sp>
-        <p:nvSpPr>
-          <p:cNvPr id="18" name="TextBox 17"/>
-          <p:cNvSpPr txBox="1"/>
-          <p:nvPr/>
-        </p:nvSpPr>
-        <p:spPr>
-          <a:xfrm>
-            <a:off x="1005840" y="2130552"/>
-            <a:ext cx="4572000" cy="502920"/>
-          </a:xfrm>
-          <a:prstGeom prst="rect">
-            <a:avLst/>
-          </a:prstGeom>
-          <a:noFill/>
-        </p:spPr>
-        <p:txBody>
-          <a:bodyPr wrap="square">
-            <a:spAutoFit/>
-          </a:bodyPr>
-          <a:lstStyle/>
-          <a:p>
-            <a:r>
-              <a:rPr sz="1100" b="1">
-                <a:solidFill>
-                  <a:srgbClr val="1A3A6E"/>
-                </a:solidFill>
-              </a:rPr>
-              <a:t>6-Section Structured Response</a:t>
-            </a:r>
-          </a:p>
-          <a:p>
-            <a:r>
-              <a:rPr sz="950">
-                <a:solidFill>
-                  <a:srgbClr val="333333"/>
-                </a:solidFill>
-              </a:rPr>
-              <a:t>Standards, testing, BIS offices, legal basis, QC process, and documents — every time.</a:t>
-            </a:r>
-          </a:p>
-        </p:txBody>
-      </p:sp>
-      <p:sp>
-        <p:nvSpPr>
-          <p:cNvPr id="19" name="Rounded Rectangle 18"/>
-          <p:cNvSpPr/>
-          <p:nvPr/>
-        </p:nvSpPr>
-        <p:spPr>
-          <a:xfrm>
-            <a:off x="365760" y="2743200"/>
-            <a:ext cx="5303520" cy="594360"/>
-          </a:xfrm>
-          <a:prstGeom prst="roundRect">
-            <a:avLst/>
-          </a:prstGeom>
-          <a:solidFill>
-            <a:srgbClr val="F5F5F5"/>
-          </a:solidFill>
-          <a:ln>
-            <a:noFill/>
-          </a:ln>
-        </p:spPr>
-        <p:style>
-          <a:lnRef idx="1">
-            <a:schemeClr val="accent1"/>
-          </a:lnRef>
-          <a:fillRef idx="3">
-            <a:schemeClr val="accent1"/>
-          </a:fillRef>
-          <a:effectRef idx="2">
-            <a:schemeClr val="accent1"/>
-          </a:effectRef>
-          <a:fontRef idx="minor">
-            <a:schemeClr val="lt1"/>
-          </a:fontRef>
-        </p:style>
-        <p:txBody>
-          <a:bodyPr rtlCol="0" anchor="ctr"/>
-          <a:lstStyle/>
-          <a:p>
-            <a:pPr algn="ctr"/>
-          </a:p>
-        </p:txBody>
-      </p:sp>
-      <p:sp>
-        <p:nvSpPr>
-          <p:cNvPr id="20" name="Rectangle 19"/>
-          <p:cNvSpPr/>
-          <p:nvPr/>
-        </p:nvSpPr>
-        <p:spPr>
-          <a:xfrm>
-            <a:off x="365760" y="2743200"/>
-            <a:ext cx="54864" cy="594360"/>
-          </a:xfrm>
-          <a:prstGeom prst="rect">
-            <a:avLst/>
-          </a:prstGeom>
-          <a:solidFill>
-            <a:srgbClr val="FF6B35"/>
-          </a:solidFill>
-          <a:ln>
-            <a:noFill/>
-          </a:ln>
-        </p:spPr>
-        <p:style>
-          <a:lnRef idx="1">
-            <a:schemeClr val="accent1"/>
-          </a:lnRef>
-          <a:fillRef idx="3">
-            <a:schemeClr val="accent1"/>
-          </a:fillRef>
-          <a:effectRef idx="2">
-            <a:schemeClr val="accent1"/>
-          </a:effectRef>
-          <a:fontRef idx="minor">
-            <a:schemeClr val="lt1"/>
-          </a:fontRef>
-        </p:style>
-        <p:txBody>
-          <a:bodyPr rtlCol="0" anchor="ctr"/>
-          <a:lstStyle/>
-          <a:p>
-            <a:pPr algn="ctr"/>
-          </a:p>
-        </p:txBody>
-      </p:sp>
-      <p:sp>
-        <p:nvSpPr>
-          <p:cNvPr id="21" name="TextBox 20"/>
-          <p:cNvSpPr txBox="1"/>
-          <p:nvPr/>
-        </p:nvSpPr>
-        <p:spPr>
-          <a:xfrm>
-            <a:off x="502920" y="2816352"/>
-            <a:ext cx="457200" cy="457200"/>
-          </a:xfrm>
-          <a:prstGeom prst="rect">
-            <a:avLst/>
-          </a:prstGeom>
-          <a:noFill/>
-        </p:spPr>
-        <p:txBody>
-          <a:bodyPr wrap="none">
-            <a:spAutoFit/>
-          </a:bodyPr>
-          <a:lstStyle/>
-          <a:p>
-            <a:r>
-              <a:rPr sz="2000"/>
-              <a:t>🔄</a:t>
-            </a:r>
-          </a:p>
-        </p:txBody>
-      </p:sp>
-      <p:sp>
-        <p:nvSpPr>
-          <p:cNvPr id="22" name="TextBox 21"/>
-          <p:cNvSpPr txBox="1"/>
-          <p:nvPr/>
-        </p:nvSpPr>
-        <p:spPr>
-          <a:xfrm>
-            <a:off x="1005840" y="2816352"/>
-            <a:ext cx="4572000" cy="502920"/>
-          </a:xfrm>
-          <a:prstGeom prst="rect">
-            <a:avLst/>
-          </a:prstGeom>
-          <a:noFill/>
-        </p:spPr>
-        <p:txBody>
-          <a:bodyPr wrap="square">
-            <a:spAutoFit/>
-          </a:bodyPr>
-          <a:lstStyle/>
-          <a:p>
-            <a:r>
-              <a:rPr sz="1100" b="1">
-                <a:solidFill>
-                  <a:srgbClr val="1A3A6E"/>
-                </a:solidFill>
-              </a:rPr>
-              <a:t>Live Auto-Fetch Pipeline</a:t>
-            </a:r>
-          </a:p>
-          <a:p>
-            <a:r>
-              <a:rPr sz="950">
-                <a:solidFill>
-                  <a:srgbClr val="333333"/>
-                </a:solidFill>
-              </a:rPr>
-              <a:t>Scrapes bis.gov.in for new standards and indexes them automatically.</a:t>
-            </a:r>
-          </a:p>
-        </p:txBody>
-      </p:sp>
-      <p:sp>
-        <p:nvSpPr>
-          <p:cNvPr id="23" name="Rounded Rectangle 22"/>
-          <p:cNvSpPr/>
-          <p:nvPr/>
-        </p:nvSpPr>
-        <p:spPr>
-          <a:xfrm>
-            <a:off x="365760" y="3429000"/>
-            <a:ext cx="5303520" cy="594360"/>
-          </a:xfrm>
-          <a:prstGeom prst="roundRect">
-            <a:avLst/>
-          </a:prstGeom>
-          <a:solidFill>
-            <a:srgbClr val="F5F5F5"/>
-          </a:solidFill>
-          <a:ln>
-            <a:noFill/>
-          </a:ln>
-        </p:spPr>
-        <p:style>
-          <a:lnRef idx="1">
-            <a:schemeClr val="accent1"/>
-          </a:lnRef>
-          <a:fillRef idx="3">
-            <a:schemeClr val="accent1"/>
-          </a:fillRef>
-          <a:effectRef idx="2">
-            <a:schemeClr val="accent1"/>
-          </a:effectRef>
-          <a:fontRef idx="minor">
-            <a:schemeClr val="lt1"/>
-          </a:fontRef>
-        </p:style>
-        <p:txBody>
-          <a:bodyPr rtlCol="0" anchor="ctr"/>
-          <a:lstStyle/>
-          <a:p>
-            <a:pPr algn="ctr"/>
-          </a:p>
-        </p:txBody>
-      </p:sp>
-      <p:sp>
-        <p:nvSpPr>
-          <p:cNvPr id="24" name="Rectangle 23"/>
-          <p:cNvSpPr/>
-          <p:nvPr/>
-        </p:nvSpPr>
-        <p:spPr>
-          <a:xfrm>
-            <a:off x="365760" y="3429000"/>
-            <a:ext cx="54864" cy="594360"/>
-          </a:xfrm>
-          <a:prstGeom prst="rect">
-            <a:avLst/>
-          </a:prstGeom>
-          <a:solidFill>
-            <a:srgbClr val="FF6B35"/>
-          </a:solidFill>
-          <a:ln>
-            <a:noFill/>
-          </a:ln>
-        </p:spPr>
-        <p:style>
-          <a:lnRef idx="1">
-            <a:schemeClr val="accent1"/>
-          </a:lnRef>
-          <a:fillRef idx="3">
-            <a:schemeClr val="accent1"/>
-          </a:fillRef>
-          <a:effectRef idx="2">
-            <a:schemeClr val="accent1"/>
-          </a:effectRef>
-          <a:fontRef idx="minor">
-            <a:schemeClr val="lt1"/>
-          </a:fontRef>
-        </p:style>
-        <p:txBody>
-          <a:bodyPr rtlCol="0" anchor="ctr"/>
-          <a:lstStyle/>
-          <a:p>
-            <a:pPr algn="ctr"/>
-          </a:p>
-        </p:txBody>
-      </p:sp>
-      <p:sp>
-        <p:nvSpPr>
-          <p:cNvPr id="25" name="TextBox 24"/>
-          <p:cNvSpPr txBox="1"/>
-          <p:nvPr/>
-        </p:nvSpPr>
-        <p:spPr>
-          <a:xfrm>
-            <a:off x="502920" y="3502152"/>
-            <a:ext cx="457200" cy="457200"/>
-          </a:xfrm>
-          <a:prstGeom prst="rect">
-            <a:avLst/>
-          </a:prstGeom>
-          <a:noFill/>
-        </p:spPr>
-        <p:txBody>
-          <a:bodyPr wrap="none">
-            <a:spAutoFit/>
-          </a:bodyPr>
-          <a:lstStyle/>
-          <a:p>
-            <a:r>
-              <a:rPr sz="2000"/>
-              <a:t>📍</a:t>
-            </a:r>
-          </a:p>
-        </p:txBody>
-      </p:sp>
-      <p:sp>
-        <p:nvSpPr>
-          <p:cNvPr id="26" name="TextBox 25"/>
-          <p:cNvSpPr txBox="1"/>
-          <p:nvPr/>
-        </p:nvSpPr>
-        <p:spPr>
-          <a:xfrm>
-            <a:off x="1005840" y="3502152"/>
-            <a:ext cx="4572000" cy="502920"/>
-          </a:xfrm>
-          <a:prstGeom prst="rect">
-            <a:avLst/>
-          </a:prstGeom>
-          <a:noFill/>
-        </p:spPr>
-        <p:txBody>
-          <a:bodyPr wrap="square">
-            <a:spAutoFit/>
-          </a:bodyPr>
-          <a:lstStyle/>
-          <a:p>
-            <a:r>
-              <a:rPr sz="1100" b="1">
-                <a:solidFill>
-                  <a:srgbClr val="1A3A6E"/>
-                </a:solidFill>
-              </a:rPr>
-              <a:t>BIS Office Finder</a:t>
-            </a:r>
-          </a:p>
-          <a:p>
-            <a:r>
-              <a:rPr sz="950">
-                <a:solidFill>
-                  <a:srgbClr val="333333"/>
-                </a:solidFill>
-              </a:rPr>
-              <a:t>GPS-based nearest centre with directions, phone numbers, services.</a:t>
-            </a:r>
-          </a:p>
-        </p:txBody>
-      </p:sp>
-      <p:sp>
-        <p:nvSpPr>
-          <p:cNvPr id="27" name="Rounded Rectangle 26"/>
-          <p:cNvSpPr/>
-          <p:nvPr/>
-        </p:nvSpPr>
-        <p:spPr>
-          <a:xfrm>
-            <a:off x="365760" y="4114800"/>
-            <a:ext cx="5303520" cy="594360"/>
-          </a:xfrm>
-          <a:prstGeom prst="roundRect">
-            <a:avLst/>
-          </a:prstGeom>
-          <a:solidFill>
-            <a:srgbClr val="F5F5F5"/>
-          </a:solidFill>
-          <a:ln>
-            <a:noFill/>
-          </a:ln>
-        </p:spPr>
-        <p:style>
-          <a:lnRef idx="1">
-            <a:schemeClr val="accent1"/>
-          </a:lnRef>
-          <a:fillRef idx="3">
-            <a:schemeClr val="accent1"/>
-          </a:fillRef>
-          <a:effectRef idx="2">
-            <a:schemeClr val="accent1"/>
-          </a:effectRef>
-          <a:fontRef idx="minor">
-            <a:schemeClr val="lt1"/>
-          </a:fontRef>
-        </p:style>
-        <p:txBody>
-          <a:bodyPr rtlCol="0" anchor="ctr"/>
-          <a:lstStyle/>
-          <a:p>
-            <a:pPr algn="ctr"/>
-          </a:p>
-        </p:txBody>
-      </p:sp>
-      <p:sp>
-        <p:nvSpPr>
-          <p:cNvPr id="28" name="Rectangle 27"/>
-          <p:cNvSpPr/>
-          <p:nvPr/>
-        </p:nvSpPr>
-        <p:spPr>
-          <a:xfrm>
-            <a:off x="365760" y="4114800"/>
-            <a:ext cx="54864" cy="594360"/>
-          </a:xfrm>
-          <a:prstGeom prst="rect">
-            <a:avLst/>
-          </a:prstGeom>
-          <a:solidFill>
-            <a:srgbClr val="FF6B35"/>
-          </a:solidFill>
-          <a:ln>
-            <a:noFill/>
-          </a:ln>
-        </p:spPr>
-        <p:style>
-          <a:lnRef idx="1">
-            <a:schemeClr val="accent1"/>
-          </a:lnRef>
-          <a:fillRef idx="3">
-            <a:schemeClr val="accent1"/>
-          </a:fillRef>
-          <a:effectRef idx="2">
-            <a:schemeClr val="accent1"/>
-          </a:effectRef>
-          <a:fontRef idx="minor">
-            <a:schemeClr val="lt1"/>
-          </a:fontRef>
-        </p:style>
-        <p:txBody>
-          <a:bodyPr rtlCol="0" anchor="ctr"/>
-          <a:lstStyle/>
-          <a:p>
-            <a:pPr algn="ctr"/>
-          </a:p>
-        </p:txBody>
-      </p:sp>
-      <p:sp>
-        <p:nvSpPr>
-          <p:cNvPr id="29" name="TextBox 28"/>
-          <p:cNvSpPr txBox="1"/>
-          <p:nvPr/>
-        </p:nvSpPr>
-        <p:spPr>
-          <a:xfrm>
-            <a:off x="502920" y="4187952"/>
-            <a:ext cx="457200" cy="457200"/>
-          </a:xfrm>
-          <a:prstGeom prst="rect">
-            <a:avLst/>
-          </a:prstGeom>
-          <a:noFill/>
-        </p:spPr>
-        <p:txBody>
-          <a:bodyPr wrap="none">
-            <a:spAutoFit/>
-          </a:bodyPr>
-          <a:lstStyle/>
-          <a:p>
-            <a:r>
-              <a:rPr sz="2000"/>
-              <a:t>📋</a:t>
-            </a:r>
-          </a:p>
-        </p:txBody>
-      </p:sp>
-      <p:sp>
-        <p:nvSpPr>
-          <p:cNvPr id="30" name="TextBox 29"/>
-          <p:cNvSpPr txBox="1"/>
-          <p:nvPr/>
-        </p:nvSpPr>
-        <p:spPr>
-          <a:xfrm>
-            <a:off x="1005840" y="4187952"/>
-            <a:ext cx="4572000" cy="502920"/>
-          </a:xfrm>
-          <a:prstGeom prst="rect">
-            <a:avLst/>
-          </a:prstGeom>
-          <a:noFill/>
-        </p:spPr>
-        <p:txBody>
-          <a:bodyPr wrap="square">
-            <a:spAutoFit/>
-          </a:bodyPr>
-          <a:lstStyle/>
-          <a:p>
-            <a:r>
-              <a:rPr sz="1100" b="1">
-                <a:solidFill>
-                  <a:srgbClr val="1A3A6E"/>
-                </a:solidFill>
-              </a:rPr>
-              <a:t>Certification Guide</a:t>
-            </a:r>
-          </a:p>
-          <a:p>
-            <a:r>
-              <a:rPr sz="950">
-                <a:solidFill>
-                  <a:srgbClr val="333333"/>
-                </a:solidFill>
-              </a:rPr>
-              <a:t>Step-by-step for ISI Mark, Hallmark, Eco Mark, CMVR, MSME Udyam.</a:t>
-            </a:r>
-          </a:p>
-        </p:txBody>
-      </p:sp>
-      <p:sp>
-        <p:nvSpPr>
-          <p:cNvPr id="31" name="TextBox 30"/>
-          <p:cNvSpPr txBox="1"/>
-          <p:nvPr/>
-        </p:nvSpPr>
-        <p:spPr>
-          <a:xfrm>
-            <a:off x="6217920" y="1005840"/>
-            <a:ext cx="5486400" cy="320040"/>
-          </a:xfrm>
-          <a:prstGeom prst="rect">
-            <a:avLst/>
-          </a:prstGeom>
-          <a:noFill/>
-        </p:spPr>
-        <p:txBody>
-          <a:bodyPr wrap="none">
-            <a:spAutoFit/>
-          </a:bodyPr>
-          <a:lstStyle/>
-          <a:p>
-            <a:r>
-              <a:rPr sz="1600" b="1">
-                <a:solidFill>
-                  <a:srgbClr val="1A3A6E"/>
-                </a:solidFill>
-              </a:rPr>
-              <a:t>App Screenshots:</a:t>
-            </a:r>
-          </a:p>
-        </p:txBody>
-      </p:sp>
-      <p:sp>
-        <p:nvSpPr>
-          <p:cNvPr id="32" name="Rounded Rectangle 31"/>
-          <p:cNvSpPr/>
-          <p:nvPr/>
-        </p:nvSpPr>
-        <p:spPr>
-          <a:xfrm>
-            <a:off x="6217920" y="1417320"/>
-            <a:ext cx="5303520" cy="2560320"/>
-          </a:xfrm>
-          <a:prstGeom prst="roundRect">
-            <a:avLst/>
-          </a:prstGeom>
-          <a:solidFill>
-            <a:srgbClr val="FFFFFF"/>
-          </a:solidFill>
-          <a:ln w="12700">
-            <a:solidFill>
-              <a:srgbClr val="DDDDDD"/>
-            </a:solidFill>
-          </a:ln>
-        </p:spPr>
-        <p:style>
-          <a:lnRef idx="1">
-            <a:schemeClr val="accent1"/>
-          </a:lnRef>
-          <a:fillRef idx="3">
-            <a:schemeClr val="accent1"/>
-          </a:fillRef>
-          <a:effectRef idx="2">
-            <a:schemeClr val="accent1"/>
-          </a:effectRef>
-          <a:fontRef idx="minor">
-            <a:schemeClr val="lt1"/>
-          </a:fontRef>
-        </p:style>
-        <p:txBody>
-          <a:bodyPr rtlCol="0" anchor="ctr"/>
-          <a:lstStyle/>
-          <a:p>
-            <a:pPr algn="ctr"/>
-          </a:p>
-        </p:txBody>
-      </p:sp>
-      <p:sp>
-        <p:nvSpPr>
-          <p:cNvPr id="33" name="Rectangle 32"/>
-          <p:cNvSpPr/>
-          <p:nvPr/>
-        </p:nvSpPr>
-        <p:spPr>
-          <a:xfrm>
-            <a:off x="6217920" y="1417320"/>
-            <a:ext cx="5303520" cy="320040"/>
+            <a:off x="6217920" y="4114800"/>
+            <a:ext cx="5303520" cy="274320"/>
           </a:xfrm>
           <a:prstGeom prst="rect">
             <a:avLst/>
@@ -9222,813 +7233,169 @@
           <a:p>
             <a:pPr algn="ctr"/>
             <a:r>
-              <a:rPr sz="1000" b="1">
+              <a:rPr sz="900" b="1">
                 <a:solidFill>
                   <a:srgbClr val="FFFFFF"/>
                 </a:solidFill>
               </a:rPr>
-              <a:t>  🏛️ ManakMitra</a:t>
-            </a:r>
-          </a:p>
-        </p:txBody>
-      </p:sp>
-      <p:sp>
-        <p:nvSpPr>
-          <p:cNvPr id="34" name="Rounded Rectangle 33"/>
-          <p:cNvSpPr/>
-          <p:nvPr/>
-        </p:nvSpPr>
-        <p:spPr>
-          <a:xfrm>
-            <a:off x="8686800" y="1920240"/>
-            <a:ext cx="2743200" cy="320040"/>
-          </a:xfrm>
-          <a:prstGeom prst="roundRect">
-            <a:avLst/>
-          </a:prstGeom>
-          <a:solidFill>
-            <a:srgbClr val="1A3A6E"/>
-          </a:solidFill>
+              <a:t>  📚 BIS Standards Library — 28 Standards Indexed</a:t>
+            </a:r>
+            <a:endParaRPr sz="900" b="1">
+              <a:solidFill>
+                <a:srgbClr val="FFFFFF"/>
+              </a:solidFill>
+            </a:endParaRPr>
+          </a:p>
+        </p:txBody>
+      </p:sp>
+      <p:pic>
+        <p:nvPicPr>
+          <p:cNvPr id="48" name="Picture 47"/>
+          <p:cNvPicPr>
+            <a:picLocks noChangeAspect="1"/>
+          </p:cNvPicPr>
+          <p:nvPr/>
+        </p:nvPicPr>
+        <p:blipFill>
+          <a:blip r:embed="rId1"/>
+          <a:stretch>
+            <a:fillRect/>
+          </a:stretch>
+        </p:blipFill>
+        <p:spPr>
+          <a:xfrm>
+            <a:off x="5650230" y="1456690"/>
+            <a:ext cx="6348730" cy="4448175"/>
+          </a:xfrm>
+          <a:prstGeom prst="rect">
+            <a:avLst/>
+          </a:prstGeom>
+        </p:spPr>
+      </p:pic>
+      <p:pic>
+        <p:nvPicPr>
+          <p:cNvPr id="49" name="Picture 48"/>
+          <p:cNvPicPr>
+            <a:picLocks noChangeAspect="1"/>
+          </p:cNvPicPr>
+          <p:nvPr/>
+        </p:nvPicPr>
+        <p:blipFill>
+          <a:blip r:embed="rId2"/>
+          <a:srcRect r="1153"/>
+          <a:stretch>
+            <a:fillRect/>
+          </a:stretch>
+        </p:blipFill>
+        <p:spPr>
+          <a:xfrm>
+            <a:off x="5793105" y="3647440"/>
+            <a:ext cx="6153785" cy="2019300"/>
+          </a:xfrm>
+          <a:prstGeom prst="rect">
+            <a:avLst/>
+          </a:prstGeom>
+        </p:spPr>
+      </p:pic>
+      <p:pic>
+        <p:nvPicPr>
+          <p:cNvPr id="51" name="Picture 50"/>
+          <p:cNvPicPr>
+            <a:picLocks noChangeAspect="1"/>
+          </p:cNvPicPr>
+          <p:nvPr/>
+        </p:nvPicPr>
+        <p:blipFill>
+          <a:blip r:embed="rId3"/>
+          <a:stretch>
+            <a:fillRect/>
+          </a:stretch>
+        </p:blipFill>
+        <p:spPr>
+          <a:xfrm>
+            <a:off x="0" y="1234440"/>
+            <a:ext cx="5597525" cy="4670425"/>
+          </a:xfrm>
+          <a:prstGeom prst="rect">
+            <a:avLst/>
+          </a:prstGeom>
+        </p:spPr>
+      </p:pic>
+      <p:cxnSp>
+        <p:nvCxnSpPr>
+          <p:cNvPr id="52" name="Straight Connector 51"/>
+          <p:cNvCxnSpPr/>
+          <p:nvPr/>
+        </p:nvCxnSpPr>
+        <p:spPr>
+          <a:xfrm>
+            <a:off x="5546725" y="1492250"/>
+            <a:ext cx="0" cy="4174490"/>
+          </a:xfrm>
+          <a:prstGeom prst="line">
+            <a:avLst/>
+          </a:prstGeom>
           <a:ln>
-            <a:noFill/>
+            <a:solidFill>
+              <a:schemeClr val="bg1">
+                <a:lumMod val="85000"/>
+              </a:schemeClr>
+            </a:solidFill>
           </a:ln>
         </p:spPr>
         <p:style>
-          <a:lnRef idx="1">
+          <a:lnRef idx="2">
             <a:schemeClr val="accent1"/>
           </a:lnRef>
-          <a:fillRef idx="3">
+          <a:fillRef idx="0">
             <a:schemeClr val="accent1"/>
           </a:fillRef>
-          <a:effectRef idx="2">
+          <a:effectRef idx="1">
             <a:schemeClr val="accent1"/>
           </a:effectRef>
           <a:fontRef idx="minor">
-            <a:schemeClr val="lt1"/>
+            <a:schemeClr val="tx1"/>
           </a:fontRef>
         </p:style>
-        <p:txBody>
-          <a:bodyPr rtlCol="0" anchor="ctr"/>
-          <a:lstStyle/>
-          <a:p>
-            <a:pPr algn="r"/>
-            <a:r>
-              <a:rPr sz="800">
-                <a:solidFill>
-                  <a:srgbClr val="FFFFFF"/>
-                </a:solidFill>
-              </a:rPr>
-              <a:t>What are the standards for cement?</a:t>
-            </a:r>
-          </a:p>
-        </p:txBody>
-      </p:sp>
-      <p:sp>
-        <p:nvSpPr>
-          <p:cNvPr id="35" name="Rounded Rectangle 34"/>
-          <p:cNvSpPr/>
-          <p:nvPr/>
-        </p:nvSpPr>
-        <p:spPr>
-          <a:xfrm>
-            <a:off x="6400800" y="2377440"/>
-            <a:ext cx="4937760" cy="274320"/>
-          </a:xfrm>
-          <a:prstGeom prst="roundRect">
-            <a:avLst/>
-          </a:prstGeom>
-          <a:solidFill>
-            <a:srgbClr val="E3F2FD"/>
-          </a:solidFill>
-          <a:ln w="12700">
+      </p:cxnSp>
+      <p:cxnSp>
+        <p:nvCxnSpPr>
+          <p:cNvPr id="53" name="Straight Connector 52"/>
+          <p:cNvCxnSpPr/>
+          <p:nvPr/>
+        </p:nvCxnSpPr>
+        <p:spPr>
+          <a:xfrm flipH="1">
+            <a:off x="0" y="3579495"/>
+            <a:ext cx="5546725" cy="0"/>
+          </a:xfrm>
+          <a:prstGeom prst="line">
+            <a:avLst/>
+          </a:prstGeom>
+          <a:ln w="31750" cap="rnd">
             <a:solidFill>
-              <a:srgbClr val="2196F3"/>
+              <a:schemeClr val="bg1">
+                <a:lumMod val="85000"/>
+              </a:schemeClr>
             </a:solidFill>
+            <a:round/>
           </a:ln>
         </p:spPr>
         <p:style>
-          <a:lnRef idx="1">
-            <a:schemeClr val="accent1"/>
+          <a:lnRef idx="0">
+            <a:srgbClr val="FFFFFF"/>
           </a:lnRef>
-          <a:fillRef idx="3">
-            <a:schemeClr val="accent1"/>
+          <a:fillRef idx="0">
+            <a:srgbClr val="FFFFFF"/>
           </a:fillRef>
-          <a:effectRef idx="2">
-            <a:schemeClr val="accent1"/>
+          <a:effectRef idx="0">
+            <a:srgbClr val="FFFFFF"/>
           </a:effectRef>
           <a:fontRef idx="minor">
-            <a:schemeClr val="lt1"/>
+            <a:schemeClr val="tx1"/>
           </a:fontRef>
         </p:style>
-        <p:txBody>
-          <a:bodyPr rtlCol="0" anchor="ctr" lIns="76200" tIns="25400"/>
-          <a:lstStyle/>
-          <a:p>
-            <a:pPr algn="ctr"/>
-            <a:r>
-              <a:rPr sz="800" b="1">
-                <a:solidFill>
-                  <a:srgbClr val="333333"/>
-                </a:solidFill>
-              </a:rPr>
-              <a:t>📋 1. Applicable IS Standards — IS 269, IS 455, IS 8112</a:t>
-            </a:r>
-          </a:p>
-        </p:txBody>
-      </p:sp>
-      <p:sp>
-        <p:nvSpPr>
-          <p:cNvPr id="36" name="Rounded Rectangle 35"/>
-          <p:cNvSpPr/>
-          <p:nvPr/>
-        </p:nvSpPr>
-        <p:spPr>
-          <a:xfrm>
-            <a:off x="6400800" y="2743200"/>
-            <a:ext cx="4937760" cy="274320"/>
-          </a:xfrm>
-          <a:prstGeom prst="roundRect">
-            <a:avLst/>
-          </a:prstGeom>
-          <a:solidFill>
-            <a:srgbClr val="F3E5F5"/>
-          </a:solidFill>
-          <a:ln w="12700">
-            <a:solidFill>
-              <a:srgbClr val="9C27B0"/>
-            </a:solidFill>
-          </a:ln>
-        </p:spPr>
-        <p:style>
-          <a:lnRef idx="1">
-            <a:schemeClr val="accent1"/>
-          </a:lnRef>
-          <a:fillRef idx="3">
-            <a:schemeClr val="accent1"/>
-          </a:fillRef>
-          <a:effectRef idx="2">
-            <a:schemeClr val="accent1"/>
-          </a:effectRef>
-          <a:fontRef idx="minor">
-            <a:schemeClr val="lt1"/>
-          </a:fontRef>
-        </p:style>
-        <p:txBody>
-          <a:bodyPr rtlCol="0" anchor="ctr" lIns="76200" tIns="25400"/>
-          <a:lstStyle/>
-          <a:p>
-            <a:pPr algn="ctr"/>
-            <a:r>
-              <a:rPr sz="800" b="1">
-                <a:solidFill>
-                  <a:srgbClr val="333333"/>
-                </a:solidFill>
-              </a:rPr>
-              <a:t>🔬 2. Testing Requirements — Compressive strength per IS 4031</a:t>
-            </a:r>
-          </a:p>
-        </p:txBody>
-      </p:sp>
-      <p:sp>
-        <p:nvSpPr>
-          <p:cNvPr id="37" name="Rounded Rectangle 36"/>
-          <p:cNvSpPr/>
-          <p:nvPr/>
-        </p:nvSpPr>
-        <p:spPr>
-          <a:xfrm>
-            <a:off x="6400800" y="3108960"/>
-            <a:ext cx="4937760" cy="274320"/>
-          </a:xfrm>
-          <a:prstGeom prst="roundRect">
-            <a:avLst/>
-          </a:prstGeom>
-          <a:solidFill>
-            <a:srgbClr val="E8F5E9"/>
-          </a:solidFill>
-          <a:ln w="12700">
-            <a:solidFill>
-              <a:srgbClr val="4CAF50"/>
-            </a:solidFill>
-          </a:ln>
-        </p:spPr>
-        <p:style>
-          <a:lnRef idx="1">
-            <a:schemeClr val="accent1"/>
-          </a:lnRef>
-          <a:fillRef idx="3">
-            <a:schemeClr val="accent1"/>
-          </a:fillRef>
-          <a:effectRef idx="2">
-            <a:schemeClr val="accent1"/>
-          </a:effectRef>
-          <a:fontRef idx="minor">
-            <a:schemeClr val="lt1"/>
-          </a:fontRef>
-        </p:style>
-        <p:txBody>
-          <a:bodyPr rtlCol="0" anchor="ctr" lIns="76200" tIns="25400"/>
-          <a:lstStyle/>
-          <a:p>
-            <a:pPr algn="ctr"/>
-            <a:r>
-              <a:rPr sz="800" b="1">
-                <a:solidFill>
-                  <a:srgbClr val="333333"/>
-                </a:solidFill>
-              </a:rPr>
-              <a:t>📍 3. Where to Test — BIS Lab Delhi: 011-23232323</a:t>
-            </a:r>
-          </a:p>
-        </p:txBody>
-      </p:sp>
-      <p:sp>
-        <p:nvSpPr>
-          <p:cNvPr id="38" name="Rounded Rectangle 37"/>
-          <p:cNvSpPr/>
-          <p:nvPr/>
-        </p:nvSpPr>
-        <p:spPr>
-          <a:xfrm>
-            <a:off x="6400800" y="3474720"/>
-            <a:ext cx="4937760" cy="274320"/>
-          </a:xfrm>
-          <a:prstGeom prst="roundRect">
-            <a:avLst/>
-          </a:prstGeom>
-          <a:solidFill>
-            <a:srgbClr val="FFF8E1"/>
-          </a:solidFill>
-          <a:ln w="12700">
-            <a:solidFill>
-              <a:srgbClr val="FF9800"/>
-            </a:solidFill>
-          </a:ln>
-        </p:spPr>
-        <p:style>
-          <a:lnRef idx="1">
-            <a:schemeClr val="accent1"/>
-          </a:lnRef>
-          <a:fillRef idx="3">
-            <a:schemeClr val="accent1"/>
-          </a:fillRef>
-          <a:effectRef idx="2">
-            <a:schemeClr val="accent1"/>
-          </a:effectRef>
-          <a:fontRef idx="minor">
-            <a:schemeClr val="lt1"/>
-          </a:fontRef>
-        </p:style>
-        <p:txBody>
-          <a:bodyPr rtlCol="0" anchor="ctr" lIns="76200" tIns="25400"/>
-          <a:lstStyle/>
-          <a:p>
-            <a:pPr algn="ctr"/>
-            <a:r>
-              <a:rPr sz="800" b="1">
-                <a:solidFill>
-                  <a:srgbClr val="333333"/>
-                </a:solidFill>
-              </a:rPr>
-              <a:t>⚖️ 4. Mandatory — Yes, under BIS Act 2016</a:t>
-            </a:r>
-          </a:p>
-        </p:txBody>
-      </p:sp>
-      <p:sp>
-        <p:nvSpPr>
-          <p:cNvPr id="39" name="Rounded Rectangle 38"/>
-          <p:cNvSpPr/>
-          <p:nvPr/>
-        </p:nvSpPr>
-        <p:spPr>
-          <a:xfrm>
-            <a:off x="6217920" y="4114800"/>
-            <a:ext cx="5303520" cy="2286000"/>
-          </a:xfrm>
-          <a:prstGeom prst="roundRect">
-            <a:avLst/>
-          </a:prstGeom>
-          <a:solidFill>
-            <a:srgbClr val="FFFFFF"/>
-          </a:solidFill>
-          <a:ln w="12700">
-            <a:solidFill>
-              <a:srgbClr val="DDDDDD"/>
-            </a:solidFill>
-          </a:ln>
-        </p:spPr>
-        <p:style>
-          <a:lnRef idx="1">
-            <a:schemeClr val="accent1"/>
-          </a:lnRef>
-          <a:fillRef idx="3">
-            <a:schemeClr val="accent1"/>
-          </a:fillRef>
-          <a:effectRef idx="2">
-            <a:schemeClr val="accent1"/>
-          </a:effectRef>
-          <a:fontRef idx="minor">
-            <a:schemeClr val="lt1"/>
-          </a:fontRef>
-        </p:style>
-        <p:txBody>
-          <a:bodyPr rtlCol="0" anchor="ctr"/>
-          <a:lstStyle/>
-          <a:p>
-            <a:pPr algn="ctr"/>
-          </a:p>
-        </p:txBody>
-      </p:sp>
-      <p:sp>
-        <p:nvSpPr>
-          <p:cNvPr id="40" name="Rectangle 39"/>
-          <p:cNvSpPr/>
-          <p:nvPr/>
-        </p:nvSpPr>
-        <p:spPr>
-          <a:xfrm>
-            <a:off x="6217920" y="4114800"/>
-            <a:ext cx="5303520" cy="274320"/>
-          </a:xfrm>
-          <a:prstGeom prst="rect">
-            <a:avLst/>
-          </a:prstGeom>
-          <a:solidFill>
-            <a:srgbClr val="1A3A6E"/>
-          </a:solidFill>
-          <a:ln>
-            <a:noFill/>
-          </a:ln>
-        </p:spPr>
-        <p:style>
-          <a:lnRef idx="1">
-            <a:schemeClr val="accent1"/>
-          </a:lnRef>
-          <a:fillRef idx="3">
-            <a:schemeClr val="accent1"/>
-          </a:fillRef>
-          <a:effectRef idx="2">
-            <a:schemeClr val="accent1"/>
-          </a:effectRef>
-          <a:fontRef idx="minor">
-            <a:schemeClr val="lt1"/>
-          </a:fontRef>
-        </p:style>
-        <p:txBody>
-          <a:bodyPr rtlCol="0" anchor="ctr"/>
-          <a:lstStyle/>
-          <a:p>
-            <a:pPr algn="ctr"/>
-            <a:r>
-              <a:rPr sz="900" b="1">
-                <a:solidFill>
-                  <a:srgbClr val="FFFFFF"/>
-                </a:solidFill>
-              </a:rPr>
-              <a:t>  📚 BIS Standards Library — 28 Standards Indexed</a:t>
-            </a:r>
-          </a:p>
-        </p:txBody>
-      </p:sp>
-      <p:sp>
-        <p:nvSpPr>
-          <p:cNvPr id="41" name="Rounded Rectangle 40"/>
-          <p:cNvSpPr/>
-          <p:nvPr/>
-        </p:nvSpPr>
-        <p:spPr>
-          <a:xfrm>
-            <a:off x="6400800" y="4526280"/>
-            <a:ext cx="1554480" cy="868680"/>
-          </a:xfrm>
-          <a:prstGeom prst="roundRect">
-            <a:avLst/>
-          </a:prstGeom>
-          <a:solidFill>
-            <a:srgbClr val="FFFFFF"/>
-          </a:solidFill>
-          <a:ln w="6350">
-            <a:solidFill>
-              <a:srgbClr val="E0E0E0"/>
-            </a:solidFill>
-          </a:ln>
-        </p:spPr>
-        <p:style>
-          <a:lnRef idx="1">
-            <a:schemeClr val="accent1"/>
-          </a:lnRef>
-          <a:fillRef idx="3">
-            <a:schemeClr val="accent1"/>
-          </a:fillRef>
-          <a:effectRef idx="2">
-            <a:schemeClr val="accent1"/>
-          </a:effectRef>
-          <a:fontRef idx="minor">
-            <a:schemeClr val="lt1"/>
-          </a:fontRef>
-        </p:style>
-        <p:txBody>
-          <a:bodyPr rtlCol="0" anchor="ctr" wrap="square" lIns="76200" tIns="50800"/>
-          <a:lstStyle/>
-          <a:p>
-            <a:pPr algn="ctr"/>
-            <a:r>
-              <a:rPr sz="700" b="1">
-                <a:solidFill>
-                  <a:srgbClr val="FF6B35"/>
-                </a:solidFill>
-              </a:rPr>
-              <a:t>CEMENT</a:t>
-            </a:r>
-          </a:p>
-          <a:p>
-            <a:r>
-              <a:rPr sz="1100" b="1">
-                <a:solidFill>
-                  <a:srgbClr val="1A3A6E"/>
-                </a:solidFill>
-              </a:rPr>
-              <a:t>IS 269</a:t>
-            </a:r>
-          </a:p>
-          <a:p>
-            <a:r>
-              <a:rPr sz="800">
-                <a:solidFill>
-                  <a:srgbClr val="333333"/>
-                </a:solidFill>
-              </a:rPr>
-              <a:t>Ordinary Portland Cement</a:t>
-            </a:r>
-          </a:p>
-        </p:txBody>
-      </p:sp>
-      <p:sp>
-        <p:nvSpPr>
-          <p:cNvPr id="42" name="Rounded Rectangle 41"/>
-          <p:cNvSpPr/>
-          <p:nvPr/>
-        </p:nvSpPr>
-        <p:spPr>
-          <a:xfrm>
-            <a:off x="8138160" y="4526280"/>
-            <a:ext cx="1554480" cy="868680"/>
-          </a:xfrm>
-          <a:prstGeom prst="roundRect">
-            <a:avLst/>
-          </a:prstGeom>
-          <a:solidFill>
-            <a:srgbClr val="FFFFFF"/>
-          </a:solidFill>
-          <a:ln w="6350">
-            <a:solidFill>
-              <a:srgbClr val="E0E0E0"/>
-            </a:solidFill>
-          </a:ln>
-        </p:spPr>
-        <p:style>
-          <a:lnRef idx="1">
-            <a:schemeClr val="accent1"/>
-          </a:lnRef>
-          <a:fillRef idx="3">
-            <a:schemeClr val="accent1"/>
-          </a:fillRef>
-          <a:effectRef idx="2">
-            <a:schemeClr val="accent1"/>
-          </a:effectRef>
-          <a:fontRef idx="minor">
-            <a:schemeClr val="lt1"/>
-          </a:fontRef>
-        </p:style>
-        <p:txBody>
-          <a:bodyPr rtlCol="0" anchor="ctr" wrap="square" lIns="76200" tIns="50800"/>
-          <a:lstStyle/>
-          <a:p>
-            <a:pPr algn="ctr"/>
-            <a:r>
-              <a:rPr sz="700" b="1">
-                <a:solidFill>
-                  <a:srgbClr val="FF6B35"/>
-                </a:solidFill>
-              </a:rPr>
-              <a:t>STEEL</a:t>
-            </a:r>
-          </a:p>
-          <a:p>
-            <a:r>
-              <a:rPr sz="1100" b="1">
-                <a:solidFill>
-                  <a:srgbClr val="1A3A6E"/>
-                </a:solidFill>
-              </a:rPr>
-              <a:t>IS 2062</a:t>
-            </a:r>
-          </a:p>
-          <a:p>
-            <a:r>
-              <a:rPr sz="800">
-                <a:solidFill>
-                  <a:srgbClr val="333333"/>
-                </a:solidFill>
-              </a:rPr>
-              <a:t>Structural Steel</a:t>
-            </a:r>
-          </a:p>
-        </p:txBody>
-      </p:sp>
-      <p:sp>
-        <p:nvSpPr>
-          <p:cNvPr id="43" name="Rounded Rectangle 42"/>
-          <p:cNvSpPr/>
-          <p:nvPr/>
-        </p:nvSpPr>
-        <p:spPr>
-          <a:xfrm>
-            <a:off x="9875520" y="4526280"/>
-            <a:ext cx="1554480" cy="868680"/>
-          </a:xfrm>
-          <a:prstGeom prst="roundRect">
-            <a:avLst/>
-          </a:prstGeom>
-          <a:solidFill>
-            <a:srgbClr val="FFFFFF"/>
-          </a:solidFill>
-          <a:ln w="6350">
-            <a:solidFill>
-              <a:srgbClr val="E0E0E0"/>
-            </a:solidFill>
-          </a:ln>
-        </p:spPr>
-        <p:style>
-          <a:lnRef idx="1">
-            <a:schemeClr val="accent1"/>
-          </a:lnRef>
-          <a:fillRef idx="3">
-            <a:schemeClr val="accent1"/>
-          </a:fillRef>
-          <a:effectRef idx="2">
-            <a:schemeClr val="accent1"/>
-          </a:effectRef>
-          <a:fontRef idx="minor">
-            <a:schemeClr val="lt1"/>
-          </a:fontRef>
-        </p:style>
-        <p:txBody>
-          <a:bodyPr rtlCol="0" anchor="ctr" wrap="square" lIns="76200" tIns="50800"/>
-          <a:lstStyle/>
-          <a:p>
-            <a:pPr algn="ctr"/>
-            <a:r>
-              <a:rPr sz="700" b="1">
-                <a:solidFill>
-                  <a:srgbClr val="FF6B35"/>
-                </a:solidFill>
-              </a:rPr>
-              <a:t>ELECTRICAL</a:t>
-            </a:r>
-          </a:p>
-          <a:p>
-            <a:r>
-              <a:rPr sz="1100" b="1">
-                <a:solidFill>
-                  <a:srgbClr val="1A3A6E"/>
-                </a:solidFill>
-              </a:rPr>
-              <a:t>IS 302</a:t>
-            </a:r>
-          </a:p>
-          <a:p>
-            <a:r>
-              <a:rPr sz="800">
-                <a:solidFill>
-                  <a:srgbClr val="333333"/>
-                </a:solidFill>
-              </a:rPr>
-              <a:t>Household Appliances</a:t>
-            </a:r>
-          </a:p>
-        </p:txBody>
-      </p:sp>
-      <p:sp>
-        <p:nvSpPr>
-          <p:cNvPr id="44" name="Rounded Rectangle 43"/>
-          <p:cNvSpPr/>
-          <p:nvPr/>
-        </p:nvSpPr>
-        <p:spPr>
-          <a:xfrm>
-            <a:off x="6400800" y="5532120"/>
-            <a:ext cx="1554480" cy="868680"/>
-          </a:xfrm>
-          <a:prstGeom prst="roundRect">
-            <a:avLst/>
-          </a:prstGeom>
-          <a:solidFill>
-            <a:srgbClr val="FFFFFF"/>
-          </a:solidFill>
-          <a:ln w="6350">
-            <a:solidFill>
-              <a:srgbClr val="E0E0E0"/>
-            </a:solidFill>
-          </a:ln>
-        </p:spPr>
-        <p:style>
-          <a:lnRef idx="1">
-            <a:schemeClr val="accent1"/>
-          </a:lnRef>
-          <a:fillRef idx="3">
-            <a:schemeClr val="accent1"/>
-          </a:fillRef>
-          <a:effectRef idx="2">
-            <a:schemeClr val="accent1"/>
-          </a:effectRef>
-          <a:fontRef idx="minor">
-            <a:schemeClr val="lt1"/>
-          </a:fontRef>
-        </p:style>
-        <p:txBody>
-          <a:bodyPr rtlCol="0" anchor="ctr" wrap="square" lIns="76200" tIns="50800"/>
-          <a:lstStyle/>
-          <a:p>
-            <a:pPr algn="ctr"/>
-            <a:r>
-              <a:rPr sz="700" b="1">
-                <a:solidFill>
-                  <a:srgbClr val="FF6B35"/>
-                </a:solidFill>
-              </a:rPr>
-              <a:t>FOOD</a:t>
-            </a:r>
-          </a:p>
-          <a:p>
-            <a:r>
-              <a:rPr sz="1100" b="1">
-                <a:solidFill>
-                  <a:srgbClr val="1A3A6E"/>
-                </a:solidFill>
-              </a:rPr>
-              <a:t>IS 14543</a:t>
-            </a:r>
-          </a:p>
-          <a:p>
-            <a:r>
-              <a:rPr sz="800">
-                <a:solidFill>
-                  <a:srgbClr val="333333"/>
-                </a:solidFill>
-              </a:rPr>
-              <a:t>Packaged Drinking Water</a:t>
-            </a:r>
-          </a:p>
-        </p:txBody>
-      </p:sp>
-      <p:sp>
-        <p:nvSpPr>
-          <p:cNvPr id="45" name="Rounded Rectangle 44"/>
-          <p:cNvSpPr/>
-          <p:nvPr/>
-        </p:nvSpPr>
-        <p:spPr>
-          <a:xfrm>
-            <a:off x="8138160" y="5532120"/>
-            <a:ext cx="1554480" cy="868680"/>
-          </a:xfrm>
-          <a:prstGeom prst="roundRect">
-            <a:avLst/>
-          </a:prstGeom>
-          <a:solidFill>
-            <a:srgbClr val="FFFFFF"/>
-          </a:solidFill>
-          <a:ln w="6350">
-            <a:solidFill>
-              <a:srgbClr val="E0E0E0"/>
-            </a:solidFill>
-          </a:ln>
-        </p:spPr>
-        <p:style>
-          <a:lnRef idx="1">
-            <a:schemeClr val="accent1"/>
-          </a:lnRef>
-          <a:fillRef idx="3">
-            <a:schemeClr val="accent1"/>
-          </a:fillRef>
-          <a:effectRef idx="2">
-            <a:schemeClr val="accent1"/>
-          </a:effectRef>
-          <a:fontRef idx="minor">
-            <a:schemeClr val="lt1"/>
-          </a:fontRef>
-        </p:style>
-        <p:txBody>
-          <a:bodyPr rtlCol="0" anchor="ctr" wrap="square" lIns="76200" tIns="50800"/>
-          <a:lstStyle/>
-          <a:p>
-            <a:pPr algn="ctr"/>
-            <a:r>
-              <a:rPr sz="700" b="1">
-                <a:solidFill>
-                  <a:srgbClr val="FF6B35"/>
-                </a:solidFill>
-              </a:rPr>
-              <a:t>ELECTRICAL</a:t>
-            </a:r>
-          </a:p>
-          <a:p>
-            <a:r>
-              <a:rPr sz="1100" b="1">
-                <a:solidFill>
-                  <a:srgbClr val="1A3A6E"/>
-                </a:solidFill>
-              </a:rPr>
-              <a:t>IS 15556</a:t>
-            </a:r>
-          </a:p>
-          <a:p>
-            <a:r>
-              <a:rPr sz="800">
-                <a:solidFill>
-                  <a:srgbClr val="333333"/>
-                </a:solidFill>
-              </a:rPr>
-              <a:t>LED Lamps</a:t>
-            </a:r>
-          </a:p>
-        </p:txBody>
-      </p:sp>
-      <p:sp>
-        <p:nvSpPr>
-          <p:cNvPr id="46" name="Rounded Rectangle 45"/>
-          <p:cNvSpPr/>
-          <p:nvPr/>
-        </p:nvSpPr>
-        <p:spPr>
-          <a:xfrm>
-            <a:off x="9875520" y="5532120"/>
-            <a:ext cx="1554480" cy="868680"/>
-          </a:xfrm>
-          <a:prstGeom prst="roundRect">
-            <a:avLst/>
-          </a:prstGeom>
-          <a:solidFill>
-            <a:srgbClr val="FFFFFF"/>
-          </a:solidFill>
-          <a:ln w="6350">
-            <a:solidFill>
-              <a:srgbClr val="E0E0E0"/>
-            </a:solidFill>
-          </a:ln>
-        </p:spPr>
-        <p:style>
-          <a:lnRef idx="1">
-            <a:schemeClr val="accent1"/>
-          </a:lnRef>
-          <a:fillRef idx="3">
-            <a:schemeClr val="accent1"/>
-          </a:fillRef>
-          <a:effectRef idx="2">
-            <a:schemeClr val="accent1"/>
-          </a:effectRef>
-          <a:fontRef idx="minor">
-            <a:schemeClr val="lt1"/>
-          </a:fontRef>
-        </p:style>
-        <p:txBody>
-          <a:bodyPr rtlCol="0" anchor="ctr" wrap="square" lIns="76200" tIns="50800"/>
-          <a:lstStyle/>
-          <a:p>
-            <a:pPr algn="ctr"/>
-            <a:r>
-              <a:rPr sz="700" b="1">
-                <a:solidFill>
-                  <a:srgbClr val="FF6B35"/>
-                </a:solidFill>
-              </a:rPr>
-              <a:t>LEATHER</a:t>
-            </a:r>
-          </a:p>
-          <a:p>
-            <a:r>
-              <a:rPr sz="1100" b="1">
-                <a:solidFill>
-                  <a:srgbClr val="1A3A6E"/>
-                </a:solidFill>
-              </a:rPr>
-              <a:t>IS 3289</a:t>
-            </a:r>
-          </a:p>
-          <a:p>
-            <a:r>
-              <a:rPr sz="800">
-                <a:solidFill>
-                  <a:srgbClr val="333333"/>
-                </a:solidFill>
-              </a:rPr>
-              <a:t>Finished Leather</a:t>
-            </a:r>
-          </a:p>
-        </p:txBody>
-      </p:sp>
+      </p:cxnSp>
     </p:spTree>
   </p:cSld>
   <p:clrMapOvr>
@@ -10038,7 +7405,7 @@
 </file>
 
 <file path=ppt/slides/slide5.xml><?xml version="1.0" encoding="utf-8"?>
-<p:sld xmlns:a="http://schemas.openxmlformats.org/drawingml/2006/main" xmlns:p="http://schemas.openxmlformats.org/presentationml/2006/main" xmlns:r="http://schemas.openxmlformats.org/officeDocument/2006/relationships">
+<p:sld xmlns:a="http://schemas.openxmlformats.org/drawingml/2006/main" xmlns:r="http://schemas.openxmlformats.org/officeDocument/2006/relationships" xmlns:p="http://schemas.openxmlformats.org/presentationml/2006/main">
   <p:cSld>
     <p:spTree>
       <p:nvGrpSpPr>
@@ -10130,7 +7497,7 @@
           </a:fontRef>
         </p:style>
         <p:txBody>
-          <a:bodyPr rtlCol="0" anchor="ctr" wrap="square"/>
+          <a:bodyPr wrap="square" rtlCol="0" anchor="ctr"/>
           <a:lstStyle/>
           <a:p>
             <a:pPr algn="ctr"/>
@@ -10142,6 +7509,11 @@
               </a:rPr>
               <a:t>Resonant</a:t>
             </a:r>
+            <a:endParaRPr sz="1800" b="1">
+              <a:solidFill>
+                <a:srgbClr val="1A3A6E"/>
+              </a:solidFill>
+            </a:endParaRPr>
           </a:p>
         </p:txBody>
       </p:sp>
@@ -10176,6 +7548,11 @@
               </a:rPr>
               <a:t>MANAKMITRA</a:t>
             </a:r>
+            <a:endParaRPr sz="2800" b="1">
+              <a:solidFill>
+                <a:srgbClr val="1A3A6E"/>
+              </a:solidFill>
+            </a:endParaRPr>
           </a:p>
         </p:txBody>
       </p:sp>
@@ -10215,7 +7592,7 @@
           </a:fontRef>
         </p:style>
         <p:txBody>
-          <a:bodyPr rtlCol="0" anchor="ctr" wrap="square"/>
+          <a:bodyPr wrap="square" rtlCol="0" anchor="ctr"/>
           <a:lstStyle/>
           <a:p>
             <a:pPr algn="ctr"/>
@@ -10227,6 +7604,11 @@
               </a:rPr>
               <a:t>SIH</a:t>
             </a:r>
+            <a:endParaRPr sz="1000" b="1">
+              <a:solidFill>
+                <a:srgbClr val="FFFFFF"/>
+              </a:solidFill>
+            </a:endParaRPr>
           </a:p>
         </p:txBody>
       </p:sp>
@@ -10262,6 +7644,11 @@
               <a:t>SMART INDIA
 HACKATHON 2026</a:t>
             </a:r>
+            <a:endParaRPr sz="1000" b="1">
+              <a:solidFill>
+                <a:srgbClr val="1A3A6E"/>
+              </a:solidFill>
+            </a:endParaRPr>
           </a:p>
         </p:txBody>
       </p:sp>
@@ -10308,122 +7695,46 @@
           </a:p>
         </p:txBody>
       </p:sp>
-      <p:sp>
-        <p:nvSpPr>
-          <p:cNvPr id="8" name="TextBox 7"/>
-          <p:cNvSpPr txBox="1"/>
-          <p:nvPr/>
-        </p:nvSpPr>
-        <p:spPr>
-          <a:xfrm>
-            <a:off x="457200" y="6583680"/>
-            <a:ext cx="3657600" cy="274320"/>
+      <p:pic>
+        <p:nvPicPr>
+          <p:cNvPr id="36" name="Picture 35"/>
+          <p:cNvPicPr>
+            <a:picLocks noChangeAspect="1"/>
+          </p:cNvPicPr>
+          <p:nvPr/>
+        </p:nvPicPr>
+        <p:blipFill>
+          <a:blip r:embed="rId1"/>
+          <a:stretch>
+            <a:fillRect/>
+          </a:stretch>
+        </p:blipFill>
+        <p:spPr>
+          <a:xfrm>
+            <a:off x="0" y="777240"/>
+            <a:ext cx="12188825" cy="6085205"/>
           </a:xfrm>
           <a:prstGeom prst="rect">
             <a:avLst/>
           </a:prstGeom>
-          <a:noFill/>
-        </p:spPr>
-        <p:txBody>
-          <a:bodyPr wrap="none">
-            <a:spAutoFit/>
-          </a:bodyPr>
-          <a:lstStyle/>
-          <a:p>
-            <a:r>
-              <a:rPr sz="900">
-                <a:solidFill>
-                  <a:srgbClr val="999999"/>
-                </a:solidFill>
-              </a:rPr>
-              <a:t>@SIH Idea submission</a:t>
-            </a:r>
-          </a:p>
-        </p:txBody>
-      </p:sp>
-      <p:sp>
-        <p:nvSpPr>
-          <p:cNvPr id="9" name="TextBox 8"/>
-          <p:cNvSpPr txBox="1"/>
-          <p:nvPr/>
-        </p:nvSpPr>
-        <p:spPr>
-          <a:xfrm>
-            <a:off x="11430000" y="6583680"/>
-            <a:ext cx="457200" cy="274320"/>
+        </p:spPr>
+      </p:pic>
+      <p:sp>
+        <p:nvSpPr>
+          <p:cNvPr id="45" name="Rectangle 44"/>
+          <p:cNvSpPr/>
+          <p:nvPr/>
+        </p:nvSpPr>
+        <p:spPr>
+          <a:xfrm flipH="1">
+            <a:off x="5820410" y="777240"/>
+            <a:ext cx="77470" cy="5497830"/>
           </a:xfrm>
           <a:prstGeom prst="rect">
             <a:avLst/>
           </a:prstGeom>
-          <a:noFill/>
-        </p:spPr>
-        <p:txBody>
-          <a:bodyPr wrap="none">
-            <a:spAutoFit/>
-          </a:bodyPr>
-          <a:lstStyle/>
-          <a:p>
-            <a:pPr algn="r"/>
-            <a:r>
-              <a:rPr sz="900">
-                <a:solidFill>
-                  <a:srgbClr val="999999"/>
-                </a:solidFill>
-              </a:rPr>
-              <a:t>5</a:t>
-            </a:r>
-          </a:p>
-        </p:txBody>
-      </p:sp>
-      <p:sp>
-        <p:nvSpPr>
-          <p:cNvPr id="10" name="TextBox 9"/>
-          <p:cNvSpPr txBox="1"/>
-          <p:nvPr/>
-        </p:nvSpPr>
-        <p:spPr>
-          <a:xfrm>
-            <a:off x="365760" y="1005840"/>
-            <a:ext cx="5486400" cy="320040"/>
-          </a:xfrm>
-          <a:prstGeom prst="rect">
-            <a:avLst/>
-          </a:prstGeom>
-          <a:noFill/>
-        </p:spPr>
-        <p:txBody>
-          <a:bodyPr wrap="none">
-            <a:spAutoFit/>
-          </a:bodyPr>
-          <a:lstStyle/>
-          <a:p>
-            <a:r>
-              <a:rPr sz="1600" b="1">
-                <a:solidFill>
-                  <a:srgbClr val="1A3A6E"/>
-                </a:solidFill>
-              </a:rPr>
-              <a:t>Impact &amp; Target Users</a:t>
-            </a:r>
-          </a:p>
-        </p:txBody>
-      </p:sp>
-      <p:sp>
-        <p:nvSpPr>
-          <p:cNvPr id="11" name="Rounded Rectangle 10"/>
-          <p:cNvSpPr/>
-          <p:nvPr/>
-        </p:nvSpPr>
-        <p:spPr>
-          <a:xfrm>
-            <a:off x="365760" y="1417320"/>
-            <a:ext cx="1737360" cy="822960"/>
-          </a:xfrm>
-          <a:prstGeom prst="roundRect">
-            <a:avLst/>
-          </a:prstGeom>
           <a:solidFill>
-            <a:srgbClr val="1A3A6E"/>
+            <a:srgbClr val="E0E0E0"/>
           </a:solidFill>
           <a:ln>
             <a:noFill/>
@@ -10448,1198 +7759,81 @@
           <a:lstStyle/>
           <a:p>
             <a:pPr algn="ctr"/>
-            <a:r>
-              <a:rPr sz="2400" b="1">
-                <a:solidFill>
-                  <a:srgbClr val="FF6B35"/>
-                </a:solidFill>
-              </a:rPr>
-              <a:t>63M+</a:t>
-            </a:r>
-          </a:p>
-          <a:p>
-            <a:pPr algn="ctr"/>
-            <a:r>
-              <a:rPr sz="900">
-                <a:solidFill>
-                  <a:srgbClr val="CCCCCC"/>
-                </a:solidFill>
-              </a:rPr>
-              <a:t>MSMEs in India</a:t>
-            </a:r>
-          </a:p>
-        </p:txBody>
-      </p:sp>
-      <p:sp>
-        <p:nvSpPr>
-          <p:cNvPr id="12" name="Rounded Rectangle 11"/>
-          <p:cNvSpPr/>
-          <p:nvPr/>
-        </p:nvSpPr>
-        <p:spPr>
-          <a:xfrm>
-            <a:off x="2286000" y="1417320"/>
-            <a:ext cx="1737360" cy="822960"/>
-          </a:xfrm>
-          <a:prstGeom prst="roundRect">
-            <a:avLst/>
-          </a:prstGeom>
-          <a:solidFill>
-            <a:srgbClr val="1A3A6E"/>
-          </a:solidFill>
-          <a:ln>
-            <a:noFill/>
-          </a:ln>
-        </p:spPr>
-        <p:style>
-          <a:lnRef idx="1">
-            <a:schemeClr val="accent1"/>
-          </a:lnRef>
-          <a:fillRef idx="3">
-            <a:schemeClr val="accent1"/>
-          </a:fillRef>
-          <a:effectRef idx="2">
-            <a:schemeClr val="accent1"/>
-          </a:effectRef>
-          <a:fontRef idx="minor">
-            <a:schemeClr val="lt1"/>
-          </a:fontRef>
-        </p:style>
-        <p:txBody>
-          <a:bodyPr rtlCol="0" anchor="ctr"/>
-          <a:lstStyle/>
-          <a:p>
-            <a:pPr algn="ctr"/>
-            <a:r>
-              <a:rPr sz="2400" b="1">
-                <a:solidFill>
-                  <a:srgbClr val="FF6B35"/>
-                </a:solidFill>
-              </a:rPr>
-              <a:t>28K+</a:t>
-            </a:r>
-          </a:p>
-          <a:p>
-            <a:pPr algn="ctr"/>
-            <a:r>
-              <a:rPr sz="900">
-                <a:solidFill>
-                  <a:srgbClr val="CCCCCC"/>
-                </a:solidFill>
-              </a:rPr>
-              <a:t>BIS Standards</a:t>
-            </a:r>
-          </a:p>
-        </p:txBody>
-      </p:sp>
-      <p:sp>
-        <p:nvSpPr>
-          <p:cNvPr id="13" name="Rounded Rectangle 12"/>
-          <p:cNvSpPr/>
-          <p:nvPr/>
-        </p:nvSpPr>
-        <p:spPr>
-          <a:xfrm>
-            <a:off x="4206240" y="1417320"/>
-            <a:ext cx="1737360" cy="822960"/>
-          </a:xfrm>
-          <a:prstGeom prst="roundRect">
-            <a:avLst/>
-          </a:prstGeom>
-          <a:solidFill>
-            <a:srgbClr val="1A3A6E"/>
-          </a:solidFill>
-          <a:ln>
-            <a:noFill/>
-          </a:ln>
-        </p:spPr>
-        <p:style>
-          <a:lnRef idx="1">
-            <a:schemeClr val="accent1"/>
-          </a:lnRef>
-          <a:fillRef idx="3">
-            <a:schemeClr val="accent1"/>
-          </a:fillRef>
-          <a:effectRef idx="2">
-            <a:schemeClr val="accent1"/>
-          </a:effectRef>
-          <a:fontRef idx="minor">
-            <a:schemeClr val="lt1"/>
-          </a:fontRef>
-        </p:style>
-        <p:txBody>
-          <a:bodyPr rtlCol="0" anchor="ctr"/>
-          <a:lstStyle/>
-          <a:p>
-            <a:pPr algn="ctr"/>
-            <a:r>
-              <a:rPr sz="2400" b="1">
-                <a:solidFill>
-                  <a:srgbClr val="FF6B35"/>
-                </a:solidFill>
-              </a:rPr>
-              <a:t>₹2.5L Cr</a:t>
-            </a:r>
-          </a:p>
-          <a:p>
-            <a:pPr algn="ctr"/>
-            <a:r>
-              <a:rPr sz="900">
-                <a:solidFill>
-                  <a:srgbClr val="CCCCCC"/>
-                </a:solidFill>
-              </a:rPr>
-              <a:t>Compliance Market</a:t>
-            </a:r>
-          </a:p>
-        </p:txBody>
-      </p:sp>
-      <p:sp>
-        <p:nvSpPr>
-          <p:cNvPr id="14" name="TextBox 13"/>
-          <p:cNvSpPr txBox="1"/>
-          <p:nvPr/>
-        </p:nvSpPr>
-        <p:spPr>
-          <a:xfrm>
-            <a:off x="365760" y="2377440"/>
-            <a:ext cx="3657600" cy="320040"/>
+          </a:p>
+        </p:txBody>
+      </p:sp>
+      <p:pic>
+        <p:nvPicPr>
+          <p:cNvPr id="37" name="Picture 36"/>
+          <p:cNvPicPr>
+            <a:picLocks noChangeAspect="1"/>
+          </p:cNvPicPr>
+          <p:nvPr/>
+        </p:nvPicPr>
+        <p:blipFill>
+          <a:blip r:embed="rId2"/>
+          <a:stretch>
+            <a:fillRect/>
+          </a:stretch>
+        </p:blipFill>
+        <p:spPr>
+          <a:xfrm>
+            <a:off x="185420" y="1267460"/>
+            <a:ext cx="5349875" cy="4323080"/>
           </a:xfrm>
           <a:prstGeom prst="rect">
             <a:avLst/>
           </a:prstGeom>
-          <a:noFill/>
-        </p:spPr>
-        <p:txBody>
-          <a:bodyPr wrap="none">
-            <a:spAutoFit/>
-          </a:bodyPr>
-          <a:lstStyle/>
-          <a:p>
-            <a:r>
-              <a:rPr sz="1300" b="1">
-                <a:solidFill>
-                  <a:srgbClr val="1A3A6E"/>
-                </a:solidFill>
-              </a:rPr>
-              <a:t>Who Benefits?</a:t>
-            </a:r>
-          </a:p>
-        </p:txBody>
-      </p:sp>
-      <p:sp>
-        <p:nvSpPr>
-          <p:cNvPr id="15" name="Rounded Rectangle 14"/>
-          <p:cNvSpPr/>
-          <p:nvPr/>
-        </p:nvSpPr>
-        <p:spPr>
-          <a:xfrm>
-            <a:off x="365760" y="2697480"/>
-            <a:ext cx="2560320" cy="777240"/>
-          </a:xfrm>
-          <a:prstGeom prst="roundRect">
-            <a:avLst/>
-          </a:prstGeom>
-          <a:solidFill>
-            <a:srgbClr val="FFFFFF"/>
-          </a:solidFill>
-          <a:ln w="12700">
-            <a:solidFill>
-              <a:srgbClr val="E0E0E0"/>
-            </a:solidFill>
-          </a:ln>
-        </p:spPr>
-        <p:style>
-          <a:lnRef idx="1">
-            <a:schemeClr val="accent1"/>
-          </a:lnRef>
-          <a:fillRef idx="3">
-            <a:schemeClr val="accent1"/>
-          </a:fillRef>
-          <a:effectRef idx="2">
-            <a:schemeClr val="accent1"/>
-          </a:effectRef>
-          <a:fontRef idx="minor">
-            <a:schemeClr val="lt1"/>
-          </a:fontRef>
-        </p:style>
-        <p:txBody>
-          <a:bodyPr rtlCol="0" anchor="ctr"/>
-          <a:lstStyle/>
-          <a:p>
-            <a:pPr algn="ctr"/>
-          </a:p>
-        </p:txBody>
-      </p:sp>
-      <p:sp>
-        <p:nvSpPr>
-          <p:cNvPr id="16" name="TextBox 15"/>
-          <p:cNvSpPr txBox="1"/>
-          <p:nvPr/>
-        </p:nvSpPr>
-        <p:spPr>
-          <a:xfrm>
-            <a:off x="457200" y="2807208"/>
-            <a:ext cx="365760" cy="365760"/>
+        </p:spPr>
+      </p:pic>
+      <p:pic>
+        <p:nvPicPr>
+          <p:cNvPr id="38" name="Picture 37"/>
+          <p:cNvPicPr>
+            <a:picLocks noChangeAspect="1"/>
+          </p:cNvPicPr>
+          <p:nvPr/>
+        </p:nvPicPr>
+        <p:blipFill>
+          <a:blip r:embed="rId3"/>
+          <a:stretch>
+            <a:fillRect/>
+          </a:stretch>
+        </p:blipFill>
+        <p:spPr>
+          <a:xfrm>
+            <a:off x="5897880" y="777240"/>
+            <a:ext cx="6210935" cy="3110865"/>
           </a:xfrm>
           <a:prstGeom prst="rect">
             <a:avLst/>
           </a:prstGeom>
-          <a:noFill/>
-        </p:spPr>
-        <p:txBody>
-          <a:bodyPr wrap="none">
-            <a:spAutoFit/>
-          </a:bodyPr>
-          <a:lstStyle/>
-          <a:p>
-            <a:r>
-              <a:rPr sz="2000"/>
-              <a:t>🏭</a:t>
-            </a:r>
-          </a:p>
-        </p:txBody>
-      </p:sp>
-      <p:sp>
-        <p:nvSpPr>
-          <p:cNvPr id="17" name="TextBox 16"/>
-          <p:cNvSpPr txBox="1"/>
-          <p:nvPr/>
-        </p:nvSpPr>
-        <p:spPr>
-          <a:xfrm>
-            <a:off x="868680" y="2770632"/>
-            <a:ext cx="1920240" cy="640080"/>
+        </p:spPr>
+      </p:pic>
+      <p:pic>
+        <p:nvPicPr>
+          <p:cNvPr id="39" name="Picture 38"/>
+          <p:cNvPicPr>
+            <a:picLocks noChangeAspect="1"/>
+          </p:cNvPicPr>
+          <p:nvPr/>
+        </p:nvPicPr>
+        <p:blipFill>
+          <a:blip r:embed="rId4"/>
+          <a:stretch>
+            <a:fillRect/>
+          </a:stretch>
+        </p:blipFill>
+        <p:spPr>
+          <a:xfrm>
+            <a:off x="6094730" y="3600450"/>
+            <a:ext cx="5814060" cy="2308860"/>
           </a:xfrm>
           <a:prstGeom prst="rect">
             <a:avLst/>
           </a:prstGeom>
-          <a:noFill/>
-        </p:spPr>
-        <p:txBody>
-          <a:bodyPr wrap="square">
-            <a:spAutoFit/>
-          </a:bodyPr>
-          <a:lstStyle/>
-          <a:p>
-            <a:r>
-              <a:rPr sz="1000" b="1">
-                <a:solidFill>
-                  <a:srgbClr val="1A3A6E"/>
-                </a:solidFill>
-              </a:rPr>
-              <a:t>MSMEs &amp; Manufacturers</a:t>
-            </a:r>
-          </a:p>
-          <a:p>
-            <a:r>
-              <a:rPr sz="900">
-                <a:solidFill>
-                  <a:srgbClr val="333333"/>
-                </a:solidFill>
-              </a:rPr>
-              <a:t>Quick standards + certification answers</a:t>
-            </a:r>
-          </a:p>
-        </p:txBody>
-      </p:sp>
-      <p:sp>
-        <p:nvSpPr>
-          <p:cNvPr id="18" name="Rounded Rectangle 17"/>
-          <p:cNvSpPr/>
-          <p:nvPr/>
-        </p:nvSpPr>
-        <p:spPr>
-          <a:xfrm>
-            <a:off x="3108960" y="2697480"/>
-            <a:ext cx="2560320" cy="777240"/>
-          </a:xfrm>
-          <a:prstGeom prst="roundRect">
-            <a:avLst/>
-          </a:prstGeom>
-          <a:solidFill>
-            <a:srgbClr val="FFFFFF"/>
-          </a:solidFill>
-          <a:ln w="12700">
-            <a:solidFill>
-              <a:srgbClr val="E0E0E0"/>
-            </a:solidFill>
-          </a:ln>
-        </p:spPr>
-        <p:style>
-          <a:lnRef idx="1">
-            <a:schemeClr val="accent1"/>
-          </a:lnRef>
-          <a:fillRef idx="3">
-            <a:schemeClr val="accent1"/>
-          </a:fillRef>
-          <a:effectRef idx="2">
-            <a:schemeClr val="accent1"/>
-          </a:effectRef>
-          <a:fontRef idx="minor">
-            <a:schemeClr val="lt1"/>
-          </a:fontRef>
-        </p:style>
-        <p:txBody>
-          <a:bodyPr rtlCol="0" anchor="ctr"/>
-          <a:lstStyle/>
-          <a:p>
-            <a:pPr algn="ctr"/>
-          </a:p>
-        </p:txBody>
-      </p:sp>
-      <p:sp>
-        <p:nvSpPr>
-          <p:cNvPr id="19" name="TextBox 18"/>
-          <p:cNvSpPr txBox="1"/>
-          <p:nvPr/>
-        </p:nvSpPr>
-        <p:spPr>
-          <a:xfrm>
-            <a:off x="3200400" y="2807208"/>
-            <a:ext cx="365760" cy="365760"/>
-          </a:xfrm>
-          <a:prstGeom prst="rect">
-            <a:avLst/>
-          </a:prstGeom>
-          <a:noFill/>
-        </p:spPr>
-        <p:txBody>
-          <a:bodyPr wrap="none">
-            <a:spAutoFit/>
-          </a:bodyPr>
-          <a:lstStyle/>
-          <a:p>
-            <a:r>
-              <a:rPr sz="2000"/>
-              <a:t>🏗️</a:t>
-            </a:r>
-          </a:p>
-        </p:txBody>
-      </p:sp>
-      <p:sp>
-        <p:nvSpPr>
-          <p:cNvPr id="20" name="TextBox 19"/>
-          <p:cNvSpPr txBox="1"/>
-          <p:nvPr/>
-        </p:nvSpPr>
-        <p:spPr>
-          <a:xfrm>
-            <a:off x="3611880" y="2770632"/>
-            <a:ext cx="1920240" cy="640080"/>
-          </a:xfrm>
-          <a:prstGeom prst="rect">
-            <a:avLst/>
-          </a:prstGeom>
-          <a:noFill/>
-        </p:spPr>
-        <p:txBody>
-          <a:bodyPr wrap="square">
-            <a:spAutoFit/>
-          </a:bodyPr>
-          <a:lstStyle/>
-          <a:p>
-            <a:r>
-              <a:rPr sz="1000" b="1">
-                <a:solidFill>
-                  <a:srgbClr val="1A3A6E"/>
-                </a:solidFill>
-              </a:rPr>
-              <a:t>Construction Companies</a:t>
-            </a:r>
-          </a:p>
-          <a:p>
-            <a:r>
-              <a:rPr sz="900">
-                <a:solidFill>
-                  <a:srgbClr val="333333"/>
-                </a:solidFill>
-              </a:rPr>
-              <a:t>Steel, cement compliance guidance</a:t>
-            </a:r>
-          </a:p>
-        </p:txBody>
-      </p:sp>
-      <p:sp>
-        <p:nvSpPr>
-          <p:cNvPr id="21" name="Rounded Rectangle 20"/>
-          <p:cNvSpPr/>
-          <p:nvPr/>
-        </p:nvSpPr>
-        <p:spPr>
-          <a:xfrm>
-            <a:off x="365760" y="3611880"/>
-            <a:ext cx="2560320" cy="777240"/>
-          </a:xfrm>
-          <a:prstGeom prst="roundRect">
-            <a:avLst/>
-          </a:prstGeom>
-          <a:solidFill>
-            <a:srgbClr val="FFFFFF"/>
-          </a:solidFill>
-          <a:ln w="12700">
-            <a:solidFill>
-              <a:srgbClr val="E0E0E0"/>
-            </a:solidFill>
-          </a:ln>
-        </p:spPr>
-        <p:style>
-          <a:lnRef idx="1">
-            <a:schemeClr val="accent1"/>
-          </a:lnRef>
-          <a:fillRef idx="3">
-            <a:schemeClr val="accent1"/>
-          </a:fillRef>
-          <a:effectRef idx="2">
-            <a:schemeClr val="accent1"/>
-          </a:effectRef>
-          <a:fontRef idx="minor">
-            <a:schemeClr val="lt1"/>
-          </a:fontRef>
-        </p:style>
-        <p:txBody>
-          <a:bodyPr rtlCol="0" anchor="ctr"/>
-          <a:lstStyle/>
-          <a:p>
-            <a:pPr algn="ctr"/>
-          </a:p>
-        </p:txBody>
-      </p:sp>
-      <p:sp>
-        <p:nvSpPr>
-          <p:cNvPr id="22" name="TextBox 21"/>
-          <p:cNvSpPr txBox="1"/>
-          <p:nvPr/>
-        </p:nvSpPr>
-        <p:spPr>
-          <a:xfrm>
-            <a:off x="457200" y="3721608"/>
-            <a:ext cx="365760" cy="365760"/>
-          </a:xfrm>
-          <a:prstGeom prst="rect">
-            <a:avLst/>
-          </a:prstGeom>
-          <a:noFill/>
-        </p:spPr>
-        <p:txBody>
-          <a:bodyPr wrap="none">
-            <a:spAutoFit/>
-          </a:bodyPr>
-          <a:lstStyle/>
-          <a:p>
-            <a:r>
-              <a:rPr sz="2000"/>
-              <a:t>🔬</a:t>
-            </a:r>
-          </a:p>
-        </p:txBody>
-      </p:sp>
-      <p:sp>
-        <p:nvSpPr>
-          <p:cNvPr id="23" name="TextBox 22"/>
-          <p:cNvSpPr txBox="1"/>
-          <p:nvPr/>
-        </p:nvSpPr>
-        <p:spPr>
-          <a:xfrm>
-            <a:off x="868680" y="3685032"/>
-            <a:ext cx="1920240" cy="640080"/>
-          </a:xfrm>
-          <a:prstGeom prst="rect">
-            <a:avLst/>
-          </a:prstGeom>
-          <a:noFill/>
-        </p:spPr>
-        <p:txBody>
-          <a:bodyPr wrap="square">
-            <a:spAutoFit/>
-          </a:bodyPr>
-          <a:lstStyle/>
-          <a:p>
-            <a:r>
-              <a:rPr sz="1000" b="1">
-                <a:solidFill>
-                  <a:srgbClr val="1A3A6E"/>
-                </a:solidFill>
-              </a:rPr>
-              <a:t>Testing Labs</a:t>
-            </a:r>
-          </a:p>
-          <a:p>
-            <a:r>
-              <a:rPr sz="900">
-                <a:solidFill>
-                  <a:srgbClr val="333333"/>
-                </a:solidFill>
-              </a:rPr>
-              <a:t>Reference standards for procedures</a:t>
-            </a:r>
-          </a:p>
-        </p:txBody>
-      </p:sp>
-      <p:sp>
-        <p:nvSpPr>
-          <p:cNvPr id="24" name="Rounded Rectangle 23"/>
-          <p:cNvSpPr/>
-          <p:nvPr/>
-        </p:nvSpPr>
-        <p:spPr>
-          <a:xfrm>
-            <a:off x="3108960" y="3611880"/>
-            <a:ext cx="2560320" cy="777240"/>
-          </a:xfrm>
-          <a:prstGeom prst="roundRect">
-            <a:avLst/>
-          </a:prstGeom>
-          <a:solidFill>
-            <a:srgbClr val="FFFFFF"/>
-          </a:solidFill>
-          <a:ln w="12700">
-            <a:solidFill>
-              <a:srgbClr val="E0E0E0"/>
-            </a:solidFill>
-          </a:ln>
-        </p:spPr>
-        <p:style>
-          <a:lnRef idx="1">
-            <a:schemeClr val="accent1"/>
-          </a:lnRef>
-          <a:fillRef idx="3">
-            <a:schemeClr val="accent1"/>
-          </a:fillRef>
-          <a:effectRef idx="2">
-            <a:schemeClr val="accent1"/>
-          </a:effectRef>
-          <a:fontRef idx="minor">
-            <a:schemeClr val="lt1"/>
-          </a:fontRef>
-        </p:style>
-        <p:txBody>
-          <a:bodyPr rtlCol="0" anchor="ctr"/>
-          <a:lstStyle/>
-          <a:p>
-            <a:pPr algn="ctr"/>
-          </a:p>
-        </p:txBody>
-      </p:sp>
-      <p:sp>
-        <p:nvSpPr>
-          <p:cNvPr id="25" name="TextBox 24"/>
-          <p:cNvSpPr txBox="1"/>
-          <p:nvPr/>
-        </p:nvSpPr>
-        <p:spPr>
-          <a:xfrm>
-            <a:off x="3200400" y="3721608"/>
-            <a:ext cx="365760" cy="365760"/>
-          </a:xfrm>
-          <a:prstGeom prst="rect">
-            <a:avLst/>
-          </a:prstGeom>
-          <a:noFill/>
-        </p:spPr>
-        <p:txBody>
-          <a:bodyPr wrap="none">
-            <a:spAutoFit/>
-          </a:bodyPr>
-          <a:lstStyle/>
-          <a:p>
-            <a:r>
-              <a:rPr sz="2000"/>
-              <a:t>👩‍💼</a:t>
-            </a:r>
-          </a:p>
-        </p:txBody>
-      </p:sp>
-      <p:sp>
-        <p:nvSpPr>
-          <p:cNvPr id="26" name="TextBox 25"/>
-          <p:cNvSpPr txBox="1"/>
-          <p:nvPr/>
-        </p:nvSpPr>
-        <p:spPr>
-          <a:xfrm>
-            <a:off x="3611880" y="3685032"/>
-            <a:ext cx="1920240" cy="640080"/>
-          </a:xfrm>
-          <a:prstGeom prst="rect">
-            <a:avLst/>
-          </a:prstGeom>
-          <a:noFill/>
-        </p:spPr>
-        <p:txBody>
-          <a:bodyPr wrap="square">
-            <a:spAutoFit/>
-          </a:bodyPr>
-          <a:lstStyle/>
-          <a:p>
-            <a:r>
-              <a:rPr sz="1000" b="1">
-                <a:solidFill>
-                  <a:srgbClr val="1A3A6E"/>
-                </a:solidFill>
-              </a:rPr>
-              <a:t>Quality Managers</a:t>
-            </a:r>
-          </a:p>
-          <a:p>
-            <a:r>
-              <a:rPr sz="900">
-                <a:solidFill>
-                  <a:srgbClr val="333333"/>
-                </a:solidFill>
-              </a:rPr>
-              <a:t>Stay updated via auto-fetch</a:t>
-            </a:r>
-          </a:p>
-        </p:txBody>
-      </p:sp>
-      <p:sp>
-        <p:nvSpPr>
-          <p:cNvPr id="27" name="TextBox 26"/>
-          <p:cNvSpPr txBox="1"/>
-          <p:nvPr/>
-        </p:nvSpPr>
-        <p:spPr>
-          <a:xfrm>
-            <a:off x="6400800" y="1005840"/>
-            <a:ext cx="5486400" cy="320040"/>
-          </a:xfrm>
-          <a:prstGeom prst="rect">
-            <a:avLst/>
-          </a:prstGeom>
-          <a:noFill/>
-        </p:spPr>
-        <p:txBody>
-          <a:bodyPr wrap="none">
-            <a:spAutoFit/>
-          </a:bodyPr>
-          <a:lstStyle/>
-          <a:p>
-            <a:r>
-              <a:rPr sz="1600" b="1">
-                <a:solidFill>
-                  <a:srgbClr val="1A3A6E"/>
-                </a:solidFill>
-              </a:rPr>
-              <a:t>Development Roadmap</a:t>
-            </a:r>
-          </a:p>
-        </p:txBody>
-      </p:sp>
-      <p:sp>
-        <p:nvSpPr>
-          <p:cNvPr id="28" name="Rounded Rectangle 27"/>
-          <p:cNvSpPr/>
-          <p:nvPr/>
-        </p:nvSpPr>
-        <p:spPr>
-          <a:xfrm>
-            <a:off x="6400800" y="1417320"/>
-            <a:ext cx="1005840" cy="274320"/>
-          </a:xfrm>
-          <a:prstGeom prst="roundRect">
-            <a:avLst/>
-          </a:prstGeom>
-          <a:solidFill>
-            <a:srgbClr val="4CAF50"/>
-          </a:solidFill>
-          <a:ln>
-            <a:noFill/>
-          </a:ln>
-        </p:spPr>
-        <p:style>
-          <a:lnRef idx="1">
-            <a:schemeClr val="accent1"/>
-          </a:lnRef>
-          <a:fillRef idx="3">
-            <a:schemeClr val="accent1"/>
-          </a:fillRef>
-          <a:effectRef idx="2">
-            <a:schemeClr val="accent1"/>
-          </a:effectRef>
-          <a:fontRef idx="minor">
-            <a:schemeClr val="lt1"/>
-          </a:fontRef>
-        </p:style>
-        <p:txBody>
-          <a:bodyPr rtlCol="0" anchor="ctr"/>
-          <a:lstStyle/>
-          <a:p>
-            <a:pPr algn="ctr"/>
-            <a:r>
-              <a:rPr sz="800" b="1">
-                <a:solidFill>
-                  <a:srgbClr val="FFFFFF"/>
-                </a:solidFill>
-              </a:rPr>
-              <a:t>✓ DONE</a:t>
-            </a:r>
-          </a:p>
-        </p:txBody>
-      </p:sp>
-      <p:sp>
-        <p:nvSpPr>
-          <p:cNvPr id="29" name="TextBox 28"/>
-          <p:cNvSpPr txBox="1"/>
-          <p:nvPr/>
-        </p:nvSpPr>
-        <p:spPr>
-          <a:xfrm>
-            <a:off x="7498079" y="1399032"/>
-            <a:ext cx="4206240" cy="685800"/>
-          </a:xfrm>
-          <a:prstGeom prst="rect">
-            <a:avLst/>
-          </a:prstGeom>
-          <a:noFill/>
-        </p:spPr>
-        <p:txBody>
-          <a:bodyPr wrap="square">
-            <a:spAutoFit/>
-          </a:bodyPr>
-          <a:lstStyle/>
-          <a:p>
-            <a:r>
-              <a:rPr sz="1100" b="1">
-                <a:solidFill>
-                  <a:srgbClr val="1A3A6E"/>
-                </a:solidFill>
-              </a:rPr>
-              <a:t>MVP — Working Prototype</a:t>
-            </a:r>
-          </a:p>
-          <a:p>
-            <a:r>
-              <a:rPr sz="900">
-                <a:solidFill>
-                  <a:srgbClr val="333333"/>
-                </a:solidFill>
-              </a:rPr>
-              <a:t>28 standards, 22 languages, RAG, auth, 6-section responses, BIS finder, cert guides</a:t>
-            </a:r>
-          </a:p>
-        </p:txBody>
-      </p:sp>
-      <p:sp>
-        <p:nvSpPr>
-          <p:cNvPr id="30" name="Rounded Rectangle 29"/>
-          <p:cNvSpPr/>
-          <p:nvPr/>
-        </p:nvSpPr>
-        <p:spPr>
-          <a:xfrm>
-            <a:off x="6400800" y="2194560"/>
-            <a:ext cx="1005840" cy="274320"/>
-          </a:xfrm>
-          <a:prstGeom prst="roundRect">
-            <a:avLst/>
-          </a:prstGeom>
-          <a:solidFill>
-            <a:srgbClr val="FF9800"/>
-          </a:solidFill>
-          <a:ln>
-            <a:noFill/>
-          </a:ln>
-        </p:spPr>
-        <p:style>
-          <a:lnRef idx="1">
-            <a:schemeClr val="accent1"/>
-          </a:lnRef>
-          <a:fillRef idx="3">
-            <a:schemeClr val="accent1"/>
-          </a:fillRef>
-          <a:effectRef idx="2">
-            <a:schemeClr val="accent1"/>
-          </a:effectRef>
-          <a:fontRef idx="minor">
-            <a:schemeClr val="lt1"/>
-          </a:fontRef>
-        </p:style>
-        <p:txBody>
-          <a:bodyPr rtlCol="0" anchor="ctr"/>
-          <a:lstStyle/>
-          <a:p>
-            <a:pPr algn="ctr"/>
-            <a:r>
-              <a:rPr sz="800" b="1">
-                <a:solidFill>
-                  <a:srgbClr val="FFFFFF"/>
-                </a:solidFill>
-              </a:rPr>
-              <a:t>NOW</a:t>
-            </a:r>
-          </a:p>
-        </p:txBody>
-      </p:sp>
-      <p:sp>
-        <p:nvSpPr>
-          <p:cNvPr id="31" name="TextBox 30"/>
-          <p:cNvSpPr txBox="1"/>
-          <p:nvPr/>
-        </p:nvSpPr>
-        <p:spPr>
-          <a:xfrm>
-            <a:off x="7498079" y="2176272"/>
-            <a:ext cx="4206240" cy="685800"/>
-          </a:xfrm>
-          <a:prstGeom prst="rect">
-            <a:avLst/>
-          </a:prstGeom>
-          <a:noFill/>
-        </p:spPr>
-        <p:txBody>
-          <a:bodyPr wrap="square">
-            <a:spAutoFit/>
-          </a:bodyPr>
-          <a:lstStyle/>
-          <a:p>
-            <a:r>
-              <a:rPr sz="1100" b="1">
-                <a:solidFill>
-                  <a:srgbClr val="1A3A6E"/>
-                </a:solidFill>
-              </a:rPr>
-              <a:t>Scale — Full BIS Coverage</a:t>
-            </a:r>
-          </a:p>
-          <a:p>
-            <a:r>
-              <a:rPr sz="900">
-                <a:solidFill>
-                  <a:srgbClr val="333333"/>
-                </a:solidFill>
-              </a:rPr>
-              <a:t>Index all 28,000+ standards, PDF viewer, WhatsApp bot</a:t>
-            </a:r>
-          </a:p>
-        </p:txBody>
-      </p:sp>
-      <p:sp>
-        <p:nvSpPr>
-          <p:cNvPr id="32" name="Rounded Rectangle 31"/>
-          <p:cNvSpPr/>
-          <p:nvPr/>
-        </p:nvSpPr>
-        <p:spPr>
-          <a:xfrm>
-            <a:off x="6400800" y="2971800"/>
-            <a:ext cx="1005840" cy="274320"/>
-          </a:xfrm>
-          <a:prstGeom prst="roundRect">
-            <a:avLst/>
-          </a:prstGeom>
-          <a:solidFill>
-            <a:srgbClr val="999999"/>
-          </a:solidFill>
-          <a:ln>
-            <a:noFill/>
-          </a:ln>
-        </p:spPr>
-        <p:style>
-          <a:lnRef idx="1">
-            <a:schemeClr val="accent1"/>
-          </a:lnRef>
-          <a:fillRef idx="3">
-            <a:schemeClr val="accent1"/>
-          </a:fillRef>
-          <a:effectRef idx="2">
-            <a:schemeClr val="accent1"/>
-          </a:effectRef>
-          <a:fontRef idx="minor">
-            <a:schemeClr val="lt1"/>
-          </a:fontRef>
-        </p:style>
-        <p:txBody>
-          <a:bodyPr rtlCol="0" anchor="ctr"/>
-          <a:lstStyle/>
-          <a:p>
-            <a:pPr algn="ctr"/>
-            <a:r>
-              <a:rPr sz="800" b="1">
-                <a:solidFill>
-                  <a:srgbClr val="FFFFFF"/>
-                </a:solidFill>
-              </a:rPr>
-              <a:t>FUTURE</a:t>
-            </a:r>
-          </a:p>
-        </p:txBody>
-      </p:sp>
-      <p:sp>
-        <p:nvSpPr>
-          <p:cNvPr id="33" name="TextBox 32"/>
-          <p:cNvSpPr txBox="1"/>
-          <p:nvPr/>
-        </p:nvSpPr>
-        <p:spPr>
-          <a:xfrm>
-            <a:off x="7498079" y="2953512"/>
-            <a:ext cx="4206240" cy="685800"/>
-          </a:xfrm>
-          <a:prstGeom prst="rect">
-            <a:avLst/>
-          </a:prstGeom>
-          <a:noFill/>
-        </p:spPr>
-        <p:txBody>
-          <a:bodyPr wrap="square">
-            <a:spAutoFit/>
-          </a:bodyPr>
-          <a:lstStyle/>
-          <a:p>
-            <a:r>
-              <a:rPr sz="1100" b="1">
-                <a:solidFill>
-                  <a:srgbClr val="1A3A6E"/>
-                </a:solidFill>
-              </a:rPr>
-              <a:t>Production — Enterprise</a:t>
-            </a:r>
-          </a:p>
-          <a:p>
-            <a:r>
-              <a:rPr sz="900">
-                <a:solidFill>
-                  <a:srgbClr val="333333"/>
-                </a:solidFill>
-              </a:rPr>
-              <a:t>PostgreSQL + Redis, mobile app, voice, BIS integration, SaaS</a:t>
-            </a:r>
-          </a:p>
-        </p:txBody>
-      </p:sp>
-      <p:sp>
-        <p:nvSpPr>
-          <p:cNvPr id="34" name="TextBox 33"/>
-          <p:cNvSpPr txBox="1"/>
-          <p:nvPr/>
-        </p:nvSpPr>
-        <p:spPr>
-          <a:xfrm>
-            <a:off x="365760" y="4663440"/>
-            <a:ext cx="5486400" cy="320040"/>
-          </a:xfrm>
-          <a:prstGeom prst="rect">
-            <a:avLst/>
-          </a:prstGeom>
-          <a:noFill/>
-        </p:spPr>
-        <p:txBody>
-          <a:bodyPr wrap="none">
-            <a:spAutoFit/>
-          </a:bodyPr>
-          <a:lstStyle/>
-          <a:p>
-            <a:r>
-              <a:rPr sz="1300" b="1">
-                <a:solidFill>
-                  <a:srgbClr val="1A3A6E"/>
-                </a:solidFill>
-              </a:rPr>
-              <a:t>Business Model &amp; Monetization</a:t>
-            </a:r>
-          </a:p>
-        </p:txBody>
-      </p:sp>
-      <p:sp>
-        <p:nvSpPr>
-          <p:cNvPr id="35" name="Rounded Rectangle 34"/>
-          <p:cNvSpPr/>
-          <p:nvPr/>
-        </p:nvSpPr>
-        <p:spPr>
-          <a:xfrm>
-            <a:off x="365760" y="4983480"/>
-            <a:ext cx="11338560" cy="1417320"/>
-          </a:xfrm>
-          <a:prstGeom prst="roundRect">
-            <a:avLst/>
-          </a:prstGeom>
-          <a:solidFill>
-            <a:srgbClr val="F5F5F5"/>
-          </a:solidFill>
-          <a:ln w="12700">
-            <a:solidFill>
-              <a:srgbClr val="1A3A6E"/>
-            </a:solidFill>
-          </a:ln>
-        </p:spPr>
-        <p:style>
-          <a:lnRef idx="1">
-            <a:schemeClr val="accent1"/>
-          </a:lnRef>
-          <a:fillRef idx="3">
-            <a:schemeClr val="accent1"/>
-          </a:fillRef>
-          <a:effectRef idx="2">
-            <a:schemeClr val="accent1"/>
-          </a:effectRef>
-          <a:fontRef idx="minor">
-            <a:schemeClr val="lt1"/>
-          </a:fontRef>
-        </p:style>
-        <p:txBody>
-          <a:bodyPr rtlCol="0" anchor="ctr" wrap="square" lIns="127000" tIns="76200"/>
-          <a:lstStyle/>
-          <a:p>
-            <a:pPr algn="ctr">
-              <a:spcAft>
-                <a:spcPts val="200"/>
-              </a:spcAft>
-            </a:pPr>
-            <a:r>
-              <a:rPr sz="1000">
-                <a:solidFill>
-                  <a:srgbClr val="FF6B35"/>
-                </a:solidFill>
-              </a:rPr>
-              <a:t>✦ </a:t>
-            </a:r>
-            <a:r>
-              <a:rPr sz="1000" b="1">
-                <a:solidFill>
-                  <a:srgbClr val="1A3A6E"/>
-                </a:solidFill>
-              </a:rPr>
-              <a:t>Free Tier:</a:t>
-            </a:r>
-            <a:r>
-              <a:rPr sz="1000">
-                <a:solidFill>
-                  <a:srgbClr val="333333"/>
-                </a:solidFill>
-              </a:rPr>
-              <a:t> 10 queries/day for individual users — basic compliance questions</a:t>
-            </a:r>
-          </a:p>
-          <a:p>
-            <a:pPr>
-              <a:spcAft>
-                <a:spcPts val="200"/>
-              </a:spcAft>
-            </a:pPr>
-            <a:r>
-              <a:rPr sz="1000">
-                <a:solidFill>
-                  <a:srgbClr val="FF6B35"/>
-                </a:solidFill>
-              </a:rPr>
-              <a:t>✦ </a:t>
-            </a:r>
-            <a:r>
-              <a:rPr sz="1000" b="1">
-                <a:solidFill>
-                  <a:srgbClr val="1A3A6E"/>
-                </a:solidFill>
-              </a:rPr>
-              <a:t>MSME Plan (₹499/mo):</a:t>
-            </a:r>
-            <a:r>
-              <a:rPr sz="1000">
-                <a:solidFill>
-                  <a:srgbClr val="333333"/>
-                </a:solidFill>
-              </a:rPr>
-              <a:t> Unlimited queries + compliance calendar + document generator</a:t>
-            </a:r>
-          </a:p>
-          <a:p>
-            <a:pPr>
-              <a:spcAft>
-                <a:spcPts val="200"/>
-              </a:spcAft>
-            </a:pPr>
-            <a:r>
-              <a:rPr sz="1000">
-                <a:solidFill>
-                  <a:srgbClr val="FF6B35"/>
-                </a:solidFill>
-              </a:rPr>
-              <a:t>✦ </a:t>
-            </a:r>
-            <a:r>
-              <a:rPr sz="1000" b="1">
-                <a:solidFill>
-                  <a:srgbClr val="1A3A6E"/>
-                </a:solidFill>
-              </a:rPr>
-              <a:t>Enterprise (₹4,999/mo):</a:t>
-            </a:r>
-            <a:r>
-              <a:rPr sz="1000">
-                <a:solidFill>
-                  <a:srgbClr val="333333"/>
-                </a:solidFill>
-              </a:rPr>
-              <a:t> API access + bulk standard check + dedicated support</a:t>
-            </a:r>
-          </a:p>
-          <a:p>
-            <a:pPr>
-              <a:spcAft>
-                <a:spcPts val="200"/>
-              </a:spcAft>
-            </a:pPr>
-            <a:r>
-              <a:rPr sz="1000">
-                <a:solidFill>
-                  <a:srgbClr val="FF6B35"/>
-                </a:solidFill>
-              </a:rPr>
-              <a:t>✦ </a:t>
-            </a:r>
-            <a:r>
-              <a:rPr sz="1000" b="1">
-                <a:solidFill>
-                  <a:srgbClr val="1A3A6E"/>
-                </a:solidFill>
-              </a:rPr>
-              <a:t>BIS Partnership:</a:t>
-            </a:r>
-            <a:r>
-              <a:rPr sz="1000">
-                <a:solidFill>
-                  <a:srgbClr val="333333"/>
-                </a:solidFill>
-              </a:rPr>
-              <a:t> Official data provider status — revenue share on certified leads</a:t>
-            </a:r>
-          </a:p>
-          <a:p>
-            <a:pPr>
-              <a:spcAft>
-                <a:spcPts val="200"/>
-              </a:spcAft>
-            </a:pPr>
-            <a:r>
-              <a:rPr sz="1000">
-                <a:solidFill>
-                  <a:srgbClr val="FF6B35"/>
-                </a:solidFill>
-              </a:rPr>
-              <a:t>✦ </a:t>
-            </a:r>
-            <a:r>
-              <a:rPr sz="1000" b="1">
-                <a:solidFill>
-                  <a:srgbClr val="1A3A6E"/>
-                </a:solidFill>
-              </a:rPr>
-              <a:t>Government Grant:</a:t>
-            </a:r>
-            <a:r>
-              <a:rPr sz="1000">
-                <a:solidFill>
-                  <a:srgbClr val="333333"/>
-                </a:solidFill>
-              </a:rPr>
-              <a:t> Apply under MSME Samadhaan scheme for funding</a:t>
-            </a:r>
-          </a:p>
-        </p:txBody>
-      </p:sp>
+        </p:spPr>
+      </p:pic>
     </p:spTree>
   </p:cSld>
   <p:clrMapOvr>
@@ -11649,7 +7843,7 @@
 </file>
 
 <file path=ppt/slides/slide6.xml><?xml version="1.0" encoding="utf-8"?>
-<p:sld xmlns:a="http://schemas.openxmlformats.org/drawingml/2006/main" xmlns:p="http://schemas.openxmlformats.org/presentationml/2006/main" xmlns:r="http://schemas.openxmlformats.org/officeDocument/2006/relationships">
+<p:sld xmlns:a="http://schemas.openxmlformats.org/drawingml/2006/main" xmlns:r="http://schemas.openxmlformats.org/officeDocument/2006/relationships" xmlns:p="http://schemas.openxmlformats.org/presentationml/2006/main">
   <p:cSld>
     <p:spTree>
       <p:nvGrpSpPr>
@@ -11786,6 +7980,11 @@
               </a:rPr>
               <a:t>YOU</a:t>
             </a:r>
+            <a:endParaRPr sz="4800" b="1">
+              <a:solidFill>
+                <a:srgbClr val="FF6B35"/>
+              </a:solidFill>
+            </a:endParaRPr>
           </a:p>
         </p:txBody>
       </p:sp>
@@ -11864,6 +8063,11 @@
               <a:t>ManakMitra — Making BIS Standards Accessible
 to Every Indian Manufacturer</a:t>
             </a:r>
+            <a:endParaRPr sz="1800">
+              <a:solidFill>
+                <a:srgbClr val="CCCCCC"/>
+              </a:solidFill>
+            </a:endParaRPr>
           </a:p>
         </p:txBody>
       </p:sp>
@@ -11913,6 +8117,7 @@
               <a:rPr sz="2800"/>
               <a:t>👨‍💻</a:t>
             </a:r>
+            <a:endParaRPr sz="2800"/>
           </a:p>
         </p:txBody>
       </p:sp>
@@ -11947,6 +8152,11 @@
               </a:rPr>
               <a:t>Pavan Kumar</a:t>
             </a:r>
+            <a:endParaRPr sz="1600" b="1">
+              <a:solidFill>
+                <a:srgbClr val="FFFFFF"/>
+              </a:solidFill>
+            </a:endParaRPr>
           </a:p>
         </p:txBody>
       </p:sp>
@@ -11981,6 +8191,11 @@
               </a:rPr>
               <a:t>Team Lead / Full Stack Developer</a:t>
             </a:r>
+            <a:endParaRPr sz="1100">
+              <a:solidFill>
+                <a:srgbClr val="AAAAAA"/>
+              </a:solidFill>
+            </a:endParaRPr>
           </a:p>
         </p:txBody>
       </p:sp>
@@ -12040,6 +8255,11 @@
               </a:rPr>
               <a:t>manakmitra-frontend.vercel.app</a:t>
             </a:r>
+            <a:endParaRPr sz="1400" b="1">
+              <a:solidFill>
+                <a:srgbClr val="FF6B35"/>
+              </a:solidFill>
+            </a:endParaRPr>
           </a:p>
         </p:txBody>
       </p:sp>
@@ -12091,6 +8311,11 @@
               </a:rPr>
               <a:t>SIH</a:t>
             </a:r>
+            <a:endParaRPr sz="1200" b="1">
+              <a:solidFill>
+                <a:srgbClr val="FFFFFF"/>
+              </a:solidFill>
+            </a:endParaRPr>
           </a:p>
         </p:txBody>
       </p:sp>
@@ -12126,6 +8351,11 @@
               <a:t>SMART INDIA
 HACKATHON 2026</a:t>
             </a:r>
+            <a:endParaRPr sz="1100" b="1">
+              <a:solidFill>
+                <a:srgbClr val="CCCCCC"/>
+              </a:solidFill>
+            </a:endParaRPr>
           </a:p>
         </p:txBody>
       </p:sp>
@@ -12159,6 +8389,11 @@
               </a:rPr>
               <a:t>@SIH Idea submission — Team Resonant</a:t>
             </a:r>
+            <a:endParaRPr sz="900">
+              <a:solidFill>
+                <a:srgbClr val="666666"/>
+              </a:solidFill>
+            </a:endParaRPr>
           </a:p>
         </p:txBody>
       </p:sp>
@@ -12486,6 +8721,269 @@
       </a:style>
     </a:lnDef>
   </a:objectDefaults>
-  <a:extraClrSchemeLst/>
+  <a:extLst>
+    <a:ext uri="{05A4C25C-085E-4340-85A3-A5531E510DB2}">
+      <thm15:themeFamily xmlns:thm15="http://schemas.microsoft.com/office/thememl/2012/main" name="Office Theme" id="{62F939B6-93AF-4DB8-9C6B-D6C7DFDC589F}" vid="{4A3C46E8-61CC-4603-A589-7422A47A8E4A}"/>
+    </a:ext>
+  </a:extLst>
+</a:theme>
+</file>
+
+<file path=ppt/theme/theme2.xml><?xml version="1.0" encoding="utf-8"?>
+<a:theme xmlns:a="http://schemas.openxmlformats.org/drawingml/2006/main" name="Office Theme">
+  <a:themeElements>
+    <a:clrScheme name="Office">
+      <a:dk1>
+        <a:sysClr val="windowText" lastClr="000000"/>
+      </a:dk1>
+      <a:lt1>
+        <a:sysClr val="window" lastClr="FFFFFF"/>
+      </a:lt1>
+      <a:dk2>
+        <a:srgbClr val="44546A"/>
+      </a:dk2>
+      <a:lt2>
+        <a:srgbClr val="E7E6E6"/>
+      </a:lt2>
+      <a:accent1>
+        <a:srgbClr val="5B9BD5"/>
+      </a:accent1>
+      <a:accent2>
+        <a:srgbClr val="ED7D31"/>
+      </a:accent2>
+      <a:accent3>
+        <a:srgbClr val="A5A5A5"/>
+      </a:accent3>
+      <a:accent4>
+        <a:srgbClr val="FFC000"/>
+      </a:accent4>
+      <a:accent5>
+        <a:srgbClr val="4472C4"/>
+      </a:accent5>
+      <a:accent6>
+        <a:srgbClr val="70AD47"/>
+      </a:accent6>
+      <a:hlink>
+        <a:srgbClr val="0563C1"/>
+      </a:hlink>
+      <a:folHlink>
+        <a:srgbClr val="954F72"/>
+      </a:folHlink>
+    </a:clrScheme>
+    <a:fontScheme name="Office">
+      <a:majorFont>
+        <a:latin typeface="Calibri Light"/>
+        <a:ea typeface=""/>
+        <a:cs typeface=""/>
+        <a:font script="Jpan" typeface="ＭＳ Ｐゴシック"/>
+        <a:font script="Hang" typeface="맑은 고딕"/>
+        <a:font script="Hans" typeface="宋体"/>
+        <a:font script="Hant" typeface="新細明體"/>
+        <a:font script="Arab" typeface="Times New Roman"/>
+        <a:font script="Hebr" typeface="Times New Roman"/>
+        <a:font script="Thai" typeface="Angsana New"/>
+        <a:font script="Ethi" typeface="Nyala"/>
+        <a:font script="Beng" typeface="Vrinda"/>
+        <a:font script="Gujr" typeface="Shruti"/>
+        <a:font script="Khmr" typeface="MoolBoran"/>
+        <a:font script="Knda" typeface="Tunga"/>
+        <a:font script="Guru" typeface="Raavi"/>
+        <a:font script="Cans" typeface="Euphemia"/>
+        <a:font script="Cher" typeface="Plantagenet Cherokee"/>
+        <a:font script="Yiii" typeface="Microsoft Yi Baiti"/>
+        <a:font script="Tibt" typeface="Microsoft Himalaya"/>
+        <a:font script="Thaa" typeface="MV Boli"/>
+        <a:font script="Deva" typeface="Mangal"/>
+        <a:font script="Telu" typeface="Gautami"/>
+        <a:font script="Taml" typeface="Latha"/>
+        <a:font script="Syrc" typeface="Estrangelo Edessa"/>
+        <a:font script="Orya" typeface="Kalinga"/>
+        <a:font script="Mlym" typeface="Kartika"/>
+        <a:font script="Laoo" typeface="DokChampa"/>
+        <a:font script="Sinh" typeface="Iskoola Pota"/>
+        <a:font script="Mong" typeface="Mongolian Baiti"/>
+        <a:font script="Viet" typeface="Times New Roman"/>
+        <a:font script="Uigh" typeface="Microsoft Uighur"/>
+        <a:font script="Geor" typeface="Sylfaen"/>
+      </a:majorFont>
+      <a:minorFont>
+        <a:latin typeface="Calibri"/>
+        <a:ea typeface=""/>
+        <a:cs typeface=""/>
+        <a:font script="Jpan" typeface="ＭＳ Ｐゴシック"/>
+        <a:font script="Hang" typeface="맑은 고딕"/>
+        <a:font script="Hans" typeface="宋体"/>
+        <a:font script="Hant" typeface="新細明體"/>
+        <a:font script="Arab" typeface="Arial"/>
+        <a:font script="Hebr" typeface="Arial"/>
+        <a:font script="Thai" typeface="Cordia New"/>
+        <a:font script="Ethi" typeface="Nyala"/>
+        <a:font script="Beng" typeface="Vrinda"/>
+        <a:font script="Gujr" typeface="Shruti"/>
+        <a:font script="Khmr" typeface="DaunPenh"/>
+        <a:font script="Knda" typeface="Tunga"/>
+        <a:font script="Guru" typeface="Raavi"/>
+        <a:font script="Cans" typeface="Euphemia"/>
+        <a:font script="Cher" typeface="Plantagenet Cherokee"/>
+        <a:font script="Yiii" typeface="Microsoft Yi Baiti"/>
+        <a:font script="Tibt" typeface="Microsoft Himalaya"/>
+        <a:font script="Thaa" typeface="MV Boli"/>
+        <a:font script="Deva" typeface="Mangal"/>
+        <a:font script="Telu" typeface="Gautami"/>
+        <a:font script="Taml" typeface="Latha"/>
+        <a:font script="Syrc" typeface="Estrangelo Edessa"/>
+        <a:font script="Orya" typeface="Kalinga"/>
+        <a:font script="Mlym" typeface="Kartika"/>
+        <a:font script="Laoo" typeface="DokChampa"/>
+        <a:font script="Sinh" typeface="Iskoola Pota"/>
+        <a:font script="Mong" typeface="Mongolian Baiti"/>
+        <a:font script="Viet" typeface="Arial"/>
+        <a:font script="Uigh" typeface="Microsoft Uighur"/>
+        <a:font script="Geor" typeface="Sylfaen"/>
+      </a:minorFont>
+    </a:fontScheme>
+    <a:fmtScheme name="Office">
+      <a:fillStyleLst>
+        <a:solidFill>
+          <a:schemeClr val="phClr"/>
+        </a:solidFill>
+        <a:gradFill rotWithShape="1">
+          <a:gsLst>
+            <a:gs pos="0">
+              <a:schemeClr val="phClr">
+                <a:lumMod val="110000"/>
+                <a:satMod val="105000"/>
+                <a:tint val="67000"/>
+              </a:schemeClr>
+            </a:gs>
+            <a:gs pos="50000">
+              <a:schemeClr val="phClr">
+                <a:lumMod val="105000"/>
+                <a:satMod val="103000"/>
+                <a:tint val="73000"/>
+              </a:schemeClr>
+            </a:gs>
+            <a:gs pos="100000">
+              <a:schemeClr val="phClr">
+                <a:lumMod val="105000"/>
+                <a:satMod val="109000"/>
+                <a:tint val="81000"/>
+              </a:schemeClr>
+            </a:gs>
+          </a:gsLst>
+          <a:lin ang="5400000" scaled="0"/>
+        </a:gradFill>
+        <a:gradFill rotWithShape="1">
+          <a:gsLst>
+            <a:gs pos="0">
+              <a:schemeClr val="phClr">
+                <a:satMod val="103000"/>
+                <a:lumMod val="102000"/>
+                <a:tint val="94000"/>
+              </a:schemeClr>
+            </a:gs>
+            <a:gs pos="50000">
+              <a:schemeClr val="phClr">
+                <a:satMod val="110000"/>
+                <a:lumMod val="100000"/>
+                <a:shade val="100000"/>
+              </a:schemeClr>
+            </a:gs>
+            <a:gs pos="100000">
+              <a:schemeClr val="phClr">
+                <a:lumMod val="99000"/>
+                <a:satMod val="120000"/>
+                <a:shade val="78000"/>
+              </a:schemeClr>
+            </a:gs>
+          </a:gsLst>
+          <a:lin ang="5400000" scaled="0"/>
+        </a:gradFill>
+      </a:fillStyleLst>
+      <a:lnStyleLst>
+        <a:ln w="6350" cap="flat" cmpd="sng" algn="ctr">
+          <a:solidFill>
+            <a:schemeClr val="phClr"/>
+          </a:solidFill>
+          <a:prstDash val="solid"/>
+          <a:miter lim="800000"/>
+        </a:ln>
+        <a:ln w="12700" cap="flat" cmpd="sng" algn="ctr">
+          <a:solidFill>
+            <a:schemeClr val="phClr"/>
+          </a:solidFill>
+          <a:prstDash val="solid"/>
+          <a:miter lim="800000"/>
+        </a:ln>
+        <a:ln w="19050" cap="flat" cmpd="sng" algn="ctr">
+          <a:solidFill>
+            <a:schemeClr val="phClr"/>
+          </a:solidFill>
+          <a:prstDash val="solid"/>
+          <a:miter lim="800000"/>
+        </a:ln>
+      </a:lnStyleLst>
+      <a:effectStyleLst>
+        <a:effectStyle>
+          <a:effectLst/>
+        </a:effectStyle>
+        <a:effectStyle>
+          <a:effectLst/>
+        </a:effectStyle>
+        <a:effectStyle>
+          <a:effectLst>
+            <a:outerShdw blurRad="57150" dist="19050" dir="5400000" algn="ctr" rotWithShape="0">
+              <a:srgbClr val="000000">
+                <a:alpha val="63000"/>
+              </a:srgbClr>
+            </a:outerShdw>
+          </a:effectLst>
+        </a:effectStyle>
+      </a:effectStyleLst>
+      <a:bgFillStyleLst>
+        <a:solidFill>
+          <a:schemeClr val="phClr"/>
+        </a:solidFill>
+        <a:solidFill>
+          <a:schemeClr val="phClr">
+            <a:tint val="95000"/>
+            <a:satMod val="170000"/>
+          </a:schemeClr>
+        </a:solidFill>
+        <a:gradFill rotWithShape="1">
+          <a:gsLst>
+            <a:gs pos="0">
+              <a:schemeClr val="phClr">
+                <a:tint val="93000"/>
+                <a:satMod val="150000"/>
+                <a:shade val="98000"/>
+                <a:lumMod val="102000"/>
+              </a:schemeClr>
+            </a:gs>
+            <a:gs pos="50000">
+              <a:schemeClr val="phClr">
+                <a:tint val="98000"/>
+                <a:satMod val="130000"/>
+                <a:shade val="90000"/>
+                <a:lumMod val="103000"/>
+              </a:schemeClr>
+            </a:gs>
+            <a:gs pos="100000">
+              <a:schemeClr val="phClr">
+                <a:shade val="63000"/>
+                <a:satMod val="120000"/>
+              </a:schemeClr>
+            </a:gs>
+          </a:gsLst>
+          <a:lin ang="5400000" scaled="0"/>
+        </a:gradFill>
+      </a:bgFillStyleLst>
+    </a:fmtScheme>
+  </a:themeElements>
+  <a:extLst>
+    <a:ext uri="{05A4C25C-085E-4340-85A3-A5531E510DB2}">
+      <thm15:themeFamily xmlns:thm15="http://schemas.microsoft.com/office/thememl/2012/main" name="Office Theme" id="{62F939B6-93AF-4DB8-9C6B-D6C7DFDC589F}" vid="{4A3C46E8-61CC-4603-A589-7422A47A8E4A}"/>
+    </a:ext>
+  </a:extLst>
 </a:theme>
 </file>